--- a/Java Projects.pptx
+++ b/Java Projects.pptx
@@ -10,15 +10,14 @@
     <p:sldId id="261" r:id="rId4"/>
     <p:sldId id="262" r:id="rId5"/>
     <p:sldId id="264" r:id="rId6"/>
-    <p:sldId id="273" r:id="rId7"/>
-    <p:sldId id="263" r:id="rId8"/>
-    <p:sldId id="266" r:id="rId9"/>
-    <p:sldId id="274" r:id="rId10"/>
-    <p:sldId id="272" r:id="rId11"/>
-    <p:sldId id="270" r:id="rId12"/>
-    <p:sldId id="265" r:id="rId13"/>
-    <p:sldId id="269" r:id="rId14"/>
-    <p:sldId id="268" r:id="rId15"/>
+    <p:sldId id="263" r:id="rId7"/>
+    <p:sldId id="266" r:id="rId8"/>
+    <p:sldId id="271" r:id="rId9"/>
+    <p:sldId id="272" r:id="rId10"/>
+    <p:sldId id="270" r:id="rId11"/>
+    <p:sldId id="265" r:id="rId12"/>
+    <p:sldId id="269" r:id="rId13"/>
+    <p:sldId id="268" r:id="rId14"/>
   </p:sldIdLst>
   <p:sldSz cx="12192000" cy="6858000"/>
   <p:notesSz cx="6858000" cy="9144000"/>
@@ -295,9 +294,9 @@
           <a:p>
             <a:fld id="{7FB84957-0AE5-456C-9E6D-66714B98FD78}" type="datetimeFigureOut">
               <a:rPr lang="en-IN" smtClean="0"/>
-              <a:t>10-02-26</a:t>
+              <a:t>28-03-2026</a:t>
             </a:fld>
-            <a:endParaRPr lang="en-IN" dirty="0"/>
+            <a:endParaRPr lang="en-IN"/>
           </a:p>
         </p:txBody>
       </p:sp>
@@ -321,7 +320,7 @@
           <a:bodyPr/>
           <a:lstStyle/>
           <a:p>
-            <a:endParaRPr lang="en-IN" dirty="0"/>
+            <a:endParaRPr lang="en-IN"/>
           </a:p>
         </p:txBody>
       </p:sp>
@@ -349,7 +348,7 @@
               <a:rPr lang="en-IN" smtClean="0"/>
               <a:t>‹#›</a:t>
             </a:fld>
-            <a:endParaRPr lang="en-IN" dirty="0"/>
+            <a:endParaRPr lang="en-IN"/>
           </a:p>
         </p:txBody>
       </p:sp>
@@ -485,9 +484,10 @@
           </a:lstStyle>
           <a:p>
             <a:r>
-              <a:rPr lang="en-US" dirty="0"/>
+              <a:rPr lang="en-US"/>
               <a:t>Click icon to add picture</a:t>
             </a:r>
+            <a:endParaRPr lang="en-US" dirty="0"/>
           </a:p>
         </p:txBody>
       </p:sp>
@@ -573,9 +573,9 @@
           <a:p>
             <a:fld id="{7FB84957-0AE5-456C-9E6D-66714B98FD78}" type="datetimeFigureOut">
               <a:rPr lang="en-IN" smtClean="0"/>
-              <a:t>10-02-26</a:t>
+              <a:t>28-03-2026</a:t>
             </a:fld>
-            <a:endParaRPr lang="en-IN" dirty="0"/>
+            <a:endParaRPr lang="en-IN"/>
           </a:p>
         </p:txBody>
       </p:sp>
@@ -594,7 +594,7 @@
           <a:bodyPr/>
           <a:lstStyle/>
           <a:p>
-            <a:endParaRPr lang="en-IN" dirty="0"/>
+            <a:endParaRPr lang="en-IN"/>
           </a:p>
         </p:txBody>
       </p:sp>
@@ -617,7 +617,7 @@
               <a:rPr lang="en-IN" smtClean="0"/>
               <a:t>‹#›</a:t>
             </a:fld>
-            <a:endParaRPr lang="en-IN" dirty="0"/>
+            <a:endParaRPr lang="en-IN"/>
           </a:p>
         </p:txBody>
       </p:sp>
@@ -804,9 +804,9 @@
           <a:p>
             <a:fld id="{7FB84957-0AE5-456C-9E6D-66714B98FD78}" type="datetimeFigureOut">
               <a:rPr lang="en-IN" smtClean="0"/>
-              <a:t>10-02-26</a:t>
+              <a:t>28-03-2026</a:t>
             </a:fld>
-            <a:endParaRPr lang="en-IN" dirty="0"/>
+            <a:endParaRPr lang="en-IN"/>
           </a:p>
         </p:txBody>
       </p:sp>
@@ -830,7 +830,7 @@
           <a:bodyPr/>
           <a:lstStyle/>
           <a:p>
-            <a:endParaRPr lang="en-IN" dirty="0"/>
+            <a:endParaRPr lang="en-IN"/>
           </a:p>
         </p:txBody>
       </p:sp>
@@ -858,7 +858,7 @@
               <a:rPr lang="en-IN" smtClean="0"/>
               <a:t>‹#›</a:t>
             </a:fld>
-            <a:endParaRPr lang="en-IN" dirty="0"/>
+            <a:endParaRPr lang="en-IN"/>
           </a:p>
         </p:txBody>
       </p:sp>
@@ -1114,9 +1114,9 @@
           <a:p>
             <a:fld id="{7FB84957-0AE5-456C-9E6D-66714B98FD78}" type="datetimeFigureOut">
               <a:rPr lang="en-IN" smtClean="0"/>
-              <a:t>10-02-26</a:t>
+              <a:t>28-03-2026</a:t>
             </a:fld>
-            <a:endParaRPr lang="en-IN" dirty="0"/>
+            <a:endParaRPr lang="en-IN"/>
           </a:p>
         </p:txBody>
       </p:sp>
@@ -1140,7 +1140,7 @@
           <a:bodyPr/>
           <a:lstStyle/>
           <a:p>
-            <a:endParaRPr lang="en-IN" dirty="0"/>
+            <a:endParaRPr lang="en-IN"/>
           </a:p>
         </p:txBody>
       </p:sp>
@@ -1168,7 +1168,7 @@
               <a:rPr lang="en-IN" smtClean="0"/>
               <a:t>‹#›</a:t>
             </a:fld>
-            <a:endParaRPr lang="en-IN" dirty="0"/>
+            <a:endParaRPr lang="en-IN"/>
           </a:p>
         </p:txBody>
       </p:sp>
@@ -1587,9 +1587,9 @@
           <a:p>
             <a:fld id="{7FB84957-0AE5-456C-9E6D-66714B98FD78}" type="datetimeFigureOut">
               <a:rPr lang="en-IN" smtClean="0"/>
-              <a:t>10-02-26</a:t>
+              <a:t>28-03-2026</a:t>
             </a:fld>
-            <a:endParaRPr lang="en-IN" dirty="0"/>
+            <a:endParaRPr lang="en-IN"/>
           </a:p>
         </p:txBody>
       </p:sp>
@@ -1613,7 +1613,7 @@
           <a:bodyPr/>
           <a:lstStyle/>
           <a:p>
-            <a:endParaRPr lang="en-IN" dirty="0"/>
+            <a:endParaRPr lang="en-IN"/>
           </a:p>
         </p:txBody>
       </p:sp>
@@ -1641,7 +1641,7 @@
               <a:rPr lang="en-IN" smtClean="0"/>
               <a:t>‹#›</a:t>
             </a:fld>
-            <a:endParaRPr lang="en-IN" dirty="0"/>
+            <a:endParaRPr lang="en-IN"/>
           </a:p>
         </p:txBody>
       </p:sp>
@@ -2134,9 +2134,9 @@
           <a:p>
             <a:fld id="{7FB84957-0AE5-456C-9E6D-66714B98FD78}" type="datetimeFigureOut">
               <a:rPr lang="en-IN" smtClean="0"/>
-              <a:t>10-02-26</a:t>
+              <a:t>28-03-2026</a:t>
             </a:fld>
-            <a:endParaRPr lang="en-IN" dirty="0"/>
+            <a:endParaRPr lang="en-IN"/>
           </a:p>
         </p:txBody>
       </p:sp>
@@ -2155,7 +2155,7 @@
           <a:bodyPr/>
           <a:lstStyle/>
           <a:p>
-            <a:endParaRPr lang="en-IN" dirty="0"/>
+            <a:endParaRPr lang="en-IN"/>
           </a:p>
         </p:txBody>
       </p:sp>
@@ -2178,7 +2178,7 @@
               <a:rPr lang="en-IN" smtClean="0"/>
               <a:t>‹#›</a:t>
             </a:fld>
-            <a:endParaRPr lang="en-IN" dirty="0"/>
+            <a:endParaRPr lang="en-IN"/>
           </a:p>
         </p:txBody>
       </p:sp>
@@ -2383,9 +2383,10 @@
           </a:lstStyle>
           <a:p>
             <a:r>
-              <a:rPr lang="en-US" dirty="0"/>
+              <a:rPr lang="en-US"/>
               <a:t>Click icon to add picture</a:t>
             </a:r>
+            <a:endParaRPr lang="en-US" dirty="0"/>
           </a:p>
         </p:txBody>
       </p:sp>
@@ -2599,9 +2600,10 @@
           </a:lstStyle>
           <a:p>
             <a:r>
-              <a:rPr lang="en-US" dirty="0"/>
+              <a:rPr lang="en-US"/>
               <a:t>Click icon to add picture</a:t>
             </a:r>
+            <a:endParaRPr lang="en-US" dirty="0"/>
           </a:p>
         </p:txBody>
       </p:sp>
@@ -2815,9 +2817,10 @@
           </a:lstStyle>
           <a:p>
             <a:r>
-              <a:rPr lang="en-US" dirty="0"/>
+              <a:rPr lang="en-US"/>
               <a:t>Click icon to add picture</a:t>
             </a:r>
+            <a:endParaRPr lang="en-US" dirty="0"/>
           </a:p>
         </p:txBody>
       </p:sp>
@@ -2905,9 +2908,9 @@
           <a:p>
             <a:fld id="{7FB84957-0AE5-456C-9E6D-66714B98FD78}" type="datetimeFigureOut">
               <a:rPr lang="en-IN" smtClean="0"/>
-              <a:t>10-02-26</a:t>
+              <a:t>28-03-2026</a:t>
             </a:fld>
-            <a:endParaRPr lang="en-IN" dirty="0"/>
+            <a:endParaRPr lang="en-IN"/>
           </a:p>
         </p:txBody>
       </p:sp>
@@ -2926,7 +2929,7 @@
           <a:bodyPr/>
           <a:lstStyle/>
           <a:p>
-            <a:endParaRPr lang="en-IN" dirty="0"/>
+            <a:endParaRPr lang="en-IN"/>
           </a:p>
         </p:txBody>
       </p:sp>
@@ -2949,7 +2952,7 @@
               <a:rPr lang="en-IN" smtClean="0"/>
               <a:t>‹#›</a:t>
             </a:fld>
-            <a:endParaRPr lang="en-IN" dirty="0"/>
+            <a:endParaRPr lang="en-IN"/>
           </a:p>
         </p:txBody>
       </p:sp>
@@ -3080,9 +3083,9 @@
           <a:p>
             <a:fld id="{7FB84957-0AE5-456C-9E6D-66714B98FD78}" type="datetimeFigureOut">
               <a:rPr lang="en-IN" smtClean="0"/>
-              <a:t>10-02-26</a:t>
+              <a:t>28-03-2026</a:t>
             </a:fld>
-            <a:endParaRPr lang="en-IN" dirty="0"/>
+            <a:endParaRPr lang="en-IN"/>
           </a:p>
         </p:txBody>
       </p:sp>
@@ -3101,7 +3104,7 @@
           <a:bodyPr/>
           <a:lstStyle/>
           <a:p>
-            <a:endParaRPr lang="en-IN" dirty="0"/>
+            <a:endParaRPr lang="en-IN"/>
           </a:p>
         </p:txBody>
       </p:sp>
@@ -3124,7 +3127,7 @@
               <a:rPr lang="en-IN" smtClean="0"/>
               <a:t>‹#›</a:t>
             </a:fld>
-            <a:endParaRPr lang="en-IN" dirty="0"/>
+            <a:endParaRPr lang="en-IN"/>
           </a:p>
         </p:txBody>
       </p:sp>
@@ -3315,9 +3318,9 @@
           <a:p>
             <a:fld id="{7FB84957-0AE5-456C-9E6D-66714B98FD78}" type="datetimeFigureOut">
               <a:rPr lang="en-IN" smtClean="0"/>
-              <a:t>10-02-26</a:t>
+              <a:t>28-03-2026</a:t>
             </a:fld>
-            <a:endParaRPr lang="en-IN" dirty="0"/>
+            <a:endParaRPr lang="en-IN"/>
           </a:p>
         </p:txBody>
       </p:sp>
@@ -3341,7 +3344,7 @@
           <a:bodyPr/>
           <a:lstStyle/>
           <a:p>
-            <a:endParaRPr lang="en-IN" dirty="0"/>
+            <a:endParaRPr lang="en-IN"/>
           </a:p>
         </p:txBody>
       </p:sp>
@@ -3369,7 +3372,7 @@
               <a:rPr lang="en-IN" smtClean="0"/>
               <a:t>‹#›</a:t>
             </a:fld>
-            <a:endParaRPr lang="en-IN" dirty="0"/>
+            <a:endParaRPr lang="en-IN"/>
           </a:p>
         </p:txBody>
       </p:sp>
@@ -3507,9 +3510,9 @@
           <a:p>
             <a:fld id="{7FB84957-0AE5-456C-9E6D-66714B98FD78}" type="datetimeFigureOut">
               <a:rPr lang="en-IN" smtClean="0"/>
-              <a:t>10-02-26</a:t>
+              <a:t>28-03-2026</a:t>
             </a:fld>
-            <a:endParaRPr lang="en-IN" dirty="0"/>
+            <a:endParaRPr lang="en-IN"/>
           </a:p>
         </p:txBody>
       </p:sp>
@@ -3528,7 +3531,7 @@
           <a:bodyPr/>
           <a:lstStyle/>
           <a:p>
-            <a:endParaRPr lang="en-IN" dirty="0"/>
+            <a:endParaRPr lang="en-IN"/>
           </a:p>
         </p:txBody>
       </p:sp>
@@ -3551,7 +3554,7 @@
               <a:rPr lang="en-IN" smtClean="0"/>
               <a:t>‹#›</a:t>
             </a:fld>
-            <a:endParaRPr lang="en-IN" dirty="0"/>
+            <a:endParaRPr lang="en-IN"/>
           </a:p>
         </p:txBody>
       </p:sp>
@@ -3808,9 +3811,9 @@
           <a:p>
             <a:fld id="{7FB84957-0AE5-456C-9E6D-66714B98FD78}" type="datetimeFigureOut">
               <a:rPr lang="en-IN" smtClean="0"/>
-              <a:t>10-02-26</a:t>
+              <a:t>28-03-2026</a:t>
             </a:fld>
-            <a:endParaRPr lang="en-IN" dirty="0"/>
+            <a:endParaRPr lang="en-IN"/>
           </a:p>
         </p:txBody>
       </p:sp>
@@ -3834,7 +3837,7 @@
           <a:bodyPr/>
           <a:lstStyle/>
           <a:p>
-            <a:endParaRPr lang="en-IN" dirty="0"/>
+            <a:endParaRPr lang="en-IN"/>
           </a:p>
         </p:txBody>
       </p:sp>
@@ -3862,7 +3865,7 @@
               <a:rPr lang="en-IN" smtClean="0"/>
               <a:t>‹#›</a:t>
             </a:fld>
-            <a:endParaRPr lang="en-IN" dirty="0"/>
+            <a:endParaRPr lang="en-IN"/>
           </a:p>
         </p:txBody>
       </p:sp>
@@ -4062,9 +4065,9 @@
           <a:p>
             <a:fld id="{7FB84957-0AE5-456C-9E6D-66714B98FD78}" type="datetimeFigureOut">
               <a:rPr lang="en-IN" smtClean="0"/>
-              <a:t>10-02-26</a:t>
+              <a:t>28-03-2026</a:t>
             </a:fld>
-            <a:endParaRPr lang="en-IN" dirty="0"/>
+            <a:endParaRPr lang="en-IN"/>
           </a:p>
         </p:txBody>
       </p:sp>
@@ -4083,7 +4086,7 @@
           <a:bodyPr/>
           <a:lstStyle/>
           <a:p>
-            <a:endParaRPr lang="en-IN" dirty="0"/>
+            <a:endParaRPr lang="en-IN"/>
           </a:p>
         </p:txBody>
       </p:sp>
@@ -4106,7 +4109,7 @@
               <a:rPr lang="en-IN" smtClean="0"/>
               <a:t>‹#›</a:t>
             </a:fld>
-            <a:endParaRPr lang="en-IN" dirty="0"/>
+            <a:endParaRPr lang="en-IN"/>
           </a:p>
         </p:txBody>
       </p:sp>
@@ -4453,9 +4456,9 @@
           <a:p>
             <a:fld id="{7FB84957-0AE5-456C-9E6D-66714B98FD78}" type="datetimeFigureOut">
               <a:rPr lang="en-IN" smtClean="0"/>
-              <a:t>10-02-26</a:t>
+              <a:t>28-03-2026</a:t>
             </a:fld>
-            <a:endParaRPr lang="en-IN" dirty="0"/>
+            <a:endParaRPr lang="en-IN"/>
           </a:p>
         </p:txBody>
       </p:sp>
@@ -4474,7 +4477,7 @@
           <a:bodyPr/>
           <a:lstStyle/>
           <a:p>
-            <a:endParaRPr lang="en-IN" dirty="0"/>
+            <a:endParaRPr lang="en-IN"/>
           </a:p>
         </p:txBody>
       </p:sp>
@@ -4497,7 +4500,7 @@
               <a:rPr lang="en-IN" smtClean="0"/>
               <a:t>‹#›</a:t>
             </a:fld>
-            <a:endParaRPr lang="en-IN" dirty="0"/>
+            <a:endParaRPr lang="en-IN"/>
           </a:p>
         </p:txBody>
       </p:sp>
@@ -4583,9 +4586,9 @@
           <a:p>
             <a:fld id="{7FB84957-0AE5-456C-9E6D-66714B98FD78}" type="datetimeFigureOut">
               <a:rPr lang="en-IN" smtClean="0"/>
-              <a:t>10-02-26</a:t>
+              <a:t>28-03-2026</a:t>
             </a:fld>
-            <a:endParaRPr lang="en-IN" dirty="0"/>
+            <a:endParaRPr lang="en-IN"/>
           </a:p>
         </p:txBody>
       </p:sp>
@@ -4604,7 +4607,7 @@
           <a:bodyPr/>
           <a:lstStyle/>
           <a:p>
-            <a:endParaRPr lang="en-IN" dirty="0"/>
+            <a:endParaRPr lang="en-IN"/>
           </a:p>
         </p:txBody>
       </p:sp>
@@ -4627,7 +4630,7 @@
               <a:rPr lang="en-IN" smtClean="0"/>
               <a:t>‹#›</a:t>
             </a:fld>
-            <a:endParaRPr lang="en-IN" dirty="0"/>
+            <a:endParaRPr lang="en-IN"/>
           </a:p>
         </p:txBody>
       </p:sp>
@@ -4690,9 +4693,9 @@
           <a:p>
             <a:fld id="{7FB84957-0AE5-456C-9E6D-66714B98FD78}" type="datetimeFigureOut">
               <a:rPr lang="en-IN" smtClean="0"/>
-              <a:t>10-02-26</a:t>
+              <a:t>28-03-2026</a:t>
             </a:fld>
-            <a:endParaRPr lang="en-IN" dirty="0"/>
+            <a:endParaRPr lang="en-IN"/>
           </a:p>
         </p:txBody>
       </p:sp>
@@ -4711,7 +4714,7 @@
           <a:bodyPr/>
           <a:lstStyle/>
           <a:p>
-            <a:endParaRPr lang="en-IN" dirty="0"/>
+            <a:endParaRPr lang="en-IN"/>
           </a:p>
         </p:txBody>
       </p:sp>
@@ -4734,7 +4737,7 @@
               <a:rPr lang="en-IN" smtClean="0"/>
               <a:t>‹#›</a:t>
             </a:fld>
-            <a:endParaRPr lang="en-IN" dirty="0"/>
+            <a:endParaRPr lang="en-IN"/>
           </a:p>
         </p:txBody>
       </p:sp>
@@ -4951,9 +4954,9 @@
           <a:p>
             <a:fld id="{7FB84957-0AE5-456C-9E6D-66714B98FD78}" type="datetimeFigureOut">
               <a:rPr lang="en-IN" smtClean="0"/>
-              <a:t>10-02-26</a:t>
+              <a:t>28-03-2026</a:t>
             </a:fld>
-            <a:endParaRPr lang="en-IN" dirty="0"/>
+            <a:endParaRPr lang="en-IN"/>
           </a:p>
         </p:txBody>
       </p:sp>
@@ -4972,7 +4975,7 @@
           <a:bodyPr/>
           <a:lstStyle/>
           <a:p>
-            <a:endParaRPr lang="en-IN" dirty="0"/>
+            <a:endParaRPr lang="en-IN"/>
           </a:p>
         </p:txBody>
       </p:sp>
@@ -4995,7 +4998,7 @@
               <a:rPr lang="en-IN" smtClean="0"/>
               <a:t>‹#›</a:t>
             </a:fld>
-            <a:endParaRPr lang="en-IN" dirty="0"/>
+            <a:endParaRPr lang="en-IN"/>
           </a:p>
         </p:txBody>
       </p:sp>
@@ -5131,9 +5134,10 @@
           </a:lstStyle>
           <a:p>
             <a:r>
-              <a:rPr lang="en-US" dirty="0"/>
+              <a:rPr lang="en-US"/>
               <a:t>Click icon to add picture</a:t>
             </a:r>
+            <a:endParaRPr lang="en-US" dirty="0"/>
           </a:p>
         </p:txBody>
       </p:sp>
@@ -5219,9 +5223,9 @@
           <a:p>
             <a:fld id="{7FB84957-0AE5-456C-9E6D-66714B98FD78}" type="datetimeFigureOut">
               <a:rPr lang="en-IN" smtClean="0"/>
-              <a:t>10-02-26</a:t>
+              <a:t>28-03-2026</a:t>
             </a:fld>
-            <a:endParaRPr lang="en-IN" dirty="0"/>
+            <a:endParaRPr lang="en-IN"/>
           </a:p>
         </p:txBody>
       </p:sp>
@@ -5240,7 +5244,7 @@
           <a:bodyPr/>
           <a:lstStyle/>
           <a:p>
-            <a:endParaRPr lang="en-IN" dirty="0"/>
+            <a:endParaRPr lang="en-IN"/>
           </a:p>
         </p:txBody>
       </p:sp>
@@ -5263,7 +5267,7 @@
               <a:rPr lang="en-IN" smtClean="0"/>
               <a:t>‹#›</a:t>
             </a:fld>
-            <a:endParaRPr lang="en-IN" dirty="0"/>
+            <a:endParaRPr lang="en-IN"/>
           </a:p>
         </p:txBody>
       </p:sp>
@@ -5474,9 +5478,9 @@
           <a:p>
             <a:fld id="{7FB84957-0AE5-456C-9E6D-66714B98FD78}" type="datetimeFigureOut">
               <a:rPr lang="en-IN" smtClean="0"/>
-              <a:t>10-02-26</a:t>
+              <a:t>28-03-2026</a:t>
             </a:fld>
-            <a:endParaRPr lang="en-IN" dirty="0"/>
+            <a:endParaRPr lang="en-IN"/>
           </a:p>
         </p:txBody>
       </p:sp>
@@ -5513,7 +5517,7 @@
             </a:lvl1pPr>
           </a:lstStyle>
           <a:p>
-            <a:endParaRPr lang="en-IN" dirty="0"/>
+            <a:endParaRPr lang="en-IN"/>
           </a:p>
         </p:txBody>
       </p:sp>
@@ -5554,7 +5558,7 @@
               <a:rPr lang="en-IN" smtClean="0"/>
               <a:t>‹#›</a:t>
             </a:fld>
-            <a:endParaRPr lang="en-IN" dirty="0"/>
+            <a:endParaRPr lang="en-IN"/>
           </a:p>
         </p:txBody>
       </p:sp>
@@ -6013,177 +6017,6 @@
         <p:cNvPr id="1" name="">
           <a:extLst>
             <a:ext uri="{FF2B5EF4-FFF2-40B4-BE49-F238E27FC236}">
-              <a16:creationId xmlns:a16="http://schemas.microsoft.com/office/drawing/2014/main" id="{C7861A59-3E07-4711-8D5F-3198C3B64637}"/>
-            </a:ext>
-          </a:extLst>
-        </p:cNvPr>
-        <p:cNvGrpSpPr/>
-        <p:nvPr/>
-      </p:nvGrpSpPr>
-      <p:grpSpPr>
-        <a:xfrm>
-          <a:off x="0" y="0"/>
-          <a:ext cx="0" cy="0"/>
-          <a:chOff x="0" y="0"/>
-          <a:chExt cx="0" cy="0"/>
-        </a:xfrm>
-      </p:grpSpPr>
-      <p:sp>
-        <p:nvSpPr>
-          <p:cNvPr id="3" name="Content Placeholder 2">
-            <a:extLst>
-              <a:ext uri="{FF2B5EF4-FFF2-40B4-BE49-F238E27FC236}">
-                <a16:creationId xmlns:a16="http://schemas.microsoft.com/office/drawing/2014/main" id="{D0576FAB-B8E8-6CFF-F563-D300BA11CF22}"/>
-              </a:ext>
-            </a:extLst>
-          </p:cNvPr>
-          <p:cNvSpPr>
-            <a:spLocks noGrp="1"/>
-          </p:cNvSpPr>
-          <p:nvPr>
-            <p:ph idx="1"/>
-          </p:nvPr>
-        </p:nvSpPr>
-        <p:spPr>
-          <a:xfrm>
-            <a:off x="1097280" y="975360"/>
-            <a:ext cx="10622280" cy="5596036"/>
-          </a:xfrm>
-        </p:spPr>
-        <p:txBody>
-          <a:bodyPr numCol="2"/>
-          <a:lstStyle/>
-          <a:p>
-            <a:pPr marL="0" indent="0">
-              <a:buNone/>
-            </a:pPr>
-            <a:r>
-              <a:rPr lang="en-US" b="1" dirty="0">
-                <a:latin typeface="Times New Roman" panose="02020603050405020304" pitchFamily="18" charset="0"/>
-              </a:rPr>
-              <a:t>Output for Project2 is :   																																																																												</a:t>
-            </a:r>
-          </a:p>
-          <a:p>
-            <a:pPr marL="0" indent="0">
-              <a:buNone/>
-            </a:pPr>
-            <a:r>
-              <a:rPr lang="en-US" b="1" dirty="0">
-                <a:latin typeface="Times New Roman" panose="02020603050405020304" pitchFamily="18" charset="0"/>
-              </a:rPr>
-              <a:t>i. Time ahead by Same Day				</a:t>
-            </a:r>
-          </a:p>
-          <a:p>
-            <a:pPr marL="0" indent="0">
-              <a:buNone/>
-            </a:pPr>
-            <a:r>
-              <a:rPr lang="en-US" b="1" dirty="0">
-                <a:latin typeface="Times New Roman" panose="02020603050405020304" pitchFamily="18" charset="0"/>
-              </a:rPr>
-              <a:t>																																																																												ii. Time ahead by Next Day</a:t>
-            </a:r>
-          </a:p>
-        </p:txBody>
-      </p:sp>
-      <p:pic>
-        <p:nvPicPr>
-          <p:cNvPr id="5" name="Picture 4">
-            <a:extLst>
-              <a:ext uri="{FF2B5EF4-FFF2-40B4-BE49-F238E27FC236}">
-                <a16:creationId xmlns:a16="http://schemas.microsoft.com/office/drawing/2014/main" id="{511D1820-5C67-7E03-BA0F-A360ED7B92EB}"/>
-              </a:ext>
-            </a:extLst>
-          </p:cNvPr>
-          <p:cNvPicPr>
-            <a:picLocks noChangeAspect="1"/>
-          </p:cNvPicPr>
-          <p:nvPr/>
-        </p:nvPicPr>
-        <p:blipFill>
-          <a:blip r:embed="rId2">
-            <a:extLst>
-              <a:ext uri="{28A0092B-C50C-407E-A947-70E740481C1C}">
-                <a14:useLocalDpi xmlns:a14="http://schemas.microsoft.com/office/drawing/2010/main" val="0"/>
-              </a:ext>
-            </a:extLst>
-          </a:blip>
-          <a:stretch>
-            <a:fillRect/>
-          </a:stretch>
-        </p:blipFill>
-        <p:spPr>
-          <a:xfrm>
-            <a:off x="1097281" y="1596045"/>
-            <a:ext cx="4998719" cy="4139737"/>
-          </a:xfrm>
-          <a:prstGeom prst="rect">
-            <a:avLst/>
-          </a:prstGeom>
-        </p:spPr>
-      </p:pic>
-      <p:pic>
-        <p:nvPicPr>
-          <p:cNvPr id="7" name="Picture 6">
-            <a:extLst>
-              <a:ext uri="{FF2B5EF4-FFF2-40B4-BE49-F238E27FC236}">
-                <a16:creationId xmlns:a16="http://schemas.microsoft.com/office/drawing/2014/main" id="{9DAA671A-0DD6-6507-03E7-A07214839548}"/>
-              </a:ext>
-            </a:extLst>
-          </p:cNvPr>
-          <p:cNvPicPr>
-            <a:picLocks noChangeAspect="1"/>
-          </p:cNvPicPr>
-          <p:nvPr/>
-        </p:nvPicPr>
-        <p:blipFill>
-          <a:blip r:embed="rId3">
-            <a:extLst>
-              <a:ext uri="{28A0092B-C50C-407E-A947-70E740481C1C}">
-                <a14:useLocalDpi xmlns:a14="http://schemas.microsoft.com/office/drawing/2010/main" val="0"/>
-              </a:ext>
-            </a:extLst>
-          </a:blip>
-          <a:stretch>
-            <a:fillRect/>
-          </a:stretch>
-        </p:blipFill>
-        <p:spPr>
-          <a:xfrm>
-            <a:off x="6533805" y="1596045"/>
-            <a:ext cx="5185756" cy="4139737"/>
-          </a:xfrm>
-          <a:prstGeom prst="rect">
-            <a:avLst/>
-          </a:prstGeom>
-        </p:spPr>
-      </p:pic>
-    </p:spTree>
-    <p:extLst>
-      <p:ext uri="{BB962C8B-B14F-4D97-AF65-F5344CB8AC3E}">
-        <p14:creationId xmlns:p14="http://schemas.microsoft.com/office/powerpoint/2010/main" val="3129963740"/>
-      </p:ext>
-    </p:extLst>
-  </p:cSld>
-  <p:clrMapOvr>
-    <a:masterClrMapping/>
-  </p:clrMapOvr>
-  <p:transition spd="slow" advClick="0" advTm="5000">
-    <p:fade/>
-  </p:transition>
-</p:sld>
-</file>
-
-<file path=ppt/slides/slide11.xml><?xml version="1.0" encoding="utf-8"?>
-<p:sld xmlns:a="http://schemas.openxmlformats.org/drawingml/2006/main" xmlns:r="http://schemas.openxmlformats.org/officeDocument/2006/relationships" xmlns:p="http://schemas.openxmlformats.org/presentationml/2006/main">
-  <p:cSld>
-    <p:spTree>
-      <p:nvGrpSpPr>
-        <p:cNvPr id="1" name="">
-          <a:extLst>
-            <a:ext uri="{FF2B5EF4-FFF2-40B4-BE49-F238E27FC236}">
               <a16:creationId xmlns:a16="http://schemas.microsoft.com/office/drawing/2014/main" id="{DB1DA732-D347-3E61-E944-736D7605BF9D}"/>
             </a:ext>
           </a:extLst>
@@ -6273,8 +6106,8 @@
         </p:nvSpPr>
         <p:spPr>
           <a:xfrm>
-            <a:off x="731520" y="975360"/>
-            <a:ext cx="10988040" cy="5596036"/>
+            <a:off x="1097280" y="975360"/>
+            <a:ext cx="10622280" cy="5596036"/>
           </a:xfrm>
         </p:spPr>
         <p:txBody>
@@ -6294,74 +6127,6 @@
                 <a:latin typeface="Times New Roman" panose="02020603050405020304" pitchFamily="18" charset="0"/>
               </a:rPr>
               <a:t>In this project we add many Books and perform operations as View book list, add book, update book, remove book and exit.</a:t>
-            </a:r>
-          </a:p>
-          <a:p>
-            <a:r>
-              <a:rPr lang="en-IN" sz="2400" dirty="0">
-                <a:latin typeface="Times New Roman" panose="02020603050405020304" pitchFamily="18" charset="0"/>
-              </a:rPr>
-              <a:t>The  Library class is defined and then few methods are added such as</a:t>
-            </a:r>
-          </a:p>
-          <a:p>
-            <a:pPr marL="0" indent="0">
-              <a:buNone/>
-            </a:pPr>
-            <a:r>
-              <a:rPr lang="en-IN" sz="2400" dirty="0">
-                <a:latin typeface="Times New Roman" panose="02020603050405020304" pitchFamily="18" charset="0"/>
-              </a:rPr>
-              <a:t> addBook: Add a new Book.</a:t>
-            </a:r>
-          </a:p>
-          <a:p>
-            <a:pPr marL="0" indent="0">
-              <a:buNone/>
-            </a:pPr>
-            <a:r>
-              <a:rPr lang="en-IN" sz="2400" dirty="0">
-                <a:latin typeface="Times New Roman" panose="02020603050405020304" pitchFamily="18" charset="0"/>
-              </a:rPr>
-              <a:t> showAvailableBooks: View list of Available books not considering the issued book ,</a:t>
-            </a:r>
-          </a:p>
-          <a:p>
-            <a:pPr marL="0" indent="0">
-              <a:buNone/>
-            </a:pPr>
-            <a:r>
-              <a:rPr lang="en-IN" sz="2400" dirty="0">
-                <a:latin typeface="Times New Roman" panose="02020603050405020304" pitchFamily="18" charset="0"/>
-              </a:rPr>
-              <a:t> issueBooks: Issue the Book or allot the book to user.</a:t>
-            </a:r>
-          </a:p>
-          <a:p>
-            <a:pPr marL="0" indent="0">
-              <a:buNone/>
-            </a:pPr>
-            <a:r>
-              <a:rPr lang="en-IN" sz="2400" dirty="0">
-                <a:latin typeface="Times New Roman" panose="02020603050405020304" pitchFamily="18" charset="0"/>
-              </a:rPr>
-              <a:t>returnBook: Return the issued book to Library’s book array. </a:t>
-            </a:r>
-          </a:p>
-          <a:p>
-            <a:r>
-              <a:rPr lang="en-IN" sz="2400" dirty="0">
-                <a:latin typeface="Times New Roman" panose="02020603050405020304" pitchFamily="18" charset="0"/>
-              </a:rPr>
-              <a:t>The output is generated in terminal of IDE after method calling, as per print statements mentioned in each method.</a:t>
-            </a:r>
-          </a:p>
-          <a:p>
-            <a:r>
-              <a:rPr lang="en-IN" sz="2400" dirty="0">
-                <a:latin typeface="Times New Roman" panose="02020603050405020304" pitchFamily="18" charset="0"/>
-              </a:rPr>
-              <a:t>The Count of available books and statement of operation method when run is displayed.</a:t>
             </a:r>
           </a:p>
           <a:p>
@@ -6387,7 +6152,7 @@
 </p:sld>
 </file>
 
-<file path=ppt/slides/slide12.xml><?xml version="1.0" encoding="utf-8"?>
+<file path=ppt/slides/slide11.xml><?xml version="1.0" encoding="utf-8"?>
 <p:sld xmlns:a="http://schemas.openxmlformats.org/drawingml/2006/main" xmlns:r="http://schemas.openxmlformats.org/officeDocument/2006/relationships" xmlns:p="http://schemas.openxmlformats.org/presentationml/2006/main">
   <p:cSld>
     <p:spTree>
@@ -6457,14 +6222,30 @@
             </a:r>
             <a:r>
               <a:rPr lang="en-IN" sz="2600" dirty="0"/>
-              <a:t>package com.company;</a:t>
-            </a:r>
-            <a:br>
-              <a:rPr lang="en-IN" sz="2600" dirty="0"/>
-            </a:br>
-            <a:r>
-              <a:rPr lang="en-IN" sz="2600" dirty="0"/>
-              <a:t>import java.util.Scanner;</a:t>
+              <a:t>package </a:t>
+            </a:r>
+            <a:r>
+              <a:rPr lang="en-IN" sz="2600" dirty="0" err="1"/>
+              <a:t>com.company</a:t>
+            </a:r>
+            <a:r>
+              <a:rPr lang="en-IN" sz="2600" dirty="0"/>
+              <a:t>;</a:t>
+            </a:r>
+            <a:br>
+              <a:rPr lang="en-IN" sz="2600" dirty="0"/>
+            </a:br>
+            <a:r>
+              <a:rPr lang="en-IN" sz="2600" dirty="0"/>
+              <a:t>import </a:t>
+            </a:r>
+            <a:r>
+              <a:rPr lang="en-IN" sz="2600" dirty="0" err="1"/>
+              <a:t>java.util.Scanner</a:t>
+            </a:r>
+            <a:r>
+              <a:rPr lang="en-IN" sz="2600" dirty="0"/>
+              <a:t>;</a:t>
             </a:r>
             <a:br>
               <a:rPr lang="en-IN" sz="2600" dirty="0"/>
@@ -6488,7 +6269,15 @@
             </a:br>
             <a:r>
               <a:rPr lang="en-IN" sz="2600" dirty="0"/>
-              <a:t>    int numBooks;</a:t>
+              <a:t>    int </a:t>
+            </a:r>
+            <a:r>
+              <a:rPr lang="en-IN" sz="2600" dirty="0" err="1"/>
+              <a:t>numBooks</a:t>
+            </a:r>
+            <a:r>
+              <a:rPr lang="en-IN" sz="2600" dirty="0"/>
+              <a:t>;</a:t>
             </a:r>
             <a:br>
               <a:rPr lang="en-IN" sz="2600" dirty="0"/>
@@ -6502,14 +6291,30 @@
             </a:br>
             <a:r>
               <a:rPr lang="en-IN" sz="2600" dirty="0"/>
-              <a:t>        this.books =new String[100];</a:t>
-            </a:r>
-            <a:br>
-              <a:rPr lang="en-IN" sz="2600" dirty="0"/>
-            </a:br>
-            <a:r>
-              <a:rPr lang="en-IN" sz="2600" dirty="0"/>
-              <a:t>        this.numBooks=0;</a:t>
+              <a:t>        </a:t>
+            </a:r>
+            <a:r>
+              <a:rPr lang="en-IN" sz="2600" dirty="0" err="1"/>
+              <a:t>this.books</a:t>
+            </a:r>
+            <a:r>
+              <a:rPr lang="en-IN" sz="2600" dirty="0"/>
+              <a:t> =new String[100];</a:t>
+            </a:r>
+            <a:br>
+              <a:rPr lang="en-IN" sz="2600" dirty="0"/>
+            </a:br>
+            <a:r>
+              <a:rPr lang="en-IN" sz="2600" dirty="0"/>
+              <a:t>        </a:t>
+            </a:r>
+            <a:r>
+              <a:rPr lang="en-IN" sz="2600" dirty="0" err="1"/>
+              <a:t>this.numBooks</a:t>
+            </a:r>
+            <a:r>
+              <a:rPr lang="en-IN" sz="2600" dirty="0"/>
+              <a:t>=0;</a:t>
             </a:r>
             <a:br>
               <a:rPr lang="en-IN" sz="2600" dirty="0"/>
@@ -6523,36 +6328,76 @@
             </a:br>
             <a:r>
               <a:rPr lang="en-IN" sz="2600" dirty="0"/>
-              <a:t>   void addBook(String book) {</a:t>
-            </a:r>
-            <a:br>
-              <a:rPr lang="en-IN" sz="2600" dirty="0"/>
-            </a:br>
-            <a:r>
-              <a:rPr lang="en-IN" sz="2600" dirty="0"/>
-              <a:t>       this.books[numBooks] = book;</a:t>
-            </a:r>
-            <a:br>
-              <a:rPr lang="en-IN" sz="2600" dirty="0"/>
-            </a:br>
-            <a:r>
-              <a:rPr lang="en-IN" sz="2600" dirty="0"/>
-              <a:t>       numBooks++;</a:t>
-            </a:r>
-            <a:br>
-              <a:rPr lang="en-IN" sz="2600" dirty="0"/>
-            </a:br>
-            <a:r>
-              <a:rPr lang="en-IN" sz="2600" dirty="0"/>
-              <a:t>       System.</a:t>
-            </a:r>
-            <a:r>
-              <a:rPr lang="en-IN" sz="2600" i="1" dirty="0"/>
+              <a:t>   void </a:t>
+            </a:r>
+            <a:r>
+              <a:rPr lang="en-IN" sz="2600" dirty="0" err="1"/>
+              <a:t>addBook</a:t>
+            </a:r>
+            <a:r>
+              <a:rPr lang="en-IN" sz="2600" dirty="0"/>
+              <a:t>(String book) {</a:t>
+            </a:r>
+            <a:br>
+              <a:rPr lang="en-IN" sz="2600" dirty="0"/>
+            </a:br>
+            <a:r>
+              <a:rPr lang="en-IN" sz="2600" dirty="0"/>
+              <a:t>       </a:t>
+            </a:r>
+            <a:r>
+              <a:rPr lang="en-IN" sz="2600" dirty="0" err="1"/>
+              <a:t>this.books</a:t>
+            </a:r>
+            <a:r>
+              <a:rPr lang="en-IN" sz="2600" dirty="0"/>
+              <a:t>[</a:t>
+            </a:r>
+            <a:r>
+              <a:rPr lang="en-IN" sz="2600" dirty="0" err="1"/>
+              <a:t>numBooks</a:t>
+            </a:r>
+            <a:r>
+              <a:rPr lang="en-IN" sz="2600" dirty="0"/>
+              <a:t>] = book;</a:t>
+            </a:r>
+            <a:br>
+              <a:rPr lang="en-IN" sz="2600" dirty="0"/>
+            </a:br>
+            <a:r>
+              <a:rPr lang="en-IN" sz="2600" dirty="0"/>
+              <a:t>       </a:t>
+            </a:r>
+            <a:r>
+              <a:rPr lang="en-IN" sz="2600" dirty="0" err="1"/>
+              <a:t>numBooks</a:t>
+            </a:r>
+            <a:r>
+              <a:rPr lang="en-IN" sz="2600" dirty="0"/>
+              <a:t>++;</a:t>
+            </a:r>
+            <a:br>
+              <a:rPr lang="en-IN" sz="2600" dirty="0"/>
+            </a:br>
+            <a:r>
+              <a:rPr lang="en-IN" sz="2600" dirty="0"/>
+              <a:t>       </a:t>
+            </a:r>
+            <a:r>
+              <a:rPr lang="en-IN" sz="2600" dirty="0" err="1"/>
+              <a:t>System.</a:t>
+            </a:r>
+            <a:r>
+              <a:rPr lang="en-IN" sz="2600" i="1" dirty="0" err="1"/>
               <a:t>out</a:t>
             </a:r>
             <a:r>
-              <a:rPr lang="en-IN" sz="2600" dirty="0"/>
-              <a:t>.println(book + " has been added.");</a:t>
+              <a:rPr lang="en-IN" sz="2600" dirty="0" err="1"/>
+              <a:t>.println</a:t>
+            </a:r>
+            <a:r>
+              <a:rPr lang="en-IN" sz="2600" dirty="0"/>
+              <a:t>(book + " has been added.");</a:t>
             </a:r>
             <a:br>
               <a:rPr lang="en-IN" sz="2600" dirty="0"/>
@@ -6566,29 +6411,53 @@
             </a:br>
             <a:r>
               <a:rPr lang="en-IN" sz="2600" dirty="0"/>
-              <a:t>   void showAvailableBooks() {</a:t>
-            </a:r>
-            <a:br>
-              <a:rPr lang="en-IN" sz="2600" dirty="0"/>
-            </a:br>
-            <a:r>
-              <a:rPr lang="en-IN" sz="2600" dirty="0"/>
-              <a:t>       System.</a:t>
-            </a:r>
-            <a:r>
-              <a:rPr lang="en-IN" sz="2600" i="1" dirty="0"/>
+              <a:t>   void </a:t>
+            </a:r>
+            <a:r>
+              <a:rPr lang="en-IN" sz="2600" dirty="0" err="1"/>
+              <a:t>showAvailableBooks</a:t>
+            </a:r>
+            <a:r>
+              <a:rPr lang="en-IN" sz="2600" dirty="0"/>
+              <a:t>() {</a:t>
+            </a:r>
+            <a:br>
+              <a:rPr lang="en-IN" sz="2600" dirty="0"/>
+            </a:br>
+            <a:r>
+              <a:rPr lang="en-IN" sz="2600" dirty="0"/>
+              <a:t>       </a:t>
+            </a:r>
+            <a:r>
+              <a:rPr lang="en-IN" sz="2600" dirty="0" err="1"/>
+              <a:t>System.</a:t>
+            </a:r>
+            <a:r>
+              <a:rPr lang="en-IN" sz="2600" i="1" dirty="0" err="1"/>
               <a:t>out</a:t>
             </a:r>
             <a:r>
-              <a:rPr lang="en-IN" sz="2600" dirty="0"/>
-              <a:t>.println("Available Books are:");</a:t>
-            </a:r>
-            <a:br>
-              <a:rPr lang="en-IN" sz="2600" dirty="0"/>
-            </a:br>
-            <a:r>
-              <a:rPr lang="en-IN" sz="2600" dirty="0"/>
-              <a:t>       for (String book : this.books) {</a:t>
+              <a:rPr lang="en-IN" sz="2600" dirty="0" err="1"/>
+              <a:t>.println</a:t>
+            </a:r>
+            <a:r>
+              <a:rPr lang="en-IN" sz="2600" dirty="0"/>
+              <a:t>("Available Books are:");</a:t>
+            </a:r>
+            <a:br>
+              <a:rPr lang="en-IN" sz="2600" dirty="0"/>
+            </a:br>
+            <a:r>
+              <a:rPr lang="en-IN" sz="2600" dirty="0"/>
+              <a:t>       for (String book : </a:t>
+            </a:r>
+            <a:r>
+              <a:rPr lang="en-IN" sz="2600" dirty="0" err="1"/>
+              <a:t>this.books</a:t>
+            </a:r>
+            <a:r>
+              <a:rPr lang="en-IN" sz="2600" dirty="0"/>
+              <a:t>) {</a:t>
             </a:r>
             <a:br>
               <a:rPr lang="en-IN" sz="2600" dirty="0"/>
@@ -6616,30 +6485,54 @@
             </a:br>
             <a:r>
               <a:rPr lang="en-IN" sz="2600" dirty="0"/>
-              <a:t>               System.</a:t>
-            </a:r>
-            <a:r>
-              <a:rPr lang="en-IN" sz="2600" i="1" dirty="0"/>
+              <a:t>               </a:t>
+            </a:r>
+            <a:r>
+              <a:rPr lang="en-IN" sz="2600" dirty="0" err="1"/>
+              <a:t>System.</a:t>
+            </a:r>
+            <a:r>
+              <a:rPr lang="en-IN" sz="2600" i="1" dirty="0" err="1"/>
               <a:t>out</a:t>
             </a:r>
             <a:r>
-              <a:rPr lang="en-IN" sz="2600" dirty="0"/>
-              <a:t>.println("*" + book);</a:t>
-            </a:r>
-            <a:br>
-              <a:rPr lang="en-IN" sz="2600" dirty="0"/>
-            </a:br>
-            <a:r>
-              <a:rPr lang="en-IN" sz="2600" dirty="0"/>
-              <a:t>               System.</a:t>
-            </a:r>
-            <a:r>
-              <a:rPr lang="en-IN" sz="2600" i="1" dirty="0"/>
+              <a:rPr lang="en-IN" sz="2600" dirty="0" err="1"/>
+              <a:t>.println</a:t>
+            </a:r>
+            <a:r>
+              <a:rPr lang="en-IN" sz="2600" dirty="0"/>
+              <a:t>("*" + book);</a:t>
+            </a:r>
+            <a:br>
+              <a:rPr lang="en-IN" sz="2600" dirty="0"/>
+            </a:br>
+            <a:r>
+              <a:rPr lang="en-IN" sz="2600" dirty="0"/>
+              <a:t>               </a:t>
+            </a:r>
+            <a:r>
+              <a:rPr lang="en-IN" sz="2600" dirty="0" err="1"/>
+              <a:t>System.</a:t>
+            </a:r>
+            <a:r>
+              <a:rPr lang="en-IN" sz="2600" i="1" dirty="0" err="1"/>
               <a:t>out</a:t>
             </a:r>
             <a:r>
-              <a:rPr lang="en-IN" sz="2600" dirty="0"/>
-              <a:t>.println("The book count is: "+ numBooks);</a:t>
+              <a:rPr lang="en-IN" sz="2600" dirty="0" err="1"/>
+              <a:t>.println</a:t>
+            </a:r>
+            <a:r>
+              <a:rPr lang="en-IN" sz="2600" dirty="0"/>
+              <a:t>("The book count is: "+ </a:t>
+            </a:r>
+            <a:r>
+              <a:rPr lang="en-IN" sz="2600" dirty="0" err="1"/>
+              <a:t>numBooks</a:t>
+            </a:r>
+            <a:r>
+              <a:rPr lang="en-IN" sz="2600" dirty="0"/>
+              <a:t>);</a:t>
             </a:r>
             <a:br>
               <a:rPr lang="en-IN" sz="2600" dirty="0"/>
@@ -6674,43 +6567,107 @@
             </a:br>
             <a:r>
               <a:rPr lang="en-IN" sz="2600" dirty="0"/>
-              <a:t>   void issueBook(String book){</a:t>
-            </a:r>
-            <a:br>
-              <a:rPr lang="en-IN" sz="2600" dirty="0"/>
-            </a:br>
-            <a:r>
-              <a:rPr lang="en-IN" sz="2600" dirty="0"/>
-              <a:t>        for(int i=0;i&lt;this.books.length;i++){</a:t>
-            </a:r>
-            <a:br>
-              <a:rPr lang="en-IN" sz="2600" dirty="0"/>
-            </a:br>
-            <a:r>
-              <a:rPr lang="en-IN" sz="2600" dirty="0"/>
-              <a:t>            if (this.books[i].equals(book)) {</a:t>
-            </a:r>
-            <a:br>
-              <a:rPr lang="en-IN" sz="2600" dirty="0"/>
-            </a:br>
-            <a:r>
-              <a:rPr lang="en-IN" sz="2600" dirty="0"/>
-              <a:t>                System.</a:t>
-            </a:r>
-            <a:r>
-              <a:rPr lang="en-IN" sz="2600" i="1" dirty="0"/>
+              <a:t>   void </a:t>
+            </a:r>
+            <a:r>
+              <a:rPr lang="en-IN" sz="2600" dirty="0" err="1"/>
+              <a:t>issueBook</a:t>
+            </a:r>
+            <a:r>
+              <a:rPr lang="en-IN" sz="2600" dirty="0"/>
+              <a:t>(String book){</a:t>
+            </a:r>
+            <a:br>
+              <a:rPr lang="en-IN" sz="2600" dirty="0"/>
+            </a:br>
+            <a:r>
+              <a:rPr lang="en-IN" sz="2600" dirty="0"/>
+              <a:t>        for(int </a:t>
+            </a:r>
+            <a:r>
+              <a:rPr lang="en-IN" sz="2600" dirty="0" err="1"/>
+              <a:t>i</a:t>
+            </a:r>
+            <a:r>
+              <a:rPr lang="en-IN" sz="2600" dirty="0"/>
+              <a:t>=0;i&lt;</a:t>
+            </a:r>
+            <a:r>
+              <a:rPr lang="en-IN" sz="2600" dirty="0" err="1"/>
+              <a:t>this.books.length;i</a:t>
+            </a:r>
+            <a:r>
+              <a:rPr lang="en-IN" sz="2600" dirty="0"/>
+              <a:t>++){</a:t>
+            </a:r>
+            <a:br>
+              <a:rPr lang="en-IN" sz="2600" dirty="0"/>
+            </a:br>
+            <a:r>
+              <a:rPr lang="en-IN" sz="2600" dirty="0"/>
+              <a:t>            if (</a:t>
+            </a:r>
+            <a:r>
+              <a:rPr lang="en-IN" sz="2600" dirty="0" err="1"/>
+              <a:t>this.books</a:t>
+            </a:r>
+            <a:r>
+              <a:rPr lang="en-IN" sz="2600" dirty="0"/>
+              <a:t>[</a:t>
+            </a:r>
+            <a:r>
+              <a:rPr lang="en-IN" sz="2600" dirty="0" err="1"/>
+              <a:t>i</a:t>
+            </a:r>
+            <a:r>
+              <a:rPr lang="en-IN" sz="2600" dirty="0"/>
+              <a:t>].equals(book)) {</a:t>
+            </a:r>
+            <a:br>
+              <a:rPr lang="en-IN" sz="2600" dirty="0"/>
+            </a:br>
+            <a:r>
+              <a:rPr lang="en-IN" sz="2600" dirty="0"/>
+              <a:t>                </a:t>
+            </a:r>
+            <a:r>
+              <a:rPr lang="en-IN" sz="2600" dirty="0" err="1"/>
+              <a:t>System.</a:t>
+            </a:r>
+            <a:r>
+              <a:rPr lang="en-IN" sz="2600" i="1" dirty="0" err="1"/>
               <a:t>out</a:t>
             </a:r>
             <a:r>
-              <a:rPr lang="en-IN" sz="2600" dirty="0"/>
-              <a:t>.println("The book has been issued: " + book);</a:t>
-            </a:r>
-            <a:br>
-              <a:rPr lang="en-IN" sz="2600" dirty="0"/>
-            </a:br>
-            <a:r>
-              <a:rPr lang="en-IN" sz="2600" dirty="0"/>
-              <a:t>                this.books[i]=null;</a:t>
+              <a:rPr lang="en-IN" sz="2600" dirty="0" err="1"/>
+              <a:t>.println</a:t>
+            </a:r>
+            <a:r>
+              <a:rPr lang="en-IN" sz="2600" dirty="0"/>
+              <a:t>("The book has been issued: " + book);</a:t>
+            </a:r>
+            <a:br>
+              <a:rPr lang="en-IN" sz="2600" dirty="0"/>
+            </a:br>
+            <a:r>
+              <a:rPr lang="en-IN" sz="2600" dirty="0"/>
+              <a:t>                </a:t>
+            </a:r>
+            <a:r>
+              <a:rPr lang="en-IN" sz="2600" dirty="0" err="1"/>
+              <a:t>this.books</a:t>
+            </a:r>
+            <a:r>
+              <a:rPr lang="en-IN" sz="2600" dirty="0"/>
+              <a:t>[</a:t>
+            </a:r>
+            <a:r>
+              <a:rPr lang="en-IN" sz="2600" dirty="0" err="1"/>
+              <a:t>i</a:t>
+            </a:r>
+            <a:r>
+              <a:rPr lang="en-IN" sz="2600" dirty="0"/>
+              <a:t>]=null;</a:t>
             </a:r>
             <a:br>
               <a:rPr lang="en-IN" sz="2600" dirty="0"/>
@@ -6770,30 +6727,54 @@
             </a:br>
             <a:r>
               <a:rPr lang="en-IN" sz="2600" dirty="0"/>
-              <a:t>            System.</a:t>
-            </a:r>
-            <a:r>
-              <a:rPr lang="en-IN" sz="2600" i="1" dirty="0"/>
+              <a:t>            </a:t>
+            </a:r>
+            <a:r>
+              <a:rPr lang="en-IN" sz="2600" dirty="0" err="1"/>
+              <a:t>System.</a:t>
+            </a:r>
+            <a:r>
+              <a:rPr lang="en-IN" sz="2600" i="1" dirty="0" err="1"/>
               <a:t>out</a:t>
             </a:r>
             <a:r>
-              <a:rPr lang="en-IN" sz="2600" dirty="0"/>
-              <a:t>.println("*"+book);</a:t>
-            </a:r>
-            <a:br>
-              <a:rPr lang="en-IN" sz="2600" dirty="0"/>
-            </a:br>
-            <a:r>
-              <a:rPr lang="en-IN" sz="2600" dirty="0"/>
-              <a:t>            System.</a:t>
-            </a:r>
-            <a:r>
-              <a:rPr lang="en-IN" sz="2600" i="1" dirty="0"/>
+              <a:rPr lang="en-IN" sz="2600" dirty="0" err="1"/>
+              <a:t>.println</a:t>
+            </a:r>
+            <a:r>
+              <a:rPr lang="en-IN" sz="2600" dirty="0"/>
+              <a:t>("*"+book);</a:t>
+            </a:r>
+            <a:br>
+              <a:rPr lang="en-IN" sz="2600" dirty="0"/>
+            </a:br>
+            <a:r>
+              <a:rPr lang="en-IN" sz="2600" dirty="0"/>
+              <a:t>            </a:t>
+            </a:r>
+            <a:r>
+              <a:rPr lang="en-IN" sz="2600" dirty="0" err="1"/>
+              <a:t>System.</a:t>
+            </a:r>
+            <a:r>
+              <a:rPr lang="en-IN" sz="2600" i="1" dirty="0" err="1"/>
               <a:t>out</a:t>
             </a:r>
             <a:r>
-              <a:rPr lang="en-IN" sz="2600" dirty="0"/>
-              <a:t>.println("The book count is: "+numBooks);</a:t>
+              <a:rPr lang="en-IN" sz="2600" dirty="0" err="1"/>
+              <a:t>.println</a:t>
+            </a:r>
+            <a:r>
+              <a:rPr lang="en-IN" sz="2600" dirty="0"/>
+              <a:t>("The book count is: "+</a:t>
+            </a:r>
+            <a:r>
+              <a:rPr lang="en-IN" sz="2600" dirty="0" err="1"/>
+              <a:t>numBooks</a:t>
+            </a:r>
+            <a:r>
+              <a:rPr lang="en-IN" sz="2600" dirty="0"/>
+              <a:t>);</a:t>
             </a:r>
             <a:br>
               <a:rPr lang="en-IN" sz="2600" dirty="0"/>
@@ -6807,15 +6788,23 @@
             </a:br>
             <a:r>
               <a:rPr lang="en-IN" sz="2600" dirty="0"/>
-              <a:t>       System.</a:t>
-            </a:r>
-            <a:r>
-              <a:rPr lang="en-IN" sz="2600" i="1" dirty="0"/>
+              <a:t>       </a:t>
+            </a:r>
+            <a:r>
+              <a:rPr lang="en-IN" sz="2600" dirty="0" err="1"/>
+              <a:t>System.</a:t>
+            </a:r>
+            <a:r>
+              <a:rPr lang="en-IN" sz="2600" i="1" dirty="0" err="1"/>
               <a:t>out</a:t>
             </a:r>
             <a:r>
-              <a:rPr lang="en-IN" sz="2600" dirty="0"/>
-              <a:t>.println("This book does not exist");</a:t>
+              <a:rPr lang="en-IN" sz="2600" dirty="0" err="1"/>
+              <a:t>.println</a:t>
+            </a:r>
+            <a:r>
+              <a:rPr lang="en-IN" sz="2600" dirty="0"/>
+              <a:t>("This book does not exist");</a:t>
             </a:r>
             <a:br>
               <a:rPr lang="en-IN" sz="2600" dirty="0"/>
@@ -6829,44 +6818,92 @@
             </a:br>
             <a:r>
               <a:rPr lang="en-IN" sz="2600" dirty="0"/>
-              <a:t>   void returnBook(String book){</a:t>
-            </a:r>
-            <a:br>
-              <a:rPr lang="en-IN" sz="2600" dirty="0"/>
-            </a:br>
-            <a:r>
-              <a:rPr lang="en-IN" sz="2600" dirty="0"/>
-              <a:t>       System.</a:t>
-            </a:r>
-            <a:r>
-              <a:rPr lang="en-IN" sz="2600" i="1" dirty="0"/>
+              <a:t>   void </a:t>
+            </a:r>
+            <a:r>
+              <a:rPr lang="en-IN" sz="2600" dirty="0" err="1"/>
+              <a:t>returnBook</a:t>
+            </a:r>
+            <a:r>
+              <a:rPr lang="en-IN" sz="2600" dirty="0"/>
+              <a:t>(String book){</a:t>
+            </a:r>
+            <a:br>
+              <a:rPr lang="en-IN" sz="2600" dirty="0"/>
+            </a:br>
+            <a:r>
+              <a:rPr lang="en-IN" sz="2600" dirty="0"/>
+              <a:t>       </a:t>
+            </a:r>
+            <a:r>
+              <a:rPr lang="en-IN" sz="2600" dirty="0" err="1"/>
+              <a:t>System.</a:t>
+            </a:r>
+            <a:r>
+              <a:rPr lang="en-IN" sz="2600" i="1" dirty="0" err="1"/>
               <a:t>out</a:t>
             </a:r>
             <a:r>
-              <a:rPr lang="en-IN" sz="2600" dirty="0"/>
-              <a:t>.println("The book has been returned."+book);</a:t>
-            </a:r>
-            <a:br>
-              <a:rPr lang="en-IN" sz="2600" dirty="0"/>
-            </a:br>
-            <a:r>
-              <a:rPr lang="en-IN" sz="2600" dirty="0"/>
-              <a:t>       addBook(book);</a:t>
-            </a:r>
-            <a:br>
-              <a:rPr lang="en-IN" sz="2600" dirty="0"/>
-            </a:br>
-            <a:r>
-              <a:rPr lang="en-IN" sz="2600" dirty="0"/>
-              <a:t>       System.</a:t>
-            </a:r>
-            <a:r>
-              <a:rPr lang="en-IN" sz="2600" i="1" dirty="0"/>
+              <a:rPr lang="en-IN" sz="2600" dirty="0" err="1"/>
+              <a:t>.println</a:t>
+            </a:r>
+            <a:r>
+              <a:rPr lang="en-IN" sz="2600" dirty="0"/>
+              <a:t>("The book has been </a:t>
+            </a:r>
+            <a:r>
+              <a:rPr lang="en-IN" sz="2600" dirty="0" err="1"/>
+              <a:t>returned."+book</a:t>
+            </a:r>
+            <a:r>
+              <a:rPr lang="en-IN" sz="2600" dirty="0"/>
+              <a:t>);</a:t>
+            </a:r>
+            <a:br>
+              <a:rPr lang="en-IN" sz="2600" dirty="0"/>
+            </a:br>
+            <a:r>
+              <a:rPr lang="en-IN" sz="2600" dirty="0"/>
+              <a:t>       </a:t>
+            </a:r>
+            <a:r>
+              <a:rPr lang="en-IN" sz="2600" dirty="0" err="1"/>
+              <a:t>addBook</a:t>
+            </a:r>
+            <a:r>
+              <a:rPr lang="en-IN" sz="2600" dirty="0"/>
+              <a:t>(book);</a:t>
+            </a:r>
+            <a:br>
+              <a:rPr lang="en-IN" sz="2600" dirty="0"/>
+            </a:br>
+            <a:r>
+              <a:rPr lang="en-IN" sz="2600" dirty="0"/>
+              <a:t>       </a:t>
+            </a:r>
+            <a:r>
+              <a:rPr lang="en-IN" sz="2600" dirty="0" err="1"/>
+              <a:t>System.</a:t>
+            </a:r>
+            <a:r>
+              <a:rPr lang="en-IN" sz="2600" i="1" dirty="0" err="1"/>
               <a:t>out</a:t>
             </a:r>
             <a:r>
-              <a:rPr lang="en-IN" sz="2600" dirty="0"/>
-              <a:t>.println("The book count is: "+ numBooks);</a:t>
+              <a:rPr lang="en-IN" sz="2600" dirty="0" err="1"/>
+              <a:t>.println</a:t>
+            </a:r>
+            <a:r>
+              <a:rPr lang="en-IN" sz="2600" dirty="0"/>
+              <a:t>("The book count is: "+ </a:t>
+            </a:r>
+            <a:r>
+              <a:rPr lang="en-IN" sz="2600" dirty="0" err="1"/>
+              <a:t>numBooks</a:t>
+            </a:r>
+            <a:r>
+              <a:rPr lang="en-IN" sz="2600" dirty="0"/>
+              <a:t>);</a:t>
             </a:r>
             <a:br>
               <a:rPr lang="en-IN" sz="2600" dirty="0"/>
@@ -6897,7 +6934,15 @@
             </a:br>
             <a:r>
               <a:rPr lang="en-IN" sz="2600" dirty="0"/>
-              <a:t>    public static void main(String[] args) {</a:t>
+              <a:t>    public static void main(String[] </a:t>
+            </a:r>
+            <a:r>
+              <a:rPr lang="en-IN" sz="2600" dirty="0" err="1"/>
+              <a:t>args</a:t>
+            </a:r>
+            <a:r>
+              <a:rPr lang="en-IN" sz="2600" dirty="0"/>
+              <a:t>) {</a:t>
             </a:r>
             <a:br>
               <a:rPr lang="en-IN" sz="2600" dirty="0"/>
@@ -6911,7 +6956,15 @@
             </a:br>
             <a:r>
               <a:rPr lang="en-IN" sz="2600" dirty="0"/>
-              <a:t>        //Method: addBook,issueBook,returnBook,showAvailableBooks.</a:t>
+              <a:t>        //Method: </a:t>
+            </a:r>
+            <a:r>
+              <a:rPr lang="en-IN" sz="2600" dirty="0" err="1"/>
+              <a:t>addBook,issueBook,returnBook,showAvailableBooks</a:t>
+            </a:r>
+            <a:r>
+              <a:rPr lang="en-IN" sz="2600" dirty="0"/>
+              <a:t>.</a:t>
             </a:r>
             <a:br>
               <a:rPr lang="en-IN" sz="2600" dirty="0"/>
@@ -6932,56 +6985,120 @@
             </a:br>
             <a:r>
               <a:rPr lang="en-IN" sz="2600" dirty="0"/>
-              <a:t>        Library centralLibrary =new Library();</a:t>
-            </a:r>
-            <a:br>
-              <a:rPr lang="en-IN" sz="2600" dirty="0"/>
-            </a:br>
-            <a:r>
-              <a:rPr lang="en-IN" sz="2600" dirty="0"/>
-              <a:t>        centralLibrary.addBook("Wings Of Fire");</a:t>
-            </a:r>
-            <a:br>
-              <a:rPr lang="en-IN" sz="2600" dirty="0"/>
-            </a:br>
-            <a:r>
-              <a:rPr lang="en-IN" sz="2600" dirty="0"/>
-              <a:t>        centralLibrary.showAvailableBooks();</a:t>
-            </a:r>
-            <a:br>
-              <a:rPr lang="en-IN" sz="2600" dirty="0"/>
-            </a:br>
-            <a:r>
-              <a:rPr lang="en-IN" sz="2600" dirty="0"/>
-              <a:t>        centralLibrary.addBook("C++ Coding");</a:t>
-            </a:r>
-            <a:br>
-              <a:rPr lang="en-IN" sz="2600" dirty="0"/>
-            </a:br>
-            <a:r>
-              <a:rPr lang="en-IN" sz="2600" dirty="0"/>
-              <a:t>        centralLibrary.addBook("Our Mind");</a:t>
-            </a:r>
-            <a:br>
-              <a:rPr lang="en-IN" sz="2600" dirty="0"/>
-            </a:br>
-            <a:r>
-              <a:rPr lang="en-IN" sz="2600" dirty="0"/>
-              <a:t>        centralLibrary.showAvailableBooks();</a:t>
-            </a:r>
-            <a:br>
-              <a:rPr lang="en-IN" sz="2600" dirty="0"/>
-            </a:br>
-            <a:r>
-              <a:rPr lang="en-IN" sz="2600" dirty="0"/>
-              <a:t>        centralLibrary.issueBook("C++ Coding");</a:t>
-            </a:r>
-            <a:br>
-              <a:rPr lang="en-IN" sz="2600" dirty="0"/>
-            </a:br>
-            <a:r>
-              <a:rPr lang="en-IN" sz="2600" dirty="0"/>
-              <a:t>        centralLibrary.returnBook("C++ Coding");</a:t>
+              <a:t>        Library </a:t>
+            </a:r>
+            <a:r>
+              <a:rPr lang="en-IN" sz="2600" dirty="0" err="1"/>
+              <a:t>centralLibrary</a:t>
+            </a:r>
+            <a:r>
+              <a:rPr lang="en-IN" sz="2600" dirty="0"/>
+              <a:t> =new Library();</a:t>
+            </a:r>
+            <a:br>
+              <a:rPr lang="en-IN" sz="2600" dirty="0"/>
+            </a:br>
+            <a:r>
+              <a:rPr lang="en-IN" sz="2600" dirty="0"/>
+              <a:t>        </a:t>
+            </a:r>
+            <a:r>
+              <a:rPr lang="en-IN" sz="2600" dirty="0" err="1"/>
+              <a:t>centralLibrary.addBook</a:t>
+            </a:r>
+            <a:r>
+              <a:rPr lang="en-IN" sz="2600" dirty="0"/>
+              <a:t>("Wings Of Fire");</a:t>
+            </a:r>
+            <a:br>
+              <a:rPr lang="en-IN" sz="2600" dirty="0"/>
+            </a:br>
+            <a:r>
+              <a:rPr lang="en-IN" sz="2600" dirty="0"/>
+              <a:t>        </a:t>
+            </a:r>
+            <a:r>
+              <a:rPr lang="en-IN" sz="2600" dirty="0" err="1"/>
+              <a:t>centralLibrary.showAvailableBooks</a:t>
+            </a:r>
+            <a:r>
+              <a:rPr lang="en-IN" sz="2600" dirty="0"/>
+              <a:t>();</a:t>
+            </a:r>
+            <a:br>
+              <a:rPr lang="en-IN" sz="2600" dirty="0"/>
+            </a:br>
+            <a:r>
+              <a:rPr lang="en-IN" sz="2600" dirty="0"/>
+              <a:t>        </a:t>
+            </a:r>
+            <a:r>
+              <a:rPr lang="en-IN" sz="2600" dirty="0" err="1"/>
+              <a:t>centralLibrary.addBook</a:t>
+            </a:r>
+            <a:r>
+              <a:rPr lang="en-IN" sz="2600" dirty="0"/>
+              <a:t>("C++ Coding");</a:t>
+            </a:r>
+            <a:br>
+              <a:rPr lang="en-IN" sz="2600" dirty="0"/>
+            </a:br>
+            <a:r>
+              <a:rPr lang="en-IN" sz="2600" dirty="0"/>
+              <a:t>        </a:t>
+            </a:r>
+            <a:r>
+              <a:rPr lang="en-IN" sz="2600" dirty="0" err="1"/>
+              <a:t>centralLibrary.addBook</a:t>
+            </a:r>
+            <a:r>
+              <a:rPr lang="en-IN" sz="2600" dirty="0"/>
+              <a:t>("Our Mind");</a:t>
+            </a:r>
+            <a:br>
+              <a:rPr lang="en-IN" sz="2600" dirty="0"/>
+            </a:br>
+            <a:r>
+              <a:rPr lang="en-IN" sz="2600" dirty="0"/>
+              <a:t>        </a:t>
+            </a:r>
+            <a:r>
+              <a:rPr lang="en-IN" sz="2600" dirty="0" err="1"/>
+              <a:t>centralLibrary.showAvailableBooks</a:t>
+            </a:r>
+            <a:r>
+              <a:rPr lang="en-IN" sz="2600" dirty="0"/>
+              <a:t>();</a:t>
+            </a:r>
+            <a:br>
+              <a:rPr lang="en-IN" sz="2600" dirty="0"/>
+            </a:br>
+            <a:r>
+              <a:rPr lang="en-IN" sz="2600" dirty="0"/>
+              <a:t>        </a:t>
+            </a:r>
+            <a:r>
+              <a:rPr lang="en-IN" sz="2600" dirty="0" err="1"/>
+              <a:t>centralLibrary.issueBook</a:t>
+            </a:r>
+            <a:r>
+              <a:rPr lang="en-IN" sz="2600" dirty="0"/>
+              <a:t>("C++ Coding");</a:t>
+            </a:r>
+            <a:br>
+              <a:rPr lang="en-IN" sz="2600" dirty="0"/>
+            </a:br>
+            <a:r>
+              <a:rPr lang="en-IN" sz="2600" dirty="0"/>
+              <a:t>        </a:t>
+            </a:r>
+            <a:r>
+              <a:rPr lang="en-IN" sz="2600" dirty="0" err="1"/>
+              <a:t>centralLibrary.returnBook</a:t>
+            </a:r>
+            <a:r>
+              <a:rPr lang="en-IN" sz="2600" dirty="0"/>
+              <a:t>("C++ Coding");</a:t>
             </a:r>
             <a:br>
               <a:rPr lang="en-IN" sz="2600" dirty="0"/>
@@ -7025,7 +7142,7 @@
 </p:sld>
 </file>
 
-<file path=ppt/slides/slide13.xml><?xml version="1.0" encoding="utf-8"?>
+<file path=ppt/slides/slide12.xml><?xml version="1.0" encoding="utf-8"?>
 <p:sld xmlns:a="http://schemas.openxmlformats.org/drawingml/2006/main" xmlns:r="http://schemas.openxmlformats.org/officeDocument/2006/relationships" xmlns:p="http://schemas.openxmlformats.org/presentationml/2006/main">
   <p:cSld>
     <p:spTree>
@@ -7066,8 +7183,8 @@
         </p:nvSpPr>
         <p:spPr>
           <a:xfrm>
-            <a:off x="748145" y="665018"/>
-            <a:ext cx="10971415" cy="5906378"/>
+            <a:off x="457200" y="499533"/>
+            <a:ext cx="11262360" cy="6071863"/>
           </a:xfrm>
         </p:spPr>
         <p:txBody>
@@ -7077,18 +7194,7 @@
             <a:pPr marL="0" indent="0">
               <a:buNone/>
             </a:pPr>
-            <a:r>
-              <a:rPr lang="en-US" b="1" dirty="0">
-                <a:latin typeface="Times New Roman" panose="02020603050405020304" pitchFamily="18" charset="0"/>
-              </a:rPr>
-              <a:t>Output for Project3 is :</a:t>
-            </a:r>
-          </a:p>
-          <a:p>
-            <a:pPr marL="0" indent="0">
-              <a:buNone/>
-            </a:pPr>
-            <a:endParaRPr lang="en-US" b="1" dirty="0">
+            <a:endParaRPr lang="en-US" cap="all" dirty="0">
               <a:latin typeface="Times New Roman" panose="02020603050405020304" pitchFamily="18" charset="0"/>
             </a:endParaRPr>
           </a:p>
@@ -7100,55 +7206,11 @@
               <a:rPr lang="en-US" b="1" dirty="0">
                 <a:latin typeface="Times New Roman" panose="02020603050405020304" pitchFamily="18" charset="0"/>
               </a:rPr>
-              <a:t> </a:t>
-            </a:r>
-          </a:p>
-          <a:p>
-            <a:pPr marL="0" indent="0">
-              <a:buNone/>
-            </a:pPr>
-            <a:endParaRPr lang="en-US" b="1" dirty="0">
-              <a:latin typeface="Times New Roman" panose="02020603050405020304" pitchFamily="18" charset="0"/>
-            </a:endParaRPr>
-          </a:p>
-        </p:txBody>
-      </p:sp>
-      <p:pic>
-        <p:nvPicPr>
-          <p:cNvPr id="4" name="Picture 3">
-            <a:extLst>
-              <a:ext uri="{FF2B5EF4-FFF2-40B4-BE49-F238E27FC236}">
-                <a16:creationId xmlns:a16="http://schemas.microsoft.com/office/drawing/2014/main" id="{5DD3C294-FA15-155C-B4CD-EA7C3A0C58A8}"/>
-              </a:ext>
-            </a:extLst>
-          </p:cNvPr>
-          <p:cNvPicPr>
-            <a:picLocks noChangeAspect="1"/>
-          </p:cNvPicPr>
-          <p:nvPr/>
-        </p:nvPicPr>
-        <p:blipFill>
-          <a:blip r:embed="rId2">
-            <a:extLst>
-              <a:ext uri="{28A0092B-C50C-407E-A947-70E740481C1C}">
-                <a14:useLocalDpi xmlns:a14="http://schemas.microsoft.com/office/drawing/2010/main" val="0"/>
-              </a:ext>
-            </a:extLst>
-          </a:blip>
-          <a:stretch>
-            <a:fillRect/>
-          </a:stretch>
-        </p:blipFill>
-        <p:spPr>
-          <a:xfrm>
-            <a:off x="748144" y="1144732"/>
-            <a:ext cx="9825645" cy="4939596"/>
-          </a:xfrm>
-          <a:prstGeom prst="rect">
-            <a:avLst/>
-          </a:prstGeom>
-        </p:spPr>
-      </p:pic>
+              <a:t>Output for Project3 is : </a:t>
+            </a:r>
+          </a:p>
+        </p:txBody>
+      </p:sp>
     </p:spTree>
     <p:extLst>
       <p:ext uri="{BB962C8B-B14F-4D97-AF65-F5344CB8AC3E}">
@@ -7165,7 +7227,7 @@
 </p:sld>
 </file>
 
-<file path=ppt/slides/slide14.xml><?xml version="1.0" encoding="utf-8"?>
+<file path=ppt/slides/slide13.xml><?xml version="1.0" encoding="utf-8"?>
 <p:sld xmlns:a="http://schemas.openxmlformats.org/drawingml/2006/main" xmlns:r="http://schemas.openxmlformats.org/officeDocument/2006/relationships" xmlns:p="http://schemas.openxmlformats.org/presentationml/2006/main">
   <p:cSld>
     <p:spTree>
@@ -7384,15 +7446,20 @@
               <a:rPr lang="en-IN" sz="2400" dirty="0">
                 <a:latin typeface="Times New Roman" panose="02020603050405020304" pitchFamily="18" charset="0"/>
               </a:rPr>
-              <a:t>It has some projects that include use of Java modules  like ‘Random’, ‘Math’ and classes like Scanner.</a:t>
-            </a:r>
+              <a:t>It has some projects that include use of Java modules like ‘random’, ‘math’, ‘File’</a:t>
+            </a:r>
+          </a:p>
+          <a:p>
+            <a:endParaRPr lang="en-IN" sz="2400" dirty="0">
+              <a:latin typeface="Times New Roman" panose="02020603050405020304" pitchFamily="18" charset="0"/>
+            </a:endParaRPr>
           </a:p>
           <a:p>
             <a:r>
               <a:rPr lang="en-IN" sz="2400" dirty="0">
                 <a:latin typeface="Times New Roman" panose="02020603050405020304" pitchFamily="18" charset="0"/>
               </a:rPr>
-              <a:t>Here are some simple Java Projects created:    					  A. “Library Management System.”                                                                       	  B. “Word-Counter”.                                                                                                          C. “Time Adder Calculator”.                                                                      </a:t>
+              <a:t>Here are some simple Java Projects created:    					  A. “Library Management System.”                                                                       	  B. “Word-Counter”.                                                                                                          C. “Time Adder”.                                                                      </a:t>
             </a:r>
           </a:p>
           <a:p>
@@ -7488,14 +7555,28 @@
                 <a:latin typeface="Times New Roman" panose="02020603050405020304" pitchFamily="18" charset="0"/>
                 <a:cs typeface="Times New Roman" panose="02020603050405020304" pitchFamily="18" charset="0"/>
               </a:rPr>
-              <a:t>: A.</a:t>
+              <a:t>: </a:t>
+            </a:r>
+            <a:r>
+              <a:rPr lang="en-US" sz="3600" cap="none" dirty="0" err="1">
+                <a:latin typeface="Times New Roman" panose="02020603050405020304" pitchFamily="18" charset="0"/>
+                <a:cs typeface="Times New Roman" panose="02020603050405020304" pitchFamily="18" charset="0"/>
+              </a:rPr>
+              <a:t>A.</a:t>
+            </a:r>
+            <a:r>
+              <a:rPr lang="en-US" sz="3600" u="sng" cap="none" dirty="0" err="1">
+                <a:latin typeface="Times New Roman" panose="02020603050405020304" pitchFamily="18" charset="0"/>
+                <a:cs typeface="Times New Roman" panose="02020603050405020304" pitchFamily="18" charset="0"/>
+              </a:rPr>
+              <a:t>Word</a:t>
             </a:r>
             <a:r>
               <a:rPr lang="en-US" sz="3600" u="sng" cap="none" dirty="0">
                 <a:latin typeface="Times New Roman" panose="02020603050405020304" pitchFamily="18" charset="0"/>
                 <a:cs typeface="Times New Roman" panose="02020603050405020304" pitchFamily="18" charset="0"/>
               </a:rPr>
-              <a:t>Word Counter</a:t>
+              <a:t> Counter</a:t>
             </a:r>
             <a:r>
               <a:rPr lang="en-US" sz="3600" cap="none" dirty="0">
@@ -7529,8 +7610,8 @@
         </p:nvSpPr>
         <p:spPr>
           <a:xfrm>
-            <a:off x="714896" y="975360"/>
-            <a:ext cx="10839796" cy="5596036"/>
+            <a:off x="1097280" y="975360"/>
+            <a:ext cx="10622280" cy="5596036"/>
           </a:xfrm>
         </p:spPr>
         <p:txBody>
@@ -7549,37 +7630,8 @@
               <a:rPr lang="en-IN" sz="2400" dirty="0">
                 <a:latin typeface="Times New Roman" panose="02020603050405020304" pitchFamily="18" charset="0"/>
               </a:rPr>
-              <a:t>The user should enter either a sentence or a paragraph of English words.</a:t>
-            </a:r>
-          </a:p>
-          <a:p>
-            <a:r>
-              <a:rPr lang="en-IN" sz="2400" dirty="0">
-                <a:latin typeface="Times New Roman" panose="02020603050405020304" pitchFamily="18" charset="0"/>
-              </a:rPr>
-              <a:t> For that we input word String using String datatype. We trim the unwanted whitespace if any present inside the entered String.</a:t>
-            </a:r>
-          </a:p>
-          <a:p>
-            <a:r>
-              <a:rPr lang="en-IN" sz="2400" dirty="0">
-                <a:latin typeface="Times New Roman" panose="02020603050405020304" pitchFamily="18" charset="0"/>
-              </a:rPr>
-              <a:t>We find out by starting character of each word after end of whitespaces using loop and increment the count after occurrence of new word starting character.</a:t>
-            </a:r>
-          </a:p>
-          <a:p>
-            <a:r>
-              <a:rPr lang="en-IN" sz="2400" dirty="0">
-                <a:latin typeface="Times New Roman" panose="02020603050405020304" pitchFamily="18" charset="0"/>
-              </a:rPr>
-              <a:t>This way, after we get count of words in String we print it on IDE terminal. </a:t>
-            </a:r>
-          </a:p>
-          <a:p>
-            <a:endParaRPr lang="en-IN" sz="2400" dirty="0">
-              <a:latin typeface="Times New Roman" panose="02020603050405020304" pitchFamily="18" charset="0"/>
-            </a:endParaRPr>
+              <a:t>The user should enter a paragraph of English words. </a:t>
+            </a:r>
           </a:p>
           <a:p>
             <a:endParaRPr lang="en-IN" sz="2400" dirty="0">
@@ -7677,33 +7729,48 @@
                 <a:latin typeface="Times New Roman" panose="02020603050405020304" pitchFamily="18" charset="0"/>
                 <a:cs typeface="Times New Roman" panose="02020603050405020304" pitchFamily="18" charset="0"/>
               </a:rPr>
-              <a:t>package project_files;</a:t>
-            </a:r>
-            <a:br>
+              <a:t>package </a:t>
+            </a:r>
+            <a:r>
+              <a:rPr lang="en-IN" dirty="0" err="1">
+                <a:latin typeface="Times New Roman" panose="02020603050405020304" pitchFamily="18" charset="0"/>
+                <a:cs typeface="Times New Roman" panose="02020603050405020304" pitchFamily="18" charset="0"/>
+              </a:rPr>
+              <a:t>project_files</a:t>
+            </a:r>
+            <a:r>
               <a:rPr lang="en-IN" dirty="0">
                 <a:latin typeface="Times New Roman" panose="02020603050405020304" pitchFamily="18" charset="0"/>
                 <a:cs typeface="Times New Roman" panose="02020603050405020304" pitchFamily="18" charset="0"/>
               </a:rPr>
-            </a:br>
-            <a:r>
+              <a:t>;</a:t>
+            </a:r>
+            <a:br>
               <a:rPr lang="en-IN" dirty="0">
                 <a:latin typeface="Times New Roman" panose="02020603050405020304" pitchFamily="18" charset="0"/>
                 <a:cs typeface="Times New Roman" panose="02020603050405020304" pitchFamily="18" charset="0"/>
               </a:rPr>
-              <a:t>import java.util.Scanner;</a:t>
-            </a:r>
-            <a:br>
+            </a:br>
+            <a:r>
               <a:rPr lang="en-IN" dirty="0">
                 <a:latin typeface="Times New Roman" panose="02020603050405020304" pitchFamily="18" charset="0"/>
                 <a:cs typeface="Times New Roman" panose="02020603050405020304" pitchFamily="18" charset="0"/>
               </a:rPr>
-            </a:br>
+              <a:t>import </a:t>
+            </a:r>
+            <a:r>
+              <a:rPr lang="en-IN" dirty="0" err="1">
+                <a:latin typeface="Times New Roman" panose="02020603050405020304" pitchFamily="18" charset="0"/>
+                <a:cs typeface="Times New Roman" panose="02020603050405020304" pitchFamily="18" charset="0"/>
+              </a:rPr>
+              <a:t>java.util.Scanner</a:t>
+            </a:r>
             <a:r>
               <a:rPr lang="en-IN" dirty="0">
                 <a:latin typeface="Times New Roman" panose="02020603050405020304" pitchFamily="18" charset="0"/>
                 <a:cs typeface="Times New Roman" panose="02020603050405020304" pitchFamily="18" charset="0"/>
               </a:rPr>
-              <a:t>public class word_counter {                                  </a:t>
+              <a:t>;</a:t>
             </a:r>
             <a:br>
               <a:rPr lang="en-IN" dirty="0">
@@ -7716,19 +7783,60 @@
                 <a:latin typeface="Times New Roman" panose="02020603050405020304" pitchFamily="18" charset="0"/>
                 <a:cs typeface="Times New Roman" panose="02020603050405020304" pitchFamily="18" charset="0"/>
               </a:rPr>
-              <a:t>    public static void main(String[] args) {</a:t>
-            </a:r>
-            <a:br>
+              <a:t>public class </a:t>
+            </a:r>
+            <a:r>
+              <a:rPr lang="en-IN" dirty="0" err="1">
+                <a:latin typeface="Times New Roman" panose="02020603050405020304" pitchFamily="18" charset="0"/>
+                <a:cs typeface="Times New Roman" panose="02020603050405020304" pitchFamily="18" charset="0"/>
+              </a:rPr>
+              <a:t>word_counter</a:t>
+            </a:r>
+            <a:r>
               <a:rPr lang="en-IN" dirty="0">
                 <a:latin typeface="Times New Roman" panose="02020603050405020304" pitchFamily="18" charset="0"/>
                 <a:cs typeface="Times New Roman" panose="02020603050405020304" pitchFamily="18" charset="0"/>
               </a:rPr>
-            </a:br>
-            <a:r>
+              <a:t> {                                  </a:t>
+            </a:r>
+            <a:br>
               <a:rPr lang="en-IN" dirty="0">
                 <a:latin typeface="Times New Roman" panose="02020603050405020304" pitchFamily="18" charset="0"/>
                 <a:cs typeface="Times New Roman" panose="02020603050405020304" pitchFamily="18" charset="0"/>
               </a:rPr>
+            </a:br>
+            <a:r>
+              <a:rPr lang="en-IN" dirty="0">
+                <a:latin typeface="Times New Roman" panose="02020603050405020304" pitchFamily="18" charset="0"/>
+                <a:cs typeface="Times New Roman" panose="02020603050405020304" pitchFamily="18" charset="0"/>
+              </a:rPr>
+              <a:t>    public static void main(String[] </a:t>
+            </a:r>
+            <a:r>
+              <a:rPr lang="en-IN" dirty="0" err="1">
+                <a:latin typeface="Times New Roman" panose="02020603050405020304" pitchFamily="18" charset="0"/>
+                <a:cs typeface="Times New Roman" panose="02020603050405020304" pitchFamily="18" charset="0"/>
+              </a:rPr>
+              <a:t>args</a:t>
+            </a:r>
+            <a:r>
+              <a:rPr lang="en-IN" dirty="0">
+                <a:latin typeface="Times New Roman" panose="02020603050405020304" pitchFamily="18" charset="0"/>
+                <a:cs typeface="Times New Roman" panose="02020603050405020304" pitchFamily="18" charset="0"/>
+              </a:rPr>
+              <a:t>) {</a:t>
+            </a:r>
+            <a:br>
+              <a:rPr lang="en-IN" dirty="0">
+                <a:latin typeface="Times New Roman" panose="02020603050405020304" pitchFamily="18" charset="0"/>
+                <a:cs typeface="Times New Roman" panose="02020603050405020304" pitchFamily="18" charset="0"/>
+              </a:rPr>
+            </a:br>
+            <a:r>
+              <a:rPr lang="en-IN" dirty="0">
+                <a:latin typeface="Times New Roman" panose="02020603050405020304" pitchFamily="18" charset="0"/>
+                <a:cs typeface="Times New Roman" panose="02020603050405020304" pitchFamily="18" charset="0"/>
+              </a:rPr>
               <a:t>        //Word counter from a given or entered sentence.</a:t>
             </a:r>
             <a:br>
@@ -7742,7 +7850,21 @@
                 <a:latin typeface="Times New Roman" panose="02020603050405020304" pitchFamily="18" charset="0"/>
                 <a:cs typeface="Times New Roman" panose="02020603050405020304" pitchFamily="18" charset="0"/>
               </a:rPr>
-              <a:t>        Scanner sc =new Scanner(System.</a:t>
+              <a:t>        Scanner </a:t>
+            </a:r>
+            <a:r>
+              <a:rPr lang="en-IN" dirty="0" err="1">
+                <a:latin typeface="Times New Roman" panose="02020603050405020304" pitchFamily="18" charset="0"/>
+                <a:cs typeface="Times New Roman" panose="02020603050405020304" pitchFamily="18" charset="0"/>
+              </a:rPr>
+              <a:t>sc</a:t>
+            </a:r>
+            <a:r>
+              <a:rPr lang="en-IN" dirty="0">
+                <a:latin typeface="Times New Roman" panose="02020603050405020304" pitchFamily="18" charset="0"/>
+                <a:cs typeface="Times New Roman" panose="02020603050405020304" pitchFamily="18" charset="0"/>
+              </a:rPr>
+              <a:t> =new Scanner(System.</a:t>
             </a:r>
             <a:r>
               <a:rPr lang="en-IN" i="1" dirty="0">
@@ -7769,21 +7891,35 @@
                 <a:latin typeface="Times New Roman" panose="02020603050405020304" pitchFamily="18" charset="0"/>
                 <a:cs typeface="Times New Roman" panose="02020603050405020304" pitchFamily="18" charset="0"/>
               </a:rPr>
-              <a:t>        System.</a:t>
-            </a:r>
-            <a:r>
-              <a:rPr lang="en-IN" i="1" dirty="0">
+              <a:t>        </a:t>
+            </a:r>
+            <a:r>
+              <a:rPr lang="en-IN" dirty="0" err="1">
+                <a:latin typeface="Times New Roman" panose="02020603050405020304" pitchFamily="18" charset="0"/>
+                <a:cs typeface="Times New Roman" panose="02020603050405020304" pitchFamily="18" charset="0"/>
+              </a:rPr>
+              <a:t>System.</a:t>
+            </a:r>
+            <a:r>
+              <a:rPr lang="en-IN" i="1" dirty="0" err="1">
                 <a:latin typeface="Times New Roman" panose="02020603050405020304" pitchFamily="18" charset="0"/>
                 <a:cs typeface="Times New Roman" panose="02020603050405020304" pitchFamily="18" charset="0"/>
               </a:rPr>
               <a:t>out</a:t>
             </a:r>
             <a:r>
+              <a:rPr lang="en-IN" dirty="0" err="1">
+                <a:latin typeface="Times New Roman" panose="02020603050405020304" pitchFamily="18" charset="0"/>
+                <a:cs typeface="Times New Roman" panose="02020603050405020304" pitchFamily="18" charset="0"/>
+              </a:rPr>
+              <a:t>.println</a:t>
+            </a:r>
+            <a:r>
               <a:rPr lang="en-IN" dirty="0">
                 <a:latin typeface="Times New Roman" panose="02020603050405020304" pitchFamily="18" charset="0"/>
                 <a:cs typeface="Times New Roman" panose="02020603050405020304" pitchFamily="18" charset="0"/>
               </a:rPr>
-              <a:t>.println("Type your Paragraph: ");</a:t>
+              <a:t>("Type your Paragraph: ");</a:t>
             </a:r>
             <a:br>
               <a:rPr lang="en-IN" dirty="0">
@@ -7796,20 +7932,35 @@
                 <a:latin typeface="Times New Roman" panose="02020603050405020304" pitchFamily="18" charset="0"/>
                 <a:cs typeface="Times New Roman" panose="02020603050405020304" pitchFamily="18" charset="0"/>
               </a:rPr>
-              <a:t>        String userInput = sc.nextLine();</a:t>
-            </a:r>
-            <a:br>
+              <a:t>        String </a:t>
+            </a:r>
+            <a:r>
+              <a:rPr lang="en-IN" dirty="0" err="1">
+                <a:latin typeface="Times New Roman" panose="02020603050405020304" pitchFamily="18" charset="0"/>
+                <a:cs typeface="Times New Roman" panose="02020603050405020304" pitchFamily="18" charset="0"/>
+              </a:rPr>
+              <a:t>userInput</a:t>
+            </a:r>
+            <a:r>
               <a:rPr lang="en-IN" dirty="0">
                 <a:latin typeface="Times New Roman" panose="02020603050405020304" pitchFamily="18" charset="0"/>
                 <a:cs typeface="Times New Roman" panose="02020603050405020304" pitchFamily="18" charset="0"/>
               </a:rPr>
-            </a:br>
+              <a:t> = </a:t>
+            </a:r>
+            <a:r>
+              <a:rPr lang="en-IN" dirty="0" err="1">
+                <a:latin typeface="Times New Roman" panose="02020603050405020304" pitchFamily="18" charset="0"/>
+                <a:cs typeface="Times New Roman" panose="02020603050405020304" pitchFamily="18" charset="0"/>
+              </a:rPr>
+              <a:t>sc.nextLine</a:t>
+            </a:r>
             <a:r>
               <a:rPr lang="en-IN" dirty="0">
                 <a:latin typeface="Times New Roman" panose="02020603050405020304" pitchFamily="18" charset="0"/>
                 <a:cs typeface="Times New Roman" panose="02020603050405020304" pitchFamily="18" charset="0"/>
               </a:rPr>
-              <a:t>        sc.close();</a:t>
+              <a:t>();</a:t>
             </a:r>
             <a:br>
               <a:rPr lang="en-IN" dirty="0">
@@ -7822,19 +7973,74 @@
                 <a:latin typeface="Times New Roman" panose="02020603050405020304" pitchFamily="18" charset="0"/>
                 <a:cs typeface="Times New Roman" panose="02020603050405020304" pitchFamily="18" charset="0"/>
               </a:rPr>
-              <a:t>        userInput = userInput.trim();</a:t>
-            </a:r>
-            <a:br>
+              <a:t>        </a:t>
+            </a:r>
+            <a:r>
+              <a:rPr lang="en-IN" dirty="0" err="1">
+                <a:latin typeface="Times New Roman" panose="02020603050405020304" pitchFamily="18" charset="0"/>
+                <a:cs typeface="Times New Roman" panose="02020603050405020304" pitchFamily="18" charset="0"/>
+              </a:rPr>
+              <a:t>sc.close</a:t>
+            </a:r>
+            <a:r>
               <a:rPr lang="en-IN" dirty="0">
                 <a:latin typeface="Times New Roman" panose="02020603050405020304" pitchFamily="18" charset="0"/>
                 <a:cs typeface="Times New Roman" panose="02020603050405020304" pitchFamily="18" charset="0"/>
               </a:rPr>
-            </a:br>
-            <a:r>
+              <a:t>();</a:t>
+            </a:r>
+            <a:br>
               <a:rPr lang="en-IN" dirty="0">
                 <a:latin typeface="Times New Roman" panose="02020603050405020304" pitchFamily="18" charset="0"/>
                 <a:cs typeface="Times New Roman" panose="02020603050405020304" pitchFamily="18" charset="0"/>
               </a:rPr>
+            </a:br>
+            <a:r>
+              <a:rPr lang="en-IN" dirty="0">
+                <a:latin typeface="Times New Roman" panose="02020603050405020304" pitchFamily="18" charset="0"/>
+                <a:cs typeface="Times New Roman" panose="02020603050405020304" pitchFamily="18" charset="0"/>
+              </a:rPr>
+              <a:t>        </a:t>
+            </a:r>
+            <a:r>
+              <a:rPr lang="en-IN" dirty="0" err="1">
+                <a:latin typeface="Times New Roman" panose="02020603050405020304" pitchFamily="18" charset="0"/>
+                <a:cs typeface="Times New Roman" panose="02020603050405020304" pitchFamily="18" charset="0"/>
+              </a:rPr>
+              <a:t>userInput</a:t>
+            </a:r>
+            <a:r>
+              <a:rPr lang="en-IN" dirty="0">
+                <a:latin typeface="Times New Roman" panose="02020603050405020304" pitchFamily="18" charset="0"/>
+                <a:cs typeface="Times New Roman" panose="02020603050405020304" pitchFamily="18" charset="0"/>
+              </a:rPr>
+              <a:t> = </a:t>
+            </a:r>
+            <a:r>
+              <a:rPr lang="en-IN" dirty="0" err="1">
+                <a:latin typeface="Times New Roman" panose="02020603050405020304" pitchFamily="18" charset="0"/>
+                <a:cs typeface="Times New Roman" panose="02020603050405020304" pitchFamily="18" charset="0"/>
+              </a:rPr>
+              <a:t>userInput.trim</a:t>
+            </a:r>
+            <a:r>
+              <a:rPr lang="en-IN" dirty="0">
+                <a:latin typeface="Times New Roman" panose="02020603050405020304" pitchFamily="18" charset="0"/>
+                <a:cs typeface="Times New Roman" panose="02020603050405020304" pitchFamily="18" charset="0"/>
+              </a:rPr>
+              <a:t>();</a:t>
+            </a:r>
+            <a:br>
+              <a:rPr lang="en-IN" dirty="0">
+                <a:latin typeface="Times New Roman" panose="02020603050405020304" pitchFamily="18" charset="0"/>
+                <a:cs typeface="Times New Roman" panose="02020603050405020304" pitchFamily="18" charset="0"/>
+              </a:rPr>
+            </a:br>
+            <a:r>
+              <a:rPr lang="en-IN" dirty="0">
+                <a:latin typeface="Times New Roman" panose="02020603050405020304" pitchFamily="18" charset="0"/>
+                <a:cs typeface="Times New Roman" panose="02020603050405020304" pitchFamily="18" charset="0"/>
+              </a:rPr>
               <a:t>        int count =0;</a:t>
             </a:r>
             <a:br>
@@ -7848,7 +8054,21 @@
                 <a:latin typeface="Times New Roman" panose="02020603050405020304" pitchFamily="18" charset="0"/>
                 <a:cs typeface="Times New Roman" panose="02020603050405020304" pitchFamily="18" charset="0"/>
               </a:rPr>
-              <a:t>        if(userInput.length()==0){</a:t>
+              <a:t>        if(</a:t>
+            </a:r>
+            <a:r>
+              <a:rPr lang="en-IN" dirty="0" err="1">
+                <a:latin typeface="Times New Roman" panose="02020603050405020304" pitchFamily="18" charset="0"/>
+                <a:cs typeface="Times New Roman" panose="02020603050405020304" pitchFamily="18" charset="0"/>
+              </a:rPr>
+              <a:t>userInput.length</a:t>
+            </a:r>
+            <a:r>
+              <a:rPr lang="en-IN" dirty="0">
+                <a:latin typeface="Times New Roman" panose="02020603050405020304" pitchFamily="18" charset="0"/>
+                <a:cs typeface="Times New Roman" panose="02020603050405020304" pitchFamily="18" charset="0"/>
+              </a:rPr>
+              <a:t>()==0){</a:t>
             </a:r>
             <a:br>
               <a:rPr lang="en-IN" dirty="0">
@@ -7968,32 +8188,116 @@
                 <a:latin typeface="Times New Roman" panose="02020603050405020304" pitchFamily="18" charset="0"/>
                 <a:cs typeface="Times New Roman" panose="02020603050405020304" pitchFamily="18" charset="0"/>
               </a:rPr>
-              <a:t>            for(int i=0;i&lt;userInput.length();i++){</a:t>
-            </a:r>
-            <a:br>
+              <a:t>            for(int </a:t>
+            </a:r>
+            <a:r>
+              <a:rPr lang="en-IN" dirty="0" err="1">
+                <a:latin typeface="Times New Roman" panose="02020603050405020304" pitchFamily="18" charset="0"/>
+                <a:cs typeface="Times New Roman" panose="02020603050405020304" pitchFamily="18" charset="0"/>
+              </a:rPr>
+              <a:t>i</a:t>
+            </a:r>
+            <a:r>
               <a:rPr lang="en-IN" dirty="0">
                 <a:latin typeface="Times New Roman" panose="02020603050405020304" pitchFamily="18" charset="0"/>
                 <a:cs typeface="Times New Roman" panose="02020603050405020304" pitchFamily="18" charset="0"/>
               </a:rPr>
-            </a:br>
+              <a:t>=0;i&lt;</a:t>
+            </a:r>
+            <a:r>
+              <a:rPr lang="en-IN" dirty="0" err="1">
+                <a:latin typeface="Times New Roman" panose="02020603050405020304" pitchFamily="18" charset="0"/>
+                <a:cs typeface="Times New Roman" panose="02020603050405020304" pitchFamily="18" charset="0"/>
+              </a:rPr>
+              <a:t>userInput.length</a:t>
+            </a:r>
             <a:r>
               <a:rPr lang="en-IN" dirty="0">
                 <a:latin typeface="Times New Roman" panose="02020603050405020304" pitchFamily="18" charset="0"/>
                 <a:cs typeface="Times New Roman" panose="02020603050405020304" pitchFamily="18" charset="0"/>
               </a:rPr>
-              <a:t>                if(userInput.charAt(i)==' ‘&amp;&amp; 			userInput.charAt(i+1)!=' ')</a:t>
-            </a:r>
-            <a:br>
+              <a:t>();</a:t>
+            </a:r>
+            <a:r>
+              <a:rPr lang="en-IN" dirty="0" err="1">
+                <a:latin typeface="Times New Roman" panose="02020603050405020304" pitchFamily="18" charset="0"/>
+                <a:cs typeface="Times New Roman" panose="02020603050405020304" pitchFamily="18" charset="0"/>
+              </a:rPr>
+              <a:t>i</a:t>
+            </a:r>
+            <a:r>
               <a:rPr lang="en-IN" dirty="0">
                 <a:latin typeface="Times New Roman" panose="02020603050405020304" pitchFamily="18" charset="0"/>
                 <a:cs typeface="Times New Roman" panose="02020603050405020304" pitchFamily="18" charset="0"/>
               </a:rPr>
-            </a:br>
-            <a:r>
+              <a:t>++){</a:t>
+            </a:r>
+            <a:br>
               <a:rPr lang="en-IN" dirty="0">
                 <a:latin typeface="Times New Roman" panose="02020603050405020304" pitchFamily="18" charset="0"/>
                 <a:cs typeface="Times New Roman" panose="02020603050405020304" pitchFamily="18" charset="0"/>
               </a:rPr>
+            </a:br>
+            <a:r>
+              <a:rPr lang="en-IN" dirty="0">
+                <a:latin typeface="Times New Roman" panose="02020603050405020304" pitchFamily="18" charset="0"/>
+                <a:cs typeface="Times New Roman" panose="02020603050405020304" pitchFamily="18" charset="0"/>
+              </a:rPr>
+              <a:t>                if(</a:t>
+            </a:r>
+            <a:r>
+              <a:rPr lang="en-IN" dirty="0" err="1">
+                <a:latin typeface="Times New Roman" panose="02020603050405020304" pitchFamily="18" charset="0"/>
+                <a:cs typeface="Times New Roman" panose="02020603050405020304" pitchFamily="18" charset="0"/>
+              </a:rPr>
+              <a:t>userInput.charAt</a:t>
+            </a:r>
+            <a:r>
+              <a:rPr lang="en-IN" dirty="0">
+                <a:latin typeface="Times New Roman" panose="02020603050405020304" pitchFamily="18" charset="0"/>
+                <a:cs typeface="Times New Roman" panose="02020603050405020304" pitchFamily="18" charset="0"/>
+              </a:rPr>
+              <a:t>(</a:t>
+            </a:r>
+            <a:r>
+              <a:rPr lang="en-IN" dirty="0" err="1">
+                <a:latin typeface="Times New Roman" panose="02020603050405020304" pitchFamily="18" charset="0"/>
+                <a:cs typeface="Times New Roman" panose="02020603050405020304" pitchFamily="18" charset="0"/>
+              </a:rPr>
+              <a:t>i</a:t>
+            </a:r>
+            <a:r>
+              <a:rPr lang="en-IN" dirty="0">
+                <a:latin typeface="Times New Roman" panose="02020603050405020304" pitchFamily="18" charset="0"/>
+                <a:cs typeface="Times New Roman" panose="02020603050405020304" pitchFamily="18" charset="0"/>
+              </a:rPr>
+              <a:t>)==' ‘&amp;&amp; 			</a:t>
+            </a:r>
+            <a:r>
+              <a:rPr lang="en-IN" dirty="0" err="1">
+                <a:latin typeface="Times New Roman" panose="02020603050405020304" pitchFamily="18" charset="0"/>
+                <a:cs typeface="Times New Roman" panose="02020603050405020304" pitchFamily="18" charset="0"/>
+              </a:rPr>
+              <a:t>userInput.charAt</a:t>
+            </a:r>
+            <a:r>
+              <a:rPr lang="en-IN" dirty="0">
+                <a:latin typeface="Times New Roman" panose="02020603050405020304" pitchFamily="18" charset="0"/>
+                <a:cs typeface="Times New Roman" panose="02020603050405020304" pitchFamily="18" charset="0"/>
+              </a:rPr>
+              <a:t>(i+1)!=' ')</a:t>
+            </a:r>
+            <a:br>
+              <a:rPr lang="en-IN" dirty="0">
+                <a:latin typeface="Times New Roman" panose="02020603050405020304" pitchFamily="18" charset="0"/>
+                <a:cs typeface="Times New Roman" panose="02020603050405020304" pitchFamily="18" charset="0"/>
+              </a:rPr>
+            </a:br>
+            <a:r>
+              <a:rPr lang="en-IN" dirty="0">
+                <a:latin typeface="Times New Roman" panose="02020603050405020304" pitchFamily="18" charset="0"/>
+                <a:cs typeface="Times New Roman" panose="02020603050405020304" pitchFamily="18" charset="0"/>
+              </a:rPr>
               <a:t>                   	 count++;</a:t>
             </a:r>
             <a:br>
@@ -8033,21 +8337,35 @@
                 <a:latin typeface="Times New Roman" panose="02020603050405020304" pitchFamily="18" charset="0"/>
                 <a:cs typeface="Times New Roman" panose="02020603050405020304" pitchFamily="18" charset="0"/>
               </a:rPr>
-              <a:t>        System.</a:t>
-            </a:r>
-            <a:r>
-              <a:rPr lang="en-IN" i="1" dirty="0">
+              <a:t>        </a:t>
+            </a:r>
+            <a:r>
+              <a:rPr lang="en-IN" dirty="0" err="1">
+                <a:latin typeface="Times New Roman" panose="02020603050405020304" pitchFamily="18" charset="0"/>
+                <a:cs typeface="Times New Roman" panose="02020603050405020304" pitchFamily="18" charset="0"/>
+              </a:rPr>
+              <a:t>System.</a:t>
+            </a:r>
+            <a:r>
+              <a:rPr lang="en-IN" i="1" dirty="0" err="1">
                 <a:latin typeface="Times New Roman" panose="02020603050405020304" pitchFamily="18" charset="0"/>
                 <a:cs typeface="Times New Roman" panose="02020603050405020304" pitchFamily="18" charset="0"/>
               </a:rPr>
               <a:t>out</a:t>
             </a:r>
             <a:r>
+              <a:rPr lang="en-IN" dirty="0" err="1">
+                <a:latin typeface="Times New Roman" panose="02020603050405020304" pitchFamily="18" charset="0"/>
+                <a:cs typeface="Times New Roman" panose="02020603050405020304" pitchFamily="18" charset="0"/>
+              </a:rPr>
+              <a:t>.println</a:t>
+            </a:r>
+            <a:r>
               <a:rPr lang="en-IN" dirty="0">
                 <a:latin typeface="Times New Roman" panose="02020603050405020304" pitchFamily="18" charset="0"/>
                 <a:cs typeface="Times New Roman" panose="02020603050405020304" pitchFamily="18" charset="0"/>
               </a:rPr>
-              <a:t>.println("Word count: 	"+count);</a:t>
+              <a:t>("Word count: 	"+count);</a:t>
             </a:r>
             <a:br>
               <a:rPr lang="en-IN" dirty="0">
@@ -8164,59 +8482,23 @@
             <a:pPr marL="0" indent="0">
               <a:buNone/>
             </a:pPr>
-            <a:r>
-              <a:rPr lang="en-US" b="1" dirty="0">
-                <a:latin typeface="Times New Roman" panose="02020603050405020304" pitchFamily="18" charset="0"/>
-              </a:rPr>
-              <a:t>Output for Project 1is : </a:t>
-            </a:r>
-          </a:p>
-          <a:p>
-            <a:pPr marL="0" indent="0">
-              <a:buNone/>
-            </a:pPr>
-            <a:endParaRPr lang="en-US" b="1" dirty="0">
+            <a:endParaRPr lang="en-US" cap="all" dirty="0">
               <a:latin typeface="Times New Roman" panose="02020603050405020304" pitchFamily="18" charset="0"/>
             </a:endParaRPr>
           </a:p>
-        </p:txBody>
-      </p:sp>
-      <p:pic>
-        <p:nvPicPr>
-          <p:cNvPr id="5" name="Picture 4">
-            <a:extLst>
-              <a:ext uri="{FF2B5EF4-FFF2-40B4-BE49-F238E27FC236}">
-                <a16:creationId xmlns:a16="http://schemas.microsoft.com/office/drawing/2014/main" id="{8089412A-CEF0-E153-1FEC-52FBB2DC2DF9}"/>
-              </a:ext>
-            </a:extLst>
-          </p:cNvPr>
-          <p:cNvPicPr>
-            <a:picLocks noChangeAspect="1"/>
-          </p:cNvPicPr>
-          <p:nvPr/>
-        </p:nvPicPr>
-        <p:blipFill>
-          <a:blip r:embed="rId2">
-            <a:extLst>
-              <a:ext uri="{28A0092B-C50C-407E-A947-70E740481C1C}">
-                <a14:useLocalDpi xmlns:a14="http://schemas.microsoft.com/office/drawing/2010/main" val="0"/>
-              </a:ext>
-            </a:extLst>
-          </a:blip>
-          <a:stretch>
-            <a:fillRect/>
-          </a:stretch>
-        </p:blipFill>
-        <p:spPr>
-          <a:xfrm>
-            <a:off x="1097280" y="1637414"/>
-            <a:ext cx="9832990" cy="3976577"/>
-          </a:xfrm>
-          <a:prstGeom prst="rect">
-            <a:avLst/>
-          </a:prstGeom>
-        </p:spPr>
-      </p:pic>
+          <a:p>
+            <a:pPr marL="0" indent="0">
+              <a:buNone/>
+            </a:pPr>
+            <a:r>
+              <a:rPr lang="en-US" b="1" dirty="0">
+                <a:latin typeface="Times New Roman" panose="02020603050405020304" pitchFamily="18" charset="0"/>
+              </a:rPr>
+              <a:t>Output for Project 1is : </a:t>
+            </a:r>
+          </a:p>
+        </p:txBody>
+      </p:sp>
     </p:spTree>
     <p:extLst>
       <p:ext uri="{BB962C8B-B14F-4D97-AF65-F5344CB8AC3E}">
@@ -8234,123 +8516,6 @@
 </file>
 
 <file path=ppt/slides/slide6.xml><?xml version="1.0" encoding="utf-8"?>
-<p:sld xmlns:a="http://schemas.openxmlformats.org/drawingml/2006/main" xmlns:r="http://schemas.openxmlformats.org/officeDocument/2006/relationships" xmlns:p="http://schemas.openxmlformats.org/presentationml/2006/main">
-  <p:cSld>
-    <p:spTree>
-      <p:nvGrpSpPr>
-        <p:cNvPr id="1" name=""/>
-        <p:cNvGrpSpPr/>
-        <p:nvPr/>
-      </p:nvGrpSpPr>
-      <p:grpSpPr>
-        <a:xfrm>
-          <a:off x="0" y="0"/>
-          <a:ext cx="0" cy="0"/>
-          <a:chOff x="0" y="0"/>
-          <a:chExt cx="0" cy="0"/>
-        </a:xfrm>
-      </p:grpSpPr>
-      <p:sp>
-        <p:nvSpPr>
-          <p:cNvPr id="3" name="Content Placeholder 2">
-            <a:extLst>
-              <a:ext uri="{FF2B5EF4-FFF2-40B4-BE49-F238E27FC236}">
-                <a16:creationId xmlns:a16="http://schemas.microsoft.com/office/drawing/2014/main" id="{C4587088-29DE-9E49-C8E2-54B0892EB739}"/>
-              </a:ext>
-            </a:extLst>
-          </p:cNvPr>
-          <p:cNvSpPr>
-            <a:spLocks noGrp="1"/>
-          </p:cNvSpPr>
-          <p:nvPr>
-            <p:ph idx="1"/>
-          </p:nvPr>
-        </p:nvSpPr>
-        <p:spPr>
-          <a:xfrm>
-            <a:off x="685800" y="531628"/>
-            <a:ext cx="10820400" cy="5826642"/>
-          </a:xfrm>
-        </p:spPr>
-        <p:txBody>
-          <a:bodyPr/>
-          <a:lstStyle/>
-          <a:p>
-            <a:r>
-              <a:rPr lang="en-US" dirty="0"/>
-              <a:t>Another Output for Word Counter:</a:t>
-            </a:r>
-          </a:p>
-          <a:p>
-            <a:pPr marL="0" indent="0">
-              <a:buNone/>
-            </a:pPr>
-            <a:endParaRPr lang="en-IN" dirty="0"/>
-          </a:p>
-        </p:txBody>
-      </p:sp>
-      <p:pic>
-        <p:nvPicPr>
-          <p:cNvPr id="5" name="Picture 4">
-            <a:extLst>
-              <a:ext uri="{FF2B5EF4-FFF2-40B4-BE49-F238E27FC236}">
-                <a16:creationId xmlns:a16="http://schemas.microsoft.com/office/drawing/2014/main" id="{FC84C5E5-C729-1CD9-0F91-3DBD7F62DEB1}"/>
-              </a:ext>
-            </a:extLst>
-          </p:cNvPr>
-          <p:cNvPicPr>
-            <a:picLocks noChangeAspect="1"/>
-          </p:cNvPicPr>
-          <p:nvPr/>
-        </p:nvPicPr>
-        <p:blipFill>
-          <a:blip r:embed="rId2">
-            <a:extLst>
-              <a:ext uri="{28A0092B-C50C-407E-A947-70E740481C1C}">
-                <a14:useLocalDpi xmlns:a14="http://schemas.microsoft.com/office/drawing/2010/main" val="0"/>
-              </a:ext>
-            </a:extLst>
-          </a:blip>
-          <a:stretch>
-            <a:fillRect/>
-          </a:stretch>
-        </p:blipFill>
-        <p:spPr>
-          <a:xfrm>
-            <a:off x="685800" y="1403497"/>
-            <a:ext cx="10820400" cy="4146698"/>
-          </a:xfrm>
-          <a:prstGeom prst="rect">
-            <a:avLst/>
-          </a:prstGeom>
-        </p:spPr>
-      </p:pic>
-    </p:spTree>
-    <p:extLst>
-      <p:ext uri="{BB962C8B-B14F-4D97-AF65-F5344CB8AC3E}">
-        <p14:creationId xmlns:p14="http://schemas.microsoft.com/office/powerpoint/2010/main" val="1764076957"/>
-      </p:ext>
-    </p:extLst>
-  </p:cSld>
-  <p:clrMapOvr>
-    <a:masterClrMapping/>
-  </p:clrMapOvr>
-  <mc:AlternateContent xmlns:mc="http://schemas.openxmlformats.org/markup-compatibility/2006" xmlns:p14="http://schemas.microsoft.com/office/powerpoint/2010/main">
-    <mc:Choice Requires="p14">
-      <p:transition spd="med" p14:dur="700">
-        <p:fade/>
-      </p:transition>
-    </mc:Choice>
-    <mc:Fallback xmlns="">
-      <p:transition spd="med">
-        <p:fade/>
-      </p:transition>
-    </mc:Fallback>
-  </mc:AlternateContent>
-</p:sld>
-</file>
-
-<file path=ppt/slides/slide7.xml><?xml version="1.0" encoding="utf-8"?>
 <p:sld xmlns:a="http://schemas.openxmlformats.org/drawingml/2006/main" xmlns:r="http://schemas.openxmlformats.org/officeDocument/2006/relationships" xmlns:p="http://schemas.openxmlformats.org/presentationml/2006/main">
   <p:cSld>
     <p:spTree>
@@ -8413,7 +8578,7 @@
                 <a:latin typeface="Times New Roman" panose="02020603050405020304" pitchFamily="18" charset="0"/>
                 <a:cs typeface="Times New Roman" panose="02020603050405020304" pitchFamily="18" charset="0"/>
               </a:rPr>
-              <a:t>Time Adder Calculator</a:t>
+              <a:t>Time Adder and Subtractor</a:t>
             </a:r>
             <a:r>
               <a:rPr lang="en-US" sz="3600" cap="none" dirty="0">
@@ -8447,8 +8612,8 @@
         </p:nvSpPr>
         <p:spPr>
           <a:xfrm>
-            <a:off x="731520" y="975360"/>
-            <a:ext cx="10988040" cy="5596036"/>
+            <a:off x="1097280" y="975360"/>
+            <a:ext cx="10622280" cy="5596036"/>
           </a:xfrm>
         </p:spPr>
         <p:txBody>
@@ -8467,7 +8632,7 @@
               <a:rPr lang="en-IN" sz="2400" dirty="0">
                 <a:latin typeface="Times New Roman" panose="02020603050405020304" pitchFamily="18" charset="0"/>
               </a:rPr>
-              <a:t>In this project we input the current time as “Starting Time” in the Hour-Minute-Second format. Also, the time to go forward by count is input in the same H-M-S format eg. 5 hours 20 minutes ahead.</a:t>
+              <a:t>In this project we calculate time change from the commencement of time and time gap ahead of time entered. </a:t>
             </a:r>
           </a:p>
           <a:p>
@@ -8475,45 +8640,8 @@
               <a:rPr lang="en-IN" sz="2400" dirty="0">
                 <a:latin typeface="Times New Roman" panose="02020603050405020304" pitchFamily="18" charset="0"/>
               </a:rPr>
-              <a:t>Here we consider calculation as per 24 hour format.</a:t>
-            </a:r>
-          </a:p>
-          <a:p>
-            <a:r>
-              <a:rPr lang="en-IN" sz="2400" dirty="0">
-                <a:latin typeface="Times New Roman" panose="02020603050405020304" pitchFamily="18" charset="0"/>
-              </a:rPr>
-              <a:t>This code finds out actual forward time,  when a required time gap is added to mentioned current time.</a:t>
-            </a:r>
-          </a:p>
-          <a:p>
-            <a:r>
-              <a:rPr lang="en-IN" sz="2400" dirty="0">
-                <a:latin typeface="Times New Roman" panose="02020603050405020304" pitchFamily="18" charset="0"/>
-              </a:rPr>
-              <a:t>For each minute after 60 seconds are over, there should be addition of carry for appending time ahead. Same goes for each hour after 60 minutes, gets carry appended.</a:t>
-            </a:r>
-          </a:p>
-          <a:p>
-            <a:r>
-              <a:rPr lang="en-IN" sz="2400" dirty="0">
-                <a:latin typeface="Times New Roman" panose="02020603050405020304" pitchFamily="18" charset="0"/>
-              </a:rPr>
-              <a:t> For next day, we subtract value from total 24 hours and for the same day, we directly mention the added time.</a:t>
-            </a:r>
-          </a:p>
-          <a:p>
-            <a:r>
-              <a:rPr lang="en-IN" sz="2400" dirty="0">
-                <a:latin typeface="Times New Roman" panose="02020603050405020304" pitchFamily="18" charset="0"/>
-              </a:rPr>
-              <a:t>We display both start time and time ahead in IDE terminal window. </a:t>
-            </a:r>
-          </a:p>
-          <a:p>
-            <a:endParaRPr lang="en-IN" sz="2400" dirty="0">
-              <a:latin typeface="Times New Roman" panose="02020603050405020304" pitchFamily="18" charset="0"/>
-            </a:endParaRPr>
+              <a:t>It provides exact output and performs carry ahead for completion of a second and a minute.</a:t>
+            </a:r>
           </a:p>
           <a:p>
             <a:endParaRPr lang="en-IN" sz="2400" dirty="0">
@@ -8538,7 +8666,7 @@
 </p:sld>
 </file>
 
-<file path=ppt/slides/slide8.xml><?xml version="1.0" encoding="utf-8"?>
+<file path=ppt/slides/slide7.xml><?xml version="1.0" encoding="utf-8"?>
 <p:sld xmlns:a="http://schemas.openxmlformats.org/drawingml/2006/main" xmlns:r="http://schemas.openxmlformats.org/officeDocument/2006/relationships" xmlns:p="http://schemas.openxmlformats.org/presentationml/2006/main">
   <p:cSld>
     <p:spTree>
@@ -8601,371 +8729,1466 @@
               <a:buNone/>
             </a:pPr>
             <a:r>
-              <a:rPr lang="en-US" sz="9600" b="1" dirty="0">
+              <a:rPr lang="en-US" sz="7200" b="1" dirty="0">
                 <a:latin typeface="Times New Roman" panose="02020603050405020304" pitchFamily="18" charset="0"/>
               </a:rPr>
               <a:t>Java Code for Project2 is : </a:t>
             </a:r>
             <a:r>
-              <a:rPr lang="en-US" sz="5100" b="1" dirty="0">
+              <a:rPr lang="en-US" sz="2300" b="1" dirty="0">
                 <a:latin typeface="Times New Roman" panose="02020603050405020304" pitchFamily="18" charset="0"/>
               </a:rPr>
               <a:t>	</a:t>
             </a:r>
-            <a:endParaRPr lang="en-IN" sz="6700" dirty="0"/>
+            <a:endParaRPr lang="en-IN" sz="2300" dirty="0">
+              <a:latin typeface="Times New Roman" panose="02020603050405020304" pitchFamily="18" charset="0"/>
+              <a:cs typeface="Times New Roman" panose="02020603050405020304" pitchFamily="18" charset="0"/>
+            </a:endParaRPr>
           </a:p>
           <a:p>
             <a:pPr marL="0" indent="0">
               <a:buNone/>
             </a:pPr>
-            <a:endParaRPr lang="en-IN" sz="7200" dirty="0"/>
+            <a:r>
+              <a:rPr lang="en-IN" sz="7200" dirty="0">
+                <a:latin typeface="Times New Roman" panose="02020603050405020304" pitchFamily="18" charset="0"/>
+                <a:cs typeface="Times New Roman" panose="02020603050405020304" pitchFamily="18" charset="0"/>
+              </a:rPr>
+              <a:t>package </a:t>
+            </a:r>
+            <a:r>
+              <a:rPr lang="en-IN" sz="7200" dirty="0" err="1">
+                <a:latin typeface="Times New Roman" panose="02020603050405020304" pitchFamily="18" charset="0"/>
+                <a:cs typeface="Times New Roman" panose="02020603050405020304" pitchFamily="18" charset="0"/>
+              </a:rPr>
+              <a:t>project_files</a:t>
+            </a:r>
+            <a:r>
+              <a:rPr lang="en-IN" sz="7200" dirty="0">
+                <a:latin typeface="Times New Roman" panose="02020603050405020304" pitchFamily="18" charset="0"/>
+                <a:cs typeface="Times New Roman" panose="02020603050405020304" pitchFamily="18" charset="0"/>
+              </a:rPr>
+              <a:t>;</a:t>
+            </a:r>
+            <a:br>
+              <a:rPr lang="en-IN" sz="7200" dirty="0">
+                <a:latin typeface="Times New Roman" panose="02020603050405020304" pitchFamily="18" charset="0"/>
+                <a:cs typeface="Times New Roman" panose="02020603050405020304" pitchFamily="18" charset="0"/>
+              </a:rPr>
+            </a:br>
+            <a:r>
+              <a:rPr lang="en-IN" sz="7200" dirty="0">
+                <a:latin typeface="Times New Roman" panose="02020603050405020304" pitchFamily="18" charset="0"/>
+                <a:cs typeface="Times New Roman" panose="02020603050405020304" pitchFamily="18" charset="0"/>
+              </a:rPr>
+              <a:t>import </a:t>
+            </a:r>
+            <a:r>
+              <a:rPr lang="en-IN" sz="7200" dirty="0" err="1">
+                <a:latin typeface="Times New Roman" panose="02020603050405020304" pitchFamily="18" charset="0"/>
+                <a:cs typeface="Times New Roman" panose="02020603050405020304" pitchFamily="18" charset="0"/>
+              </a:rPr>
+              <a:t>java.util.Scanner</a:t>
+            </a:r>
+            <a:r>
+              <a:rPr lang="en-IN" sz="7200" dirty="0">
+                <a:latin typeface="Times New Roman" panose="02020603050405020304" pitchFamily="18" charset="0"/>
+                <a:cs typeface="Times New Roman" panose="02020603050405020304" pitchFamily="18" charset="0"/>
+              </a:rPr>
+              <a:t>;</a:t>
+            </a:r>
+            <a:br>
+              <a:rPr lang="en-IN" sz="7200" dirty="0">
+                <a:latin typeface="Times New Roman" panose="02020603050405020304" pitchFamily="18" charset="0"/>
+                <a:cs typeface="Times New Roman" panose="02020603050405020304" pitchFamily="18" charset="0"/>
+              </a:rPr>
+            </a:br>
+            <a:br>
+              <a:rPr lang="en-IN" sz="7200" dirty="0">
+                <a:latin typeface="Times New Roman" panose="02020603050405020304" pitchFamily="18" charset="0"/>
+                <a:cs typeface="Times New Roman" panose="02020603050405020304" pitchFamily="18" charset="0"/>
+              </a:rPr>
+            </a:br>
+            <a:r>
+              <a:rPr lang="en-IN" sz="7200" dirty="0">
+                <a:latin typeface="Times New Roman" panose="02020603050405020304" pitchFamily="18" charset="0"/>
+                <a:cs typeface="Times New Roman" panose="02020603050405020304" pitchFamily="18" charset="0"/>
+              </a:rPr>
+              <a:t>public class </a:t>
+            </a:r>
+            <a:r>
+              <a:rPr lang="en-IN" sz="7200" dirty="0" err="1">
+                <a:latin typeface="Times New Roman" panose="02020603050405020304" pitchFamily="18" charset="0"/>
+                <a:cs typeface="Times New Roman" panose="02020603050405020304" pitchFamily="18" charset="0"/>
+              </a:rPr>
+              <a:t>time_adder</a:t>
+            </a:r>
+            <a:r>
+              <a:rPr lang="en-IN" sz="7200" dirty="0">
+                <a:latin typeface="Times New Roman" panose="02020603050405020304" pitchFamily="18" charset="0"/>
+                <a:cs typeface="Times New Roman" panose="02020603050405020304" pitchFamily="18" charset="0"/>
+              </a:rPr>
+              <a:t> {</a:t>
+            </a:r>
+            <a:br>
+              <a:rPr lang="en-IN" sz="7200" dirty="0">
+                <a:latin typeface="Times New Roman" panose="02020603050405020304" pitchFamily="18" charset="0"/>
+                <a:cs typeface="Times New Roman" panose="02020603050405020304" pitchFamily="18" charset="0"/>
+              </a:rPr>
+            </a:br>
+            <a:r>
+              <a:rPr lang="en-IN" sz="7200" dirty="0">
+                <a:latin typeface="Times New Roman" panose="02020603050405020304" pitchFamily="18" charset="0"/>
+                <a:cs typeface="Times New Roman" panose="02020603050405020304" pitchFamily="18" charset="0"/>
+              </a:rPr>
+              <a:t>    public static void main(String[] </a:t>
+            </a:r>
+            <a:r>
+              <a:rPr lang="en-IN" sz="7200" dirty="0" err="1">
+                <a:latin typeface="Times New Roman" panose="02020603050405020304" pitchFamily="18" charset="0"/>
+                <a:cs typeface="Times New Roman" panose="02020603050405020304" pitchFamily="18" charset="0"/>
+              </a:rPr>
+              <a:t>args</a:t>
+            </a:r>
+            <a:r>
+              <a:rPr lang="en-IN" sz="7200" dirty="0">
+                <a:latin typeface="Times New Roman" panose="02020603050405020304" pitchFamily="18" charset="0"/>
+                <a:cs typeface="Times New Roman" panose="02020603050405020304" pitchFamily="18" charset="0"/>
+              </a:rPr>
+              <a:t>) {</a:t>
+            </a:r>
+            <a:br>
+              <a:rPr lang="en-IN" sz="7200" dirty="0">
+                <a:latin typeface="Times New Roman" panose="02020603050405020304" pitchFamily="18" charset="0"/>
+                <a:cs typeface="Times New Roman" panose="02020603050405020304" pitchFamily="18" charset="0"/>
+              </a:rPr>
+            </a:br>
+            <a:r>
+              <a:rPr lang="en-IN" sz="7200" dirty="0">
+                <a:latin typeface="Times New Roman" panose="02020603050405020304" pitchFamily="18" charset="0"/>
+                <a:cs typeface="Times New Roman" panose="02020603050405020304" pitchFamily="18" charset="0"/>
+              </a:rPr>
+              <a:t>        Scanner </a:t>
+            </a:r>
+            <a:r>
+              <a:rPr lang="en-IN" sz="7200" dirty="0" err="1">
+                <a:latin typeface="Times New Roman" panose="02020603050405020304" pitchFamily="18" charset="0"/>
+                <a:cs typeface="Times New Roman" panose="02020603050405020304" pitchFamily="18" charset="0"/>
+              </a:rPr>
+              <a:t>sc</a:t>
+            </a:r>
+            <a:r>
+              <a:rPr lang="en-IN" sz="7200" dirty="0">
+                <a:latin typeface="Times New Roman" panose="02020603050405020304" pitchFamily="18" charset="0"/>
+                <a:cs typeface="Times New Roman" panose="02020603050405020304" pitchFamily="18" charset="0"/>
+              </a:rPr>
+              <a:t> = new Scanner(System.</a:t>
+            </a:r>
+            <a:r>
+              <a:rPr lang="en-IN" sz="7200" i="1" dirty="0">
+                <a:latin typeface="Times New Roman" panose="02020603050405020304" pitchFamily="18" charset="0"/>
+                <a:cs typeface="Times New Roman" panose="02020603050405020304" pitchFamily="18" charset="0"/>
+              </a:rPr>
+              <a:t>in</a:t>
+            </a:r>
+            <a:r>
+              <a:rPr lang="en-IN" sz="7200" dirty="0">
+                <a:latin typeface="Times New Roman" panose="02020603050405020304" pitchFamily="18" charset="0"/>
+                <a:cs typeface="Times New Roman" panose="02020603050405020304" pitchFamily="18" charset="0"/>
+              </a:rPr>
+              <a:t>);</a:t>
+            </a:r>
+            <a:br>
+              <a:rPr lang="en-IN" sz="7200" dirty="0">
+                <a:latin typeface="Times New Roman" panose="02020603050405020304" pitchFamily="18" charset="0"/>
+                <a:cs typeface="Times New Roman" panose="02020603050405020304" pitchFamily="18" charset="0"/>
+              </a:rPr>
+            </a:br>
+            <a:r>
+              <a:rPr lang="en-IN" sz="7200" dirty="0">
+                <a:latin typeface="Times New Roman" panose="02020603050405020304" pitchFamily="18" charset="0"/>
+                <a:cs typeface="Times New Roman" panose="02020603050405020304" pitchFamily="18" charset="0"/>
+              </a:rPr>
+              <a:t>        </a:t>
+            </a:r>
+            <a:r>
+              <a:rPr lang="en-IN" sz="7200" dirty="0" err="1">
+                <a:latin typeface="Times New Roman" panose="02020603050405020304" pitchFamily="18" charset="0"/>
+                <a:cs typeface="Times New Roman" panose="02020603050405020304" pitchFamily="18" charset="0"/>
+              </a:rPr>
+              <a:t>System.</a:t>
+            </a:r>
+            <a:r>
+              <a:rPr lang="en-IN" sz="7200" i="1" dirty="0" err="1">
+                <a:latin typeface="Times New Roman" panose="02020603050405020304" pitchFamily="18" charset="0"/>
+                <a:cs typeface="Times New Roman" panose="02020603050405020304" pitchFamily="18" charset="0"/>
+              </a:rPr>
+              <a:t>out</a:t>
+            </a:r>
+            <a:r>
+              <a:rPr lang="en-IN" sz="7200" dirty="0" err="1">
+                <a:latin typeface="Times New Roman" panose="02020603050405020304" pitchFamily="18" charset="0"/>
+                <a:cs typeface="Times New Roman" panose="02020603050405020304" pitchFamily="18" charset="0"/>
+              </a:rPr>
+              <a:t>.println</a:t>
+            </a:r>
+            <a:r>
+              <a:rPr lang="en-IN" sz="7200" dirty="0">
+                <a:latin typeface="Times New Roman" panose="02020603050405020304" pitchFamily="18" charset="0"/>
+                <a:cs typeface="Times New Roman" panose="02020603050405020304" pitchFamily="18" charset="0"/>
+              </a:rPr>
+              <a:t>("Enter current hour: ");</a:t>
+            </a:r>
+            <a:br>
+              <a:rPr lang="en-IN" sz="7200" dirty="0">
+                <a:latin typeface="Times New Roman" panose="02020603050405020304" pitchFamily="18" charset="0"/>
+                <a:cs typeface="Times New Roman" panose="02020603050405020304" pitchFamily="18" charset="0"/>
+              </a:rPr>
+            </a:br>
+            <a:r>
+              <a:rPr lang="en-IN" sz="7200" dirty="0">
+                <a:latin typeface="Times New Roman" panose="02020603050405020304" pitchFamily="18" charset="0"/>
+                <a:cs typeface="Times New Roman" panose="02020603050405020304" pitchFamily="18" charset="0"/>
+              </a:rPr>
+              <a:t>        int </a:t>
+            </a:r>
+            <a:r>
+              <a:rPr lang="en-IN" sz="7200" dirty="0" err="1">
+                <a:latin typeface="Times New Roman" panose="02020603050405020304" pitchFamily="18" charset="0"/>
+                <a:cs typeface="Times New Roman" panose="02020603050405020304" pitchFamily="18" charset="0"/>
+              </a:rPr>
+              <a:t>currentHour</a:t>
+            </a:r>
+            <a:r>
+              <a:rPr lang="en-IN" sz="7200" dirty="0">
+                <a:latin typeface="Times New Roman" panose="02020603050405020304" pitchFamily="18" charset="0"/>
+                <a:cs typeface="Times New Roman" panose="02020603050405020304" pitchFamily="18" charset="0"/>
+              </a:rPr>
+              <a:t> =</a:t>
+            </a:r>
+            <a:r>
+              <a:rPr lang="en-IN" sz="7200" dirty="0" err="1">
+                <a:latin typeface="Times New Roman" panose="02020603050405020304" pitchFamily="18" charset="0"/>
+                <a:cs typeface="Times New Roman" panose="02020603050405020304" pitchFamily="18" charset="0"/>
+              </a:rPr>
+              <a:t>sc.nextInt</a:t>
+            </a:r>
+            <a:r>
+              <a:rPr lang="en-IN" sz="7200" dirty="0">
+                <a:latin typeface="Times New Roman" panose="02020603050405020304" pitchFamily="18" charset="0"/>
+                <a:cs typeface="Times New Roman" panose="02020603050405020304" pitchFamily="18" charset="0"/>
+              </a:rPr>
+              <a:t>();</a:t>
+            </a:r>
+            <a:br>
+              <a:rPr lang="en-IN" sz="7200" dirty="0">
+                <a:latin typeface="Times New Roman" panose="02020603050405020304" pitchFamily="18" charset="0"/>
+                <a:cs typeface="Times New Roman" panose="02020603050405020304" pitchFamily="18" charset="0"/>
+              </a:rPr>
+            </a:br>
+            <a:r>
+              <a:rPr lang="en-IN" sz="7200" dirty="0">
+                <a:latin typeface="Times New Roman" panose="02020603050405020304" pitchFamily="18" charset="0"/>
+                <a:cs typeface="Times New Roman" panose="02020603050405020304" pitchFamily="18" charset="0"/>
+              </a:rPr>
+              <a:t>        </a:t>
+            </a:r>
+            <a:r>
+              <a:rPr lang="en-IN" sz="7200" dirty="0" err="1">
+                <a:latin typeface="Times New Roman" panose="02020603050405020304" pitchFamily="18" charset="0"/>
+                <a:cs typeface="Times New Roman" panose="02020603050405020304" pitchFamily="18" charset="0"/>
+              </a:rPr>
+              <a:t>System.</a:t>
+            </a:r>
+            <a:r>
+              <a:rPr lang="en-IN" sz="7200" i="1" dirty="0" err="1">
+                <a:latin typeface="Times New Roman" panose="02020603050405020304" pitchFamily="18" charset="0"/>
+                <a:cs typeface="Times New Roman" panose="02020603050405020304" pitchFamily="18" charset="0"/>
+              </a:rPr>
+              <a:t>out</a:t>
+            </a:r>
+            <a:r>
+              <a:rPr lang="en-IN" sz="7200" dirty="0" err="1">
+                <a:latin typeface="Times New Roman" panose="02020603050405020304" pitchFamily="18" charset="0"/>
+                <a:cs typeface="Times New Roman" panose="02020603050405020304" pitchFamily="18" charset="0"/>
+              </a:rPr>
+              <a:t>.println</a:t>
+            </a:r>
+            <a:r>
+              <a:rPr lang="en-IN" sz="7200" dirty="0">
+                <a:latin typeface="Times New Roman" panose="02020603050405020304" pitchFamily="18" charset="0"/>
+                <a:cs typeface="Times New Roman" panose="02020603050405020304" pitchFamily="18" charset="0"/>
+              </a:rPr>
+              <a:t>("Enter current minute: ");</a:t>
+            </a:r>
+            <a:br>
+              <a:rPr lang="en-IN" sz="7200" dirty="0">
+                <a:latin typeface="Times New Roman" panose="02020603050405020304" pitchFamily="18" charset="0"/>
+                <a:cs typeface="Times New Roman" panose="02020603050405020304" pitchFamily="18" charset="0"/>
+              </a:rPr>
+            </a:br>
+            <a:r>
+              <a:rPr lang="en-IN" sz="7200" dirty="0">
+                <a:latin typeface="Times New Roman" panose="02020603050405020304" pitchFamily="18" charset="0"/>
+                <a:cs typeface="Times New Roman" panose="02020603050405020304" pitchFamily="18" charset="0"/>
+              </a:rPr>
+              <a:t>        int </a:t>
+            </a:r>
+            <a:r>
+              <a:rPr lang="en-IN" sz="7200" dirty="0" err="1">
+                <a:latin typeface="Times New Roman" panose="02020603050405020304" pitchFamily="18" charset="0"/>
+                <a:cs typeface="Times New Roman" panose="02020603050405020304" pitchFamily="18" charset="0"/>
+              </a:rPr>
+              <a:t>currentMinute</a:t>
+            </a:r>
+            <a:r>
+              <a:rPr lang="en-IN" sz="7200" dirty="0">
+                <a:latin typeface="Times New Roman" panose="02020603050405020304" pitchFamily="18" charset="0"/>
+                <a:cs typeface="Times New Roman" panose="02020603050405020304" pitchFamily="18" charset="0"/>
+              </a:rPr>
+              <a:t> = </a:t>
+            </a:r>
+            <a:r>
+              <a:rPr lang="en-IN" sz="7200" dirty="0" err="1">
+                <a:latin typeface="Times New Roman" panose="02020603050405020304" pitchFamily="18" charset="0"/>
+                <a:cs typeface="Times New Roman" panose="02020603050405020304" pitchFamily="18" charset="0"/>
+              </a:rPr>
+              <a:t>sc.nextInt</a:t>
+            </a:r>
+            <a:r>
+              <a:rPr lang="en-IN" sz="7200" dirty="0">
+                <a:latin typeface="Times New Roman" panose="02020603050405020304" pitchFamily="18" charset="0"/>
+                <a:cs typeface="Times New Roman" panose="02020603050405020304" pitchFamily="18" charset="0"/>
+              </a:rPr>
+              <a:t>();</a:t>
+            </a:r>
+            <a:br>
+              <a:rPr lang="en-IN" sz="7200" dirty="0">
+                <a:latin typeface="Times New Roman" panose="02020603050405020304" pitchFamily="18" charset="0"/>
+                <a:cs typeface="Times New Roman" panose="02020603050405020304" pitchFamily="18" charset="0"/>
+              </a:rPr>
+            </a:br>
+            <a:r>
+              <a:rPr lang="en-IN" sz="7200" dirty="0">
+                <a:latin typeface="Times New Roman" panose="02020603050405020304" pitchFamily="18" charset="0"/>
+                <a:cs typeface="Times New Roman" panose="02020603050405020304" pitchFamily="18" charset="0"/>
+              </a:rPr>
+              <a:t>        </a:t>
+            </a:r>
+            <a:r>
+              <a:rPr lang="en-IN" sz="7200" dirty="0" err="1">
+                <a:latin typeface="Times New Roman" panose="02020603050405020304" pitchFamily="18" charset="0"/>
+                <a:cs typeface="Times New Roman" panose="02020603050405020304" pitchFamily="18" charset="0"/>
+              </a:rPr>
+              <a:t>System.</a:t>
+            </a:r>
+            <a:r>
+              <a:rPr lang="en-IN" sz="7200" i="1" dirty="0" err="1">
+                <a:latin typeface="Times New Roman" panose="02020603050405020304" pitchFamily="18" charset="0"/>
+                <a:cs typeface="Times New Roman" panose="02020603050405020304" pitchFamily="18" charset="0"/>
+              </a:rPr>
+              <a:t>out</a:t>
+            </a:r>
+            <a:r>
+              <a:rPr lang="en-IN" sz="7200" dirty="0" err="1">
+                <a:latin typeface="Times New Roman" panose="02020603050405020304" pitchFamily="18" charset="0"/>
+                <a:cs typeface="Times New Roman" panose="02020603050405020304" pitchFamily="18" charset="0"/>
+              </a:rPr>
+              <a:t>.println</a:t>
+            </a:r>
+            <a:r>
+              <a:rPr lang="en-IN" sz="7200" dirty="0">
+                <a:latin typeface="Times New Roman" panose="02020603050405020304" pitchFamily="18" charset="0"/>
+                <a:cs typeface="Times New Roman" panose="02020603050405020304" pitchFamily="18" charset="0"/>
+              </a:rPr>
+              <a:t>("Enter current second: ");</a:t>
+            </a:r>
+            <a:br>
+              <a:rPr lang="en-IN" sz="7200" dirty="0">
+                <a:latin typeface="Times New Roman" panose="02020603050405020304" pitchFamily="18" charset="0"/>
+                <a:cs typeface="Times New Roman" panose="02020603050405020304" pitchFamily="18" charset="0"/>
+              </a:rPr>
+            </a:br>
+            <a:r>
+              <a:rPr lang="en-IN" sz="7200" dirty="0">
+                <a:latin typeface="Times New Roman" panose="02020603050405020304" pitchFamily="18" charset="0"/>
+                <a:cs typeface="Times New Roman" panose="02020603050405020304" pitchFamily="18" charset="0"/>
+              </a:rPr>
+              <a:t>        int </a:t>
+            </a:r>
+            <a:r>
+              <a:rPr lang="en-IN" sz="7200" dirty="0" err="1">
+                <a:latin typeface="Times New Roman" panose="02020603050405020304" pitchFamily="18" charset="0"/>
+                <a:cs typeface="Times New Roman" panose="02020603050405020304" pitchFamily="18" charset="0"/>
+              </a:rPr>
+              <a:t>currentSecond</a:t>
+            </a:r>
+            <a:r>
+              <a:rPr lang="en-IN" sz="7200" dirty="0">
+                <a:latin typeface="Times New Roman" panose="02020603050405020304" pitchFamily="18" charset="0"/>
+                <a:cs typeface="Times New Roman" panose="02020603050405020304" pitchFamily="18" charset="0"/>
+              </a:rPr>
+              <a:t> = </a:t>
+            </a:r>
+            <a:r>
+              <a:rPr lang="en-IN" sz="7200" dirty="0" err="1">
+                <a:latin typeface="Times New Roman" panose="02020603050405020304" pitchFamily="18" charset="0"/>
+                <a:cs typeface="Times New Roman" panose="02020603050405020304" pitchFamily="18" charset="0"/>
+              </a:rPr>
+              <a:t>sc.nextInt</a:t>
+            </a:r>
+            <a:r>
+              <a:rPr lang="en-IN" sz="7200" dirty="0">
+                <a:latin typeface="Times New Roman" panose="02020603050405020304" pitchFamily="18" charset="0"/>
+                <a:cs typeface="Times New Roman" panose="02020603050405020304" pitchFamily="18" charset="0"/>
+              </a:rPr>
+              <a:t>();</a:t>
+            </a:r>
+            <a:br>
+              <a:rPr lang="en-IN" sz="7200" dirty="0">
+                <a:latin typeface="Times New Roman" panose="02020603050405020304" pitchFamily="18" charset="0"/>
+                <a:cs typeface="Times New Roman" panose="02020603050405020304" pitchFamily="18" charset="0"/>
+              </a:rPr>
+            </a:br>
+            <a:r>
+              <a:rPr lang="en-IN" sz="7200" dirty="0">
+                <a:latin typeface="Times New Roman" panose="02020603050405020304" pitchFamily="18" charset="0"/>
+                <a:cs typeface="Times New Roman" panose="02020603050405020304" pitchFamily="18" charset="0"/>
+              </a:rPr>
+              <a:t>        </a:t>
+            </a:r>
+            <a:r>
+              <a:rPr lang="en-IN" sz="7200" dirty="0" err="1">
+                <a:latin typeface="Times New Roman" panose="02020603050405020304" pitchFamily="18" charset="0"/>
+                <a:cs typeface="Times New Roman" panose="02020603050405020304" pitchFamily="18" charset="0"/>
+              </a:rPr>
+              <a:t>System.</a:t>
+            </a:r>
+            <a:r>
+              <a:rPr lang="en-IN" sz="7200" i="1" dirty="0" err="1">
+                <a:latin typeface="Times New Roman" panose="02020603050405020304" pitchFamily="18" charset="0"/>
+                <a:cs typeface="Times New Roman" panose="02020603050405020304" pitchFamily="18" charset="0"/>
+              </a:rPr>
+              <a:t>out</a:t>
+            </a:r>
+            <a:r>
+              <a:rPr lang="en-IN" sz="7200" dirty="0" err="1">
+                <a:latin typeface="Times New Roman" panose="02020603050405020304" pitchFamily="18" charset="0"/>
+                <a:cs typeface="Times New Roman" panose="02020603050405020304" pitchFamily="18" charset="0"/>
+              </a:rPr>
+              <a:t>.println</a:t>
+            </a:r>
+            <a:r>
+              <a:rPr lang="en-IN" sz="7200" dirty="0">
+                <a:latin typeface="Times New Roman" panose="02020603050405020304" pitchFamily="18" charset="0"/>
+                <a:cs typeface="Times New Roman" panose="02020603050405020304" pitchFamily="18" charset="0"/>
+              </a:rPr>
+              <a:t>("Enter hour to go forward hour: ");</a:t>
+            </a:r>
+            <a:br>
+              <a:rPr lang="en-IN" sz="7200" dirty="0">
+                <a:latin typeface="Times New Roman" panose="02020603050405020304" pitchFamily="18" charset="0"/>
+                <a:cs typeface="Times New Roman" panose="02020603050405020304" pitchFamily="18" charset="0"/>
+              </a:rPr>
+            </a:br>
+            <a:r>
+              <a:rPr lang="en-IN" sz="7200" dirty="0">
+                <a:latin typeface="Times New Roman" panose="02020603050405020304" pitchFamily="18" charset="0"/>
+                <a:cs typeface="Times New Roman" panose="02020603050405020304" pitchFamily="18" charset="0"/>
+              </a:rPr>
+              <a:t>        int </a:t>
+            </a:r>
+            <a:r>
+              <a:rPr lang="en-IN" sz="7200" dirty="0" err="1">
+                <a:latin typeface="Times New Roman" panose="02020603050405020304" pitchFamily="18" charset="0"/>
+                <a:cs typeface="Times New Roman" panose="02020603050405020304" pitchFamily="18" charset="0"/>
+              </a:rPr>
+              <a:t>nextHour</a:t>
+            </a:r>
+            <a:r>
+              <a:rPr lang="en-IN" sz="7200" dirty="0">
+                <a:latin typeface="Times New Roman" panose="02020603050405020304" pitchFamily="18" charset="0"/>
+                <a:cs typeface="Times New Roman" panose="02020603050405020304" pitchFamily="18" charset="0"/>
+              </a:rPr>
+              <a:t> =</a:t>
+            </a:r>
+            <a:r>
+              <a:rPr lang="en-IN" sz="7200" dirty="0" err="1">
+                <a:latin typeface="Times New Roman" panose="02020603050405020304" pitchFamily="18" charset="0"/>
+                <a:cs typeface="Times New Roman" panose="02020603050405020304" pitchFamily="18" charset="0"/>
+              </a:rPr>
+              <a:t>sc.nextInt</a:t>
+            </a:r>
+            <a:r>
+              <a:rPr lang="en-IN" sz="7200" dirty="0">
+                <a:latin typeface="Times New Roman" panose="02020603050405020304" pitchFamily="18" charset="0"/>
+                <a:cs typeface="Times New Roman" panose="02020603050405020304" pitchFamily="18" charset="0"/>
+              </a:rPr>
+              <a:t>();</a:t>
+            </a:r>
+            <a:br>
+              <a:rPr lang="en-IN" sz="7200" dirty="0">
+                <a:latin typeface="Times New Roman" panose="02020603050405020304" pitchFamily="18" charset="0"/>
+                <a:cs typeface="Times New Roman" panose="02020603050405020304" pitchFamily="18" charset="0"/>
+              </a:rPr>
+            </a:br>
+            <a:r>
+              <a:rPr lang="en-IN" sz="7200" dirty="0">
+                <a:latin typeface="Times New Roman" panose="02020603050405020304" pitchFamily="18" charset="0"/>
+                <a:cs typeface="Times New Roman" panose="02020603050405020304" pitchFamily="18" charset="0"/>
+              </a:rPr>
+              <a:t>        </a:t>
+            </a:r>
+            <a:r>
+              <a:rPr lang="en-IN" sz="7200" dirty="0" err="1">
+                <a:latin typeface="Times New Roman" panose="02020603050405020304" pitchFamily="18" charset="0"/>
+                <a:cs typeface="Times New Roman" panose="02020603050405020304" pitchFamily="18" charset="0"/>
+              </a:rPr>
+              <a:t>System.</a:t>
+            </a:r>
+            <a:r>
+              <a:rPr lang="en-IN" sz="7200" i="1" dirty="0" err="1">
+                <a:latin typeface="Times New Roman" panose="02020603050405020304" pitchFamily="18" charset="0"/>
+                <a:cs typeface="Times New Roman" panose="02020603050405020304" pitchFamily="18" charset="0"/>
+              </a:rPr>
+              <a:t>out</a:t>
+            </a:r>
+            <a:r>
+              <a:rPr lang="en-IN" sz="7200" dirty="0" err="1">
+                <a:latin typeface="Times New Roman" panose="02020603050405020304" pitchFamily="18" charset="0"/>
+                <a:cs typeface="Times New Roman" panose="02020603050405020304" pitchFamily="18" charset="0"/>
+              </a:rPr>
+              <a:t>.println</a:t>
+            </a:r>
+            <a:r>
+              <a:rPr lang="en-IN" sz="7200" dirty="0">
+                <a:latin typeface="Times New Roman" panose="02020603050405020304" pitchFamily="18" charset="0"/>
+                <a:cs typeface="Times New Roman" panose="02020603050405020304" pitchFamily="18" charset="0"/>
+              </a:rPr>
+              <a:t>("Enter minute to go forward: ");</a:t>
+            </a:r>
+            <a:br>
+              <a:rPr lang="en-IN" sz="7200" dirty="0">
+                <a:latin typeface="Times New Roman" panose="02020603050405020304" pitchFamily="18" charset="0"/>
+                <a:cs typeface="Times New Roman" panose="02020603050405020304" pitchFamily="18" charset="0"/>
+              </a:rPr>
+            </a:br>
+            <a:r>
+              <a:rPr lang="en-IN" sz="7200" dirty="0">
+                <a:latin typeface="Times New Roman" panose="02020603050405020304" pitchFamily="18" charset="0"/>
+                <a:cs typeface="Times New Roman" panose="02020603050405020304" pitchFamily="18" charset="0"/>
+              </a:rPr>
+              <a:t>        int </a:t>
+            </a:r>
+            <a:r>
+              <a:rPr lang="en-IN" sz="7200" dirty="0" err="1">
+                <a:latin typeface="Times New Roman" panose="02020603050405020304" pitchFamily="18" charset="0"/>
+                <a:cs typeface="Times New Roman" panose="02020603050405020304" pitchFamily="18" charset="0"/>
+              </a:rPr>
+              <a:t>nextMinute</a:t>
+            </a:r>
+            <a:r>
+              <a:rPr lang="en-IN" sz="7200" dirty="0">
+                <a:latin typeface="Times New Roman" panose="02020603050405020304" pitchFamily="18" charset="0"/>
+                <a:cs typeface="Times New Roman" panose="02020603050405020304" pitchFamily="18" charset="0"/>
+              </a:rPr>
+              <a:t> = </a:t>
+            </a:r>
+            <a:r>
+              <a:rPr lang="en-IN" sz="7200" dirty="0" err="1">
+                <a:latin typeface="Times New Roman" panose="02020603050405020304" pitchFamily="18" charset="0"/>
+                <a:cs typeface="Times New Roman" panose="02020603050405020304" pitchFamily="18" charset="0"/>
+              </a:rPr>
+              <a:t>sc.nextInt</a:t>
+            </a:r>
+            <a:r>
+              <a:rPr lang="en-IN" sz="7200" dirty="0">
+                <a:latin typeface="Times New Roman" panose="02020603050405020304" pitchFamily="18" charset="0"/>
+                <a:cs typeface="Times New Roman" panose="02020603050405020304" pitchFamily="18" charset="0"/>
+              </a:rPr>
+              <a:t>();</a:t>
+            </a:r>
+            <a:br>
+              <a:rPr lang="en-IN" sz="7200" dirty="0">
+                <a:latin typeface="Times New Roman" panose="02020603050405020304" pitchFamily="18" charset="0"/>
+                <a:cs typeface="Times New Roman" panose="02020603050405020304" pitchFamily="18" charset="0"/>
+              </a:rPr>
+            </a:br>
+            <a:r>
+              <a:rPr lang="en-IN" sz="7200" dirty="0">
+                <a:latin typeface="Times New Roman" panose="02020603050405020304" pitchFamily="18" charset="0"/>
+                <a:cs typeface="Times New Roman" panose="02020603050405020304" pitchFamily="18" charset="0"/>
+              </a:rPr>
+              <a:t>        </a:t>
+            </a:r>
+            <a:r>
+              <a:rPr lang="en-IN" sz="7200" dirty="0" err="1">
+                <a:latin typeface="Times New Roman" panose="02020603050405020304" pitchFamily="18" charset="0"/>
+                <a:cs typeface="Times New Roman" panose="02020603050405020304" pitchFamily="18" charset="0"/>
+              </a:rPr>
+              <a:t>System.</a:t>
+            </a:r>
+            <a:r>
+              <a:rPr lang="en-IN" sz="7200" i="1" dirty="0" err="1">
+                <a:latin typeface="Times New Roman" panose="02020603050405020304" pitchFamily="18" charset="0"/>
+                <a:cs typeface="Times New Roman" panose="02020603050405020304" pitchFamily="18" charset="0"/>
+              </a:rPr>
+              <a:t>out</a:t>
+            </a:r>
+            <a:r>
+              <a:rPr lang="en-IN" sz="7200" dirty="0" err="1">
+                <a:latin typeface="Times New Roman" panose="02020603050405020304" pitchFamily="18" charset="0"/>
+                <a:cs typeface="Times New Roman" panose="02020603050405020304" pitchFamily="18" charset="0"/>
+              </a:rPr>
+              <a:t>.println</a:t>
+            </a:r>
+            <a:r>
+              <a:rPr lang="en-IN" sz="7200" dirty="0">
+                <a:latin typeface="Times New Roman" panose="02020603050405020304" pitchFamily="18" charset="0"/>
+                <a:cs typeface="Times New Roman" panose="02020603050405020304" pitchFamily="18" charset="0"/>
+              </a:rPr>
+              <a:t>("Enter second to go forward: ");</a:t>
+            </a:r>
+            <a:br>
+              <a:rPr lang="en-IN" sz="7200" dirty="0">
+                <a:latin typeface="Times New Roman" panose="02020603050405020304" pitchFamily="18" charset="0"/>
+                <a:cs typeface="Times New Roman" panose="02020603050405020304" pitchFamily="18" charset="0"/>
+              </a:rPr>
+            </a:br>
+            <a:r>
+              <a:rPr lang="en-IN" sz="7200" dirty="0">
+                <a:latin typeface="Times New Roman" panose="02020603050405020304" pitchFamily="18" charset="0"/>
+                <a:cs typeface="Times New Roman" panose="02020603050405020304" pitchFamily="18" charset="0"/>
+              </a:rPr>
+              <a:t>        int </a:t>
+            </a:r>
+            <a:r>
+              <a:rPr lang="en-IN" sz="7200" dirty="0" err="1">
+                <a:latin typeface="Times New Roman" panose="02020603050405020304" pitchFamily="18" charset="0"/>
+                <a:cs typeface="Times New Roman" panose="02020603050405020304" pitchFamily="18" charset="0"/>
+              </a:rPr>
+              <a:t>nextSecond</a:t>
+            </a:r>
+            <a:r>
+              <a:rPr lang="en-IN" sz="7200" dirty="0">
+                <a:latin typeface="Times New Roman" panose="02020603050405020304" pitchFamily="18" charset="0"/>
+                <a:cs typeface="Times New Roman" panose="02020603050405020304" pitchFamily="18" charset="0"/>
+              </a:rPr>
+              <a:t> = </a:t>
+            </a:r>
+            <a:r>
+              <a:rPr lang="en-IN" sz="7200" dirty="0" err="1">
+                <a:latin typeface="Times New Roman" panose="02020603050405020304" pitchFamily="18" charset="0"/>
+                <a:cs typeface="Times New Roman" panose="02020603050405020304" pitchFamily="18" charset="0"/>
+              </a:rPr>
+              <a:t>sc.nextInt</a:t>
+            </a:r>
+            <a:r>
+              <a:rPr lang="en-IN" sz="7200" dirty="0">
+                <a:latin typeface="Times New Roman" panose="02020603050405020304" pitchFamily="18" charset="0"/>
+                <a:cs typeface="Times New Roman" panose="02020603050405020304" pitchFamily="18" charset="0"/>
+              </a:rPr>
+              <a:t>();</a:t>
+            </a:r>
+            <a:br>
+              <a:rPr lang="en-IN" sz="7200" dirty="0">
+                <a:latin typeface="Times New Roman" panose="02020603050405020304" pitchFamily="18" charset="0"/>
+                <a:cs typeface="Times New Roman" panose="02020603050405020304" pitchFamily="18" charset="0"/>
+              </a:rPr>
+            </a:br>
+            <a:r>
+              <a:rPr lang="en-IN" sz="7200" dirty="0">
+                <a:latin typeface="Times New Roman" panose="02020603050405020304" pitchFamily="18" charset="0"/>
+                <a:cs typeface="Times New Roman" panose="02020603050405020304" pitchFamily="18" charset="0"/>
+              </a:rPr>
+              <a:t>        int </a:t>
+            </a:r>
+            <a:r>
+              <a:rPr lang="en-IN" sz="7200" dirty="0" err="1">
+                <a:latin typeface="Times New Roman" panose="02020603050405020304" pitchFamily="18" charset="0"/>
+                <a:cs typeface="Times New Roman" panose="02020603050405020304" pitchFamily="18" charset="0"/>
+              </a:rPr>
+              <a:t>answerHour</a:t>
+            </a:r>
+            <a:r>
+              <a:rPr lang="en-IN" sz="7200" dirty="0">
+                <a:latin typeface="Times New Roman" panose="02020603050405020304" pitchFamily="18" charset="0"/>
+                <a:cs typeface="Times New Roman" panose="02020603050405020304" pitchFamily="18" charset="0"/>
+              </a:rPr>
+              <a:t> =0 ,</a:t>
+            </a:r>
+            <a:r>
+              <a:rPr lang="en-IN" sz="7200" dirty="0" err="1">
+                <a:latin typeface="Times New Roman" panose="02020603050405020304" pitchFamily="18" charset="0"/>
+                <a:cs typeface="Times New Roman" panose="02020603050405020304" pitchFamily="18" charset="0"/>
+              </a:rPr>
+              <a:t>answerMinute</a:t>
+            </a:r>
+            <a:r>
+              <a:rPr lang="en-IN" sz="7200" dirty="0">
+                <a:latin typeface="Times New Roman" panose="02020603050405020304" pitchFamily="18" charset="0"/>
+                <a:cs typeface="Times New Roman" panose="02020603050405020304" pitchFamily="18" charset="0"/>
+              </a:rPr>
+              <a:t>=0,answerSecond=0;</a:t>
+            </a:r>
+            <a:br>
+              <a:rPr lang="en-IN" sz="7200" dirty="0">
+                <a:latin typeface="Times New Roman" panose="02020603050405020304" pitchFamily="18" charset="0"/>
+                <a:cs typeface="Times New Roman" panose="02020603050405020304" pitchFamily="18" charset="0"/>
+              </a:rPr>
+            </a:br>
+            <a:r>
+              <a:rPr lang="en-IN" sz="7200" dirty="0">
+                <a:latin typeface="Times New Roman" panose="02020603050405020304" pitchFamily="18" charset="0"/>
+                <a:cs typeface="Times New Roman" panose="02020603050405020304" pitchFamily="18" charset="0"/>
+              </a:rPr>
+              <a:t>        int </a:t>
+            </a:r>
+            <a:r>
+              <a:rPr lang="en-IN" sz="7200" dirty="0" err="1">
+                <a:latin typeface="Times New Roman" panose="02020603050405020304" pitchFamily="18" charset="0"/>
+                <a:cs typeface="Times New Roman" panose="02020603050405020304" pitchFamily="18" charset="0"/>
+              </a:rPr>
+              <a:t>carrySecond</a:t>
+            </a:r>
+            <a:r>
+              <a:rPr lang="en-IN" sz="7200" dirty="0">
+                <a:latin typeface="Times New Roman" panose="02020603050405020304" pitchFamily="18" charset="0"/>
+                <a:cs typeface="Times New Roman" panose="02020603050405020304" pitchFamily="18" charset="0"/>
+              </a:rPr>
+              <a:t>=0,carryMinute=0;</a:t>
+            </a:r>
+            <a:br>
+              <a:rPr lang="en-IN" sz="7200" dirty="0">
+                <a:latin typeface="Times New Roman" panose="02020603050405020304" pitchFamily="18" charset="0"/>
+                <a:cs typeface="Times New Roman" panose="02020603050405020304" pitchFamily="18" charset="0"/>
+              </a:rPr>
+            </a:br>
+            <a:r>
+              <a:rPr lang="en-IN" sz="7200" dirty="0">
+                <a:latin typeface="Times New Roman" panose="02020603050405020304" pitchFamily="18" charset="0"/>
+                <a:cs typeface="Times New Roman" panose="02020603050405020304" pitchFamily="18" charset="0"/>
+              </a:rPr>
+              <a:t>        </a:t>
+            </a:r>
+            <a:r>
+              <a:rPr lang="en-IN" sz="7200" dirty="0" err="1">
+                <a:latin typeface="Times New Roman" panose="02020603050405020304" pitchFamily="18" charset="0"/>
+                <a:cs typeface="Times New Roman" panose="02020603050405020304" pitchFamily="18" charset="0"/>
+              </a:rPr>
+              <a:t>boolean</a:t>
+            </a:r>
+            <a:r>
+              <a:rPr lang="en-IN" sz="7200" dirty="0">
+                <a:latin typeface="Times New Roman" panose="02020603050405020304" pitchFamily="18" charset="0"/>
+                <a:cs typeface="Times New Roman" panose="02020603050405020304" pitchFamily="18" charset="0"/>
+              </a:rPr>
+              <a:t> </a:t>
+            </a:r>
+            <a:r>
+              <a:rPr lang="en-IN" sz="7200" dirty="0" err="1">
+                <a:latin typeface="Times New Roman" panose="02020603050405020304" pitchFamily="18" charset="0"/>
+                <a:cs typeface="Times New Roman" panose="02020603050405020304" pitchFamily="18" charset="0"/>
+              </a:rPr>
+              <a:t>isNextDay</a:t>
+            </a:r>
+            <a:r>
+              <a:rPr lang="en-IN" sz="7200" dirty="0">
+                <a:latin typeface="Times New Roman" panose="02020603050405020304" pitchFamily="18" charset="0"/>
+                <a:cs typeface="Times New Roman" panose="02020603050405020304" pitchFamily="18" charset="0"/>
+              </a:rPr>
+              <a:t> =false;</a:t>
+            </a:r>
+            <a:br>
+              <a:rPr lang="en-IN" sz="7200" dirty="0">
+                <a:latin typeface="Times New Roman" panose="02020603050405020304" pitchFamily="18" charset="0"/>
+                <a:cs typeface="Times New Roman" panose="02020603050405020304" pitchFamily="18" charset="0"/>
+              </a:rPr>
+            </a:br>
+            <a:r>
+              <a:rPr lang="en-IN" sz="7200" dirty="0">
+                <a:latin typeface="Times New Roman" panose="02020603050405020304" pitchFamily="18" charset="0"/>
+                <a:cs typeface="Times New Roman" panose="02020603050405020304" pitchFamily="18" charset="0"/>
+              </a:rPr>
+              <a:t>        </a:t>
+            </a:r>
+            <a:r>
+              <a:rPr lang="en-IN" sz="7200" dirty="0" err="1">
+                <a:latin typeface="Times New Roman" panose="02020603050405020304" pitchFamily="18" charset="0"/>
+                <a:cs typeface="Times New Roman" panose="02020603050405020304" pitchFamily="18" charset="0"/>
+              </a:rPr>
+              <a:t>answerSecond</a:t>
+            </a:r>
+            <a:r>
+              <a:rPr lang="en-IN" sz="7200" dirty="0">
+                <a:latin typeface="Times New Roman" panose="02020603050405020304" pitchFamily="18" charset="0"/>
+                <a:cs typeface="Times New Roman" panose="02020603050405020304" pitchFamily="18" charset="0"/>
+              </a:rPr>
+              <a:t> = </a:t>
+            </a:r>
+            <a:r>
+              <a:rPr lang="en-IN" sz="7200" dirty="0" err="1">
+                <a:latin typeface="Times New Roman" panose="02020603050405020304" pitchFamily="18" charset="0"/>
+                <a:cs typeface="Times New Roman" panose="02020603050405020304" pitchFamily="18" charset="0"/>
+              </a:rPr>
+              <a:t>currentSecond</a:t>
+            </a:r>
+            <a:r>
+              <a:rPr lang="en-IN" sz="7200" dirty="0">
+                <a:latin typeface="Times New Roman" panose="02020603050405020304" pitchFamily="18" charset="0"/>
+                <a:cs typeface="Times New Roman" panose="02020603050405020304" pitchFamily="18" charset="0"/>
+              </a:rPr>
+              <a:t> + </a:t>
+            </a:r>
+            <a:r>
+              <a:rPr lang="en-IN" sz="7200" dirty="0" err="1">
+                <a:latin typeface="Times New Roman" panose="02020603050405020304" pitchFamily="18" charset="0"/>
+                <a:cs typeface="Times New Roman" panose="02020603050405020304" pitchFamily="18" charset="0"/>
+              </a:rPr>
+              <a:t>nextSecond</a:t>
+            </a:r>
+            <a:r>
+              <a:rPr lang="en-IN" sz="7200" dirty="0">
+                <a:latin typeface="Times New Roman" panose="02020603050405020304" pitchFamily="18" charset="0"/>
+                <a:cs typeface="Times New Roman" panose="02020603050405020304" pitchFamily="18" charset="0"/>
+              </a:rPr>
+              <a:t>;</a:t>
+            </a:r>
+            <a:br>
+              <a:rPr lang="en-IN" sz="7200" dirty="0">
+                <a:latin typeface="Times New Roman" panose="02020603050405020304" pitchFamily="18" charset="0"/>
+                <a:cs typeface="Times New Roman" panose="02020603050405020304" pitchFamily="18" charset="0"/>
+              </a:rPr>
+            </a:br>
+            <a:endParaRPr lang="en-IN" sz="7200" dirty="0">
+              <a:latin typeface="Times New Roman" panose="02020603050405020304" pitchFamily="18" charset="0"/>
+              <a:cs typeface="Times New Roman" panose="02020603050405020304" pitchFamily="18" charset="0"/>
+            </a:endParaRPr>
           </a:p>
           <a:p>
             <a:pPr marL="0" indent="0">
               <a:buNone/>
             </a:pPr>
             <a:r>
-              <a:rPr lang="en-IN" sz="8000" dirty="0"/>
-              <a:t>package project_files;</a:t>
-            </a:r>
-            <a:br>
-              <a:rPr lang="en-IN" sz="8000" dirty="0"/>
-            </a:br>
-            <a:r>
-              <a:rPr lang="en-IN" sz="8000" dirty="0"/>
-              <a:t>import java.util.Scanner;</a:t>
-            </a:r>
-            <a:br>
-              <a:rPr lang="en-IN" sz="8000" dirty="0"/>
-            </a:br>
-            <a:br>
-              <a:rPr lang="en-IN" sz="8000" dirty="0"/>
-            </a:br>
-            <a:r>
-              <a:rPr lang="en-IN" sz="8000" dirty="0"/>
-              <a:t>public class time_adder {</a:t>
-            </a:r>
-            <a:br>
-              <a:rPr lang="en-IN" sz="8000" dirty="0"/>
-            </a:br>
-            <a:r>
-              <a:rPr lang="en-IN" sz="8000" dirty="0"/>
-              <a:t>    public static void main(String[] args) {</a:t>
-            </a:r>
-            <a:br>
-              <a:rPr lang="en-IN" sz="8000" dirty="0"/>
-            </a:br>
-            <a:r>
-              <a:rPr lang="en-IN" sz="8000" dirty="0"/>
-              <a:t>        Scanner sc = new Scanner(System.</a:t>
-            </a:r>
-            <a:r>
-              <a:rPr lang="en-IN" sz="8000" i="1" dirty="0"/>
-              <a:t>in</a:t>
-            </a:r>
-            <a:r>
-              <a:rPr lang="en-IN" sz="8000" dirty="0"/>
-              <a:t>);</a:t>
-            </a:r>
-            <a:br>
-              <a:rPr lang="en-IN" sz="8000" dirty="0"/>
-            </a:br>
-            <a:r>
-              <a:rPr lang="en-IN" sz="8000" dirty="0"/>
-              <a:t>        System.</a:t>
-            </a:r>
-            <a:r>
-              <a:rPr lang="en-IN" sz="8000" i="1" dirty="0"/>
+              <a:rPr lang="en-IN" sz="7200" dirty="0">
+                <a:latin typeface="Times New Roman" panose="02020603050405020304" pitchFamily="18" charset="0"/>
+                <a:cs typeface="Times New Roman" panose="02020603050405020304" pitchFamily="18" charset="0"/>
+              </a:rPr>
+              <a:t> if(</a:t>
+            </a:r>
+            <a:r>
+              <a:rPr lang="en-IN" sz="7200" dirty="0" err="1">
+                <a:latin typeface="Times New Roman" panose="02020603050405020304" pitchFamily="18" charset="0"/>
+                <a:cs typeface="Times New Roman" panose="02020603050405020304" pitchFamily="18" charset="0"/>
+              </a:rPr>
+              <a:t>answerSecond</a:t>
+            </a:r>
+            <a:r>
+              <a:rPr lang="en-IN" sz="7200" dirty="0">
+                <a:latin typeface="Times New Roman" panose="02020603050405020304" pitchFamily="18" charset="0"/>
+                <a:cs typeface="Times New Roman" panose="02020603050405020304" pitchFamily="18" charset="0"/>
+              </a:rPr>
+              <a:t>&gt;=60){</a:t>
+            </a:r>
+            <a:br>
+              <a:rPr lang="en-IN" sz="7200" dirty="0">
+                <a:latin typeface="Times New Roman" panose="02020603050405020304" pitchFamily="18" charset="0"/>
+                <a:cs typeface="Times New Roman" panose="02020603050405020304" pitchFamily="18" charset="0"/>
+              </a:rPr>
+            </a:br>
+            <a:r>
+              <a:rPr lang="en-IN" sz="7200" dirty="0">
+                <a:latin typeface="Times New Roman" panose="02020603050405020304" pitchFamily="18" charset="0"/>
+                <a:cs typeface="Times New Roman" panose="02020603050405020304" pitchFamily="18" charset="0"/>
+              </a:rPr>
+              <a:t>            </a:t>
+            </a:r>
+            <a:r>
+              <a:rPr lang="en-IN" sz="7200" dirty="0" err="1">
+                <a:latin typeface="Times New Roman" panose="02020603050405020304" pitchFamily="18" charset="0"/>
+                <a:cs typeface="Times New Roman" panose="02020603050405020304" pitchFamily="18" charset="0"/>
+              </a:rPr>
+              <a:t>answerSecond</a:t>
+            </a:r>
+            <a:r>
+              <a:rPr lang="en-IN" sz="7200" dirty="0">
+                <a:latin typeface="Times New Roman" panose="02020603050405020304" pitchFamily="18" charset="0"/>
+                <a:cs typeface="Times New Roman" panose="02020603050405020304" pitchFamily="18" charset="0"/>
+              </a:rPr>
+              <a:t>-=60;</a:t>
+            </a:r>
+            <a:br>
+              <a:rPr lang="en-IN" sz="7200" dirty="0">
+                <a:latin typeface="Times New Roman" panose="02020603050405020304" pitchFamily="18" charset="0"/>
+                <a:cs typeface="Times New Roman" panose="02020603050405020304" pitchFamily="18" charset="0"/>
+              </a:rPr>
+            </a:br>
+            <a:r>
+              <a:rPr lang="en-IN" sz="7200" dirty="0">
+                <a:latin typeface="Times New Roman" panose="02020603050405020304" pitchFamily="18" charset="0"/>
+                <a:cs typeface="Times New Roman" panose="02020603050405020304" pitchFamily="18" charset="0"/>
+              </a:rPr>
+              <a:t>            </a:t>
+            </a:r>
+            <a:r>
+              <a:rPr lang="en-IN" sz="7200" dirty="0" err="1">
+                <a:latin typeface="Times New Roman" panose="02020603050405020304" pitchFamily="18" charset="0"/>
+                <a:cs typeface="Times New Roman" panose="02020603050405020304" pitchFamily="18" charset="0"/>
+              </a:rPr>
+              <a:t>carrySecond</a:t>
+            </a:r>
+            <a:r>
+              <a:rPr lang="en-IN" sz="7200" dirty="0">
+                <a:latin typeface="Times New Roman" panose="02020603050405020304" pitchFamily="18" charset="0"/>
+                <a:cs typeface="Times New Roman" panose="02020603050405020304" pitchFamily="18" charset="0"/>
+              </a:rPr>
+              <a:t>=1;</a:t>
+            </a:r>
+            <a:br>
+              <a:rPr lang="en-IN" sz="7200" dirty="0">
+                <a:latin typeface="Times New Roman" panose="02020603050405020304" pitchFamily="18" charset="0"/>
+                <a:cs typeface="Times New Roman" panose="02020603050405020304" pitchFamily="18" charset="0"/>
+              </a:rPr>
+            </a:br>
+            <a:r>
+              <a:rPr lang="en-IN" sz="7200" dirty="0">
+                <a:latin typeface="Times New Roman" panose="02020603050405020304" pitchFamily="18" charset="0"/>
+                <a:cs typeface="Times New Roman" panose="02020603050405020304" pitchFamily="18" charset="0"/>
+              </a:rPr>
+              <a:t>       </a:t>
+            </a:r>
+          </a:p>
+          <a:p>
+            <a:pPr marL="0" indent="0">
+              <a:buNone/>
+            </a:pPr>
+            <a:endParaRPr lang="en-IN" sz="7200" dirty="0">
+              <a:latin typeface="Times New Roman" panose="02020603050405020304" pitchFamily="18" charset="0"/>
+              <a:cs typeface="Times New Roman" panose="02020603050405020304" pitchFamily="18" charset="0"/>
+            </a:endParaRPr>
+          </a:p>
+          <a:p>
+            <a:pPr marL="0" indent="0">
+              <a:buNone/>
+            </a:pPr>
+            <a:r>
+              <a:rPr lang="en-IN" sz="7200" dirty="0">
+                <a:latin typeface="Times New Roman" panose="02020603050405020304" pitchFamily="18" charset="0"/>
+                <a:cs typeface="Times New Roman" panose="02020603050405020304" pitchFamily="18" charset="0"/>
+              </a:rPr>
+              <a:t> </a:t>
+            </a:r>
+          </a:p>
+          <a:p>
+            <a:pPr marL="0" indent="0">
+              <a:buNone/>
+            </a:pPr>
+            <a:endParaRPr lang="en-IN" sz="7200" dirty="0">
+              <a:latin typeface="Times New Roman" panose="02020603050405020304" pitchFamily="18" charset="0"/>
+              <a:cs typeface="Times New Roman" panose="02020603050405020304" pitchFamily="18" charset="0"/>
+            </a:endParaRPr>
+          </a:p>
+          <a:p>
+            <a:pPr marL="0" indent="0">
+              <a:buNone/>
+            </a:pPr>
+            <a:r>
+              <a:rPr lang="en-IN" sz="7200" dirty="0">
+                <a:latin typeface="Times New Roman" panose="02020603050405020304" pitchFamily="18" charset="0"/>
+                <a:cs typeface="Times New Roman" panose="02020603050405020304" pitchFamily="18" charset="0"/>
+              </a:rPr>
+              <a:t>	}</a:t>
+            </a:r>
+            <a:br>
+              <a:rPr lang="en-IN" sz="7200" dirty="0">
+                <a:latin typeface="Times New Roman" panose="02020603050405020304" pitchFamily="18" charset="0"/>
+                <a:cs typeface="Times New Roman" panose="02020603050405020304" pitchFamily="18" charset="0"/>
+              </a:rPr>
+            </a:br>
+            <a:r>
+              <a:rPr lang="en-IN" sz="7200" dirty="0">
+                <a:latin typeface="Times New Roman" panose="02020603050405020304" pitchFamily="18" charset="0"/>
+                <a:cs typeface="Times New Roman" panose="02020603050405020304" pitchFamily="18" charset="0"/>
+              </a:rPr>
+              <a:t>                                                                                           	</a:t>
+            </a:r>
+            <a:r>
+              <a:rPr lang="en-IN" sz="7200" dirty="0" err="1">
+                <a:latin typeface="Times New Roman" panose="02020603050405020304" pitchFamily="18" charset="0"/>
+                <a:cs typeface="Times New Roman" panose="02020603050405020304" pitchFamily="18" charset="0"/>
+              </a:rPr>
+              <a:t>answerMinute</a:t>
+            </a:r>
+            <a:r>
+              <a:rPr lang="en-IN" sz="7200" dirty="0">
+                <a:latin typeface="Times New Roman" panose="02020603050405020304" pitchFamily="18" charset="0"/>
+                <a:cs typeface="Times New Roman" panose="02020603050405020304" pitchFamily="18" charset="0"/>
+              </a:rPr>
+              <a:t> = </a:t>
+            </a:r>
+            <a:r>
+              <a:rPr lang="en-IN" sz="7200" dirty="0" err="1">
+                <a:latin typeface="Times New Roman" panose="02020603050405020304" pitchFamily="18" charset="0"/>
+                <a:cs typeface="Times New Roman" panose="02020603050405020304" pitchFamily="18" charset="0"/>
+              </a:rPr>
+              <a:t>currentMinute</a:t>
+            </a:r>
+            <a:r>
+              <a:rPr lang="en-IN" sz="7200" dirty="0">
+                <a:latin typeface="Times New Roman" panose="02020603050405020304" pitchFamily="18" charset="0"/>
+                <a:cs typeface="Times New Roman" panose="02020603050405020304" pitchFamily="18" charset="0"/>
+              </a:rPr>
+              <a:t> + </a:t>
+            </a:r>
+            <a:r>
+              <a:rPr lang="en-IN" sz="7200" dirty="0" err="1">
+                <a:latin typeface="Times New Roman" panose="02020603050405020304" pitchFamily="18" charset="0"/>
+                <a:cs typeface="Times New Roman" panose="02020603050405020304" pitchFamily="18" charset="0"/>
+              </a:rPr>
+              <a:t>nextMinute</a:t>
+            </a:r>
+            <a:r>
+              <a:rPr lang="en-IN" sz="7200" dirty="0">
+                <a:latin typeface="Times New Roman" panose="02020603050405020304" pitchFamily="18" charset="0"/>
+                <a:cs typeface="Times New Roman" panose="02020603050405020304" pitchFamily="18" charset="0"/>
+              </a:rPr>
+              <a:t> + 			</a:t>
+            </a:r>
+            <a:r>
+              <a:rPr lang="en-IN" sz="7200" dirty="0" err="1">
+                <a:latin typeface="Times New Roman" panose="02020603050405020304" pitchFamily="18" charset="0"/>
+                <a:cs typeface="Times New Roman" panose="02020603050405020304" pitchFamily="18" charset="0"/>
+              </a:rPr>
+              <a:t>carrySecond</a:t>
+            </a:r>
+            <a:r>
+              <a:rPr lang="en-IN" sz="7200" dirty="0">
+                <a:latin typeface="Times New Roman" panose="02020603050405020304" pitchFamily="18" charset="0"/>
+                <a:cs typeface="Times New Roman" panose="02020603050405020304" pitchFamily="18" charset="0"/>
+              </a:rPr>
+              <a:t>;</a:t>
+            </a:r>
+            <a:br>
+              <a:rPr lang="en-IN" sz="7200" dirty="0">
+                <a:latin typeface="Times New Roman" panose="02020603050405020304" pitchFamily="18" charset="0"/>
+                <a:cs typeface="Times New Roman" panose="02020603050405020304" pitchFamily="18" charset="0"/>
+              </a:rPr>
+            </a:br>
+            <a:r>
+              <a:rPr lang="en-IN" sz="7200" dirty="0">
+                <a:latin typeface="Times New Roman" panose="02020603050405020304" pitchFamily="18" charset="0"/>
+                <a:cs typeface="Times New Roman" panose="02020603050405020304" pitchFamily="18" charset="0"/>
+              </a:rPr>
+              <a:t>        if(</a:t>
+            </a:r>
+            <a:r>
+              <a:rPr lang="en-IN" sz="7200" dirty="0" err="1">
+                <a:latin typeface="Times New Roman" panose="02020603050405020304" pitchFamily="18" charset="0"/>
+                <a:cs typeface="Times New Roman" panose="02020603050405020304" pitchFamily="18" charset="0"/>
+              </a:rPr>
+              <a:t>answerMinute</a:t>
+            </a:r>
+            <a:r>
+              <a:rPr lang="en-IN" sz="7200" dirty="0">
+                <a:latin typeface="Times New Roman" panose="02020603050405020304" pitchFamily="18" charset="0"/>
+                <a:cs typeface="Times New Roman" panose="02020603050405020304" pitchFamily="18" charset="0"/>
+              </a:rPr>
+              <a:t>&gt;=60){</a:t>
+            </a:r>
+            <a:br>
+              <a:rPr lang="en-IN" sz="7200" dirty="0">
+                <a:latin typeface="Times New Roman" panose="02020603050405020304" pitchFamily="18" charset="0"/>
+                <a:cs typeface="Times New Roman" panose="02020603050405020304" pitchFamily="18" charset="0"/>
+              </a:rPr>
+            </a:br>
+            <a:r>
+              <a:rPr lang="en-IN" sz="7200" dirty="0">
+                <a:latin typeface="Times New Roman" panose="02020603050405020304" pitchFamily="18" charset="0"/>
+                <a:cs typeface="Times New Roman" panose="02020603050405020304" pitchFamily="18" charset="0"/>
+              </a:rPr>
+              <a:t>     </a:t>
+            </a:r>
+          </a:p>
+          <a:p>
+            <a:pPr marL="0" indent="0">
+              <a:buNone/>
+            </a:pPr>
+            <a:r>
+              <a:rPr lang="en-IN" sz="7200" dirty="0">
+                <a:latin typeface="Times New Roman" panose="02020603050405020304" pitchFamily="18" charset="0"/>
+                <a:cs typeface="Times New Roman" panose="02020603050405020304" pitchFamily="18" charset="0"/>
+              </a:rPr>
+              <a:t>      </a:t>
+            </a:r>
+            <a:r>
+              <a:rPr lang="en-IN" sz="7200" dirty="0" err="1">
+                <a:latin typeface="Times New Roman" panose="02020603050405020304" pitchFamily="18" charset="0"/>
+                <a:cs typeface="Times New Roman" panose="02020603050405020304" pitchFamily="18" charset="0"/>
+              </a:rPr>
+              <a:t>answerMinute</a:t>
+            </a:r>
+            <a:r>
+              <a:rPr lang="en-IN" sz="7200" dirty="0">
+                <a:latin typeface="Times New Roman" panose="02020603050405020304" pitchFamily="18" charset="0"/>
+                <a:cs typeface="Times New Roman" panose="02020603050405020304" pitchFamily="18" charset="0"/>
+              </a:rPr>
+              <a:t>-=60;</a:t>
+            </a:r>
+            <a:br>
+              <a:rPr lang="en-IN" sz="7200" dirty="0">
+                <a:latin typeface="Times New Roman" panose="02020603050405020304" pitchFamily="18" charset="0"/>
+                <a:cs typeface="Times New Roman" panose="02020603050405020304" pitchFamily="18" charset="0"/>
+              </a:rPr>
+            </a:br>
+            <a:r>
+              <a:rPr lang="en-IN" sz="7200" dirty="0">
+                <a:latin typeface="Times New Roman" panose="02020603050405020304" pitchFamily="18" charset="0"/>
+                <a:cs typeface="Times New Roman" panose="02020603050405020304" pitchFamily="18" charset="0"/>
+              </a:rPr>
+              <a:t>            </a:t>
+            </a:r>
+            <a:r>
+              <a:rPr lang="en-IN" sz="7200" dirty="0" err="1">
+                <a:latin typeface="Times New Roman" panose="02020603050405020304" pitchFamily="18" charset="0"/>
+                <a:cs typeface="Times New Roman" panose="02020603050405020304" pitchFamily="18" charset="0"/>
+              </a:rPr>
+              <a:t>carryMinute</a:t>
+            </a:r>
+            <a:r>
+              <a:rPr lang="en-IN" sz="7200" dirty="0">
+                <a:latin typeface="Times New Roman" panose="02020603050405020304" pitchFamily="18" charset="0"/>
+                <a:cs typeface="Times New Roman" panose="02020603050405020304" pitchFamily="18" charset="0"/>
+              </a:rPr>
+              <a:t>=1;</a:t>
+            </a:r>
+            <a:br>
+              <a:rPr lang="en-IN" sz="7200" dirty="0">
+                <a:latin typeface="Times New Roman" panose="02020603050405020304" pitchFamily="18" charset="0"/>
+                <a:cs typeface="Times New Roman" panose="02020603050405020304" pitchFamily="18" charset="0"/>
+              </a:rPr>
+            </a:br>
+            <a:r>
+              <a:rPr lang="en-IN" sz="7200" dirty="0">
+                <a:latin typeface="Times New Roman" panose="02020603050405020304" pitchFamily="18" charset="0"/>
+                <a:cs typeface="Times New Roman" panose="02020603050405020304" pitchFamily="18" charset="0"/>
+              </a:rPr>
+              <a:t>        }</a:t>
+            </a:r>
+            <a:br>
+              <a:rPr lang="en-IN" sz="7200" dirty="0">
+                <a:latin typeface="Times New Roman" panose="02020603050405020304" pitchFamily="18" charset="0"/>
+                <a:cs typeface="Times New Roman" panose="02020603050405020304" pitchFamily="18" charset="0"/>
+              </a:rPr>
+            </a:br>
+            <a:r>
+              <a:rPr lang="en-IN" sz="7200" dirty="0">
+                <a:latin typeface="Times New Roman" panose="02020603050405020304" pitchFamily="18" charset="0"/>
+                <a:cs typeface="Times New Roman" panose="02020603050405020304" pitchFamily="18" charset="0"/>
+              </a:rPr>
+              <a:t>        </a:t>
+            </a:r>
+            <a:r>
+              <a:rPr lang="en-IN" sz="7200" dirty="0" err="1">
+                <a:latin typeface="Times New Roman" panose="02020603050405020304" pitchFamily="18" charset="0"/>
+                <a:cs typeface="Times New Roman" panose="02020603050405020304" pitchFamily="18" charset="0"/>
+              </a:rPr>
+              <a:t>answerHour</a:t>
+            </a:r>
+            <a:r>
+              <a:rPr lang="en-IN" sz="7200" dirty="0">
+                <a:latin typeface="Times New Roman" panose="02020603050405020304" pitchFamily="18" charset="0"/>
+                <a:cs typeface="Times New Roman" panose="02020603050405020304" pitchFamily="18" charset="0"/>
+              </a:rPr>
+              <a:t> = </a:t>
+            </a:r>
+            <a:r>
+              <a:rPr lang="en-IN" sz="7200" dirty="0" err="1">
+                <a:latin typeface="Times New Roman" panose="02020603050405020304" pitchFamily="18" charset="0"/>
+                <a:cs typeface="Times New Roman" panose="02020603050405020304" pitchFamily="18" charset="0"/>
+              </a:rPr>
+              <a:t>currentHour</a:t>
+            </a:r>
+            <a:r>
+              <a:rPr lang="en-IN" sz="7200" dirty="0">
+                <a:latin typeface="Times New Roman" panose="02020603050405020304" pitchFamily="18" charset="0"/>
+                <a:cs typeface="Times New Roman" panose="02020603050405020304" pitchFamily="18" charset="0"/>
+              </a:rPr>
+              <a:t> + </a:t>
+            </a:r>
+            <a:r>
+              <a:rPr lang="en-IN" sz="7200" dirty="0" err="1">
+                <a:latin typeface="Times New Roman" panose="02020603050405020304" pitchFamily="18" charset="0"/>
+                <a:cs typeface="Times New Roman" panose="02020603050405020304" pitchFamily="18" charset="0"/>
+              </a:rPr>
+              <a:t>nextHour</a:t>
+            </a:r>
+            <a:r>
+              <a:rPr lang="en-IN" sz="7200" dirty="0">
+                <a:latin typeface="Times New Roman" panose="02020603050405020304" pitchFamily="18" charset="0"/>
+                <a:cs typeface="Times New Roman" panose="02020603050405020304" pitchFamily="18" charset="0"/>
+              </a:rPr>
+              <a:t> + </a:t>
+            </a:r>
+            <a:r>
+              <a:rPr lang="en-IN" sz="7200" dirty="0" err="1">
+                <a:latin typeface="Times New Roman" panose="02020603050405020304" pitchFamily="18" charset="0"/>
+                <a:cs typeface="Times New Roman" panose="02020603050405020304" pitchFamily="18" charset="0"/>
+              </a:rPr>
+              <a:t>carryMinute</a:t>
+            </a:r>
+            <a:r>
+              <a:rPr lang="en-IN" sz="7200" dirty="0">
+                <a:latin typeface="Times New Roman" panose="02020603050405020304" pitchFamily="18" charset="0"/>
+                <a:cs typeface="Times New Roman" panose="02020603050405020304" pitchFamily="18" charset="0"/>
+              </a:rPr>
+              <a:t>;</a:t>
+            </a:r>
+            <a:br>
+              <a:rPr lang="en-IN" sz="7200" dirty="0">
+                <a:latin typeface="Times New Roman" panose="02020603050405020304" pitchFamily="18" charset="0"/>
+                <a:cs typeface="Times New Roman" panose="02020603050405020304" pitchFamily="18" charset="0"/>
+              </a:rPr>
+            </a:br>
+            <a:r>
+              <a:rPr lang="en-IN" sz="7200" dirty="0">
+                <a:latin typeface="Times New Roman" panose="02020603050405020304" pitchFamily="18" charset="0"/>
+                <a:cs typeface="Times New Roman" panose="02020603050405020304" pitchFamily="18" charset="0"/>
+              </a:rPr>
+              <a:t>        if(</a:t>
+            </a:r>
+            <a:r>
+              <a:rPr lang="en-IN" sz="7200" dirty="0" err="1">
+                <a:latin typeface="Times New Roman" panose="02020603050405020304" pitchFamily="18" charset="0"/>
+                <a:cs typeface="Times New Roman" panose="02020603050405020304" pitchFamily="18" charset="0"/>
+              </a:rPr>
+              <a:t>answerHour</a:t>
+            </a:r>
+            <a:r>
+              <a:rPr lang="en-IN" sz="7200" dirty="0">
+                <a:latin typeface="Times New Roman" panose="02020603050405020304" pitchFamily="18" charset="0"/>
+                <a:cs typeface="Times New Roman" panose="02020603050405020304" pitchFamily="18" charset="0"/>
+              </a:rPr>
+              <a:t>&gt;=24){</a:t>
+            </a:r>
+            <a:br>
+              <a:rPr lang="en-IN" sz="7200" dirty="0">
+                <a:latin typeface="Times New Roman" panose="02020603050405020304" pitchFamily="18" charset="0"/>
+                <a:cs typeface="Times New Roman" panose="02020603050405020304" pitchFamily="18" charset="0"/>
+              </a:rPr>
+            </a:br>
+            <a:r>
+              <a:rPr lang="en-IN" sz="7200" dirty="0">
+                <a:latin typeface="Times New Roman" panose="02020603050405020304" pitchFamily="18" charset="0"/>
+                <a:cs typeface="Times New Roman" panose="02020603050405020304" pitchFamily="18" charset="0"/>
+              </a:rPr>
+              <a:t>            </a:t>
+            </a:r>
+            <a:r>
+              <a:rPr lang="en-IN" sz="7200" dirty="0" err="1">
+                <a:latin typeface="Times New Roman" panose="02020603050405020304" pitchFamily="18" charset="0"/>
+                <a:cs typeface="Times New Roman" panose="02020603050405020304" pitchFamily="18" charset="0"/>
+              </a:rPr>
+              <a:t>answerHour</a:t>
+            </a:r>
+            <a:r>
+              <a:rPr lang="en-IN" sz="7200" dirty="0">
+                <a:latin typeface="Times New Roman" panose="02020603050405020304" pitchFamily="18" charset="0"/>
+                <a:cs typeface="Times New Roman" panose="02020603050405020304" pitchFamily="18" charset="0"/>
+              </a:rPr>
+              <a:t>-=24;</a:t>
+            </a:r>
+            <a:br>
+              <a:rPr lang="en-IN" sz="7200" dirty="0">
+                <a:latin typeface="Times New Roman" panose="02020603050405020304" pitchFamily="18" charset="0"/>
+                <a:cs typeface="Times New Roman" panose="02020603050405020304" pitchFamily="18" charset="0"/>
+              </a:rPr>
+            </a:br>
+            <a:r>
+              <a:rPr lang="en-IN" sz="7200" dirty="0">
+                <a:latin typeface="Times New Roman" panose="02020603050405020304" pitchFamily="18" charset="0"/>
+                <a:cs typeface="Times New Roman" panose="02020603050405020304" pitchFamily="18" charset="0"/>
+              </a:rPr>
+              <a:t>            </a:t>
+            </a:r>
+            <a:r>
+              <a:rPr lang="en-IN" sz="7200" dirty="0" err="1">
+                <a:latin typeface="Times New Roman" panose="02020603050405020304" pitchFamily="18" charset="0"/>
+                <a:cs typeface="Times New Roman" panose="02020603050405020304" pitchFamily="18" charset="0"/>
+              </a:rPr>
+              <a:t>isNextDay</a:t>
+            </a:r>
+            <a:r>
+              <a:rPr lang="en-IN" sz="7200" dirty="0">
+                <a:latin typeface="Times New Roman" panose="02020603050405020304" pitchFamily="18" charset="0"/>
+                <a:cs typeface="Times New Roman" panose="02020603050405020304" pitchFamily="18" charset="0"/>
+              </a:rPr>
+              <a:t>=true;</a:t>
+            </a:r>
+            <a:br>
+              <a:rPr lang="en-IN" sz="7200" dirty="0">
+                <a:latin typeface="Times New Roman" panose="02020603050405020304" pitchFamily="18" charset="0"/>
+                <a:cs typeface="Times New Roman" panose="02020603050405020304" pitchFamily="18" charset="0"/>
+              </a:rPr>
+            </a:br>
+            <a:r>
+              <a:rPr lang="en-IN" sz="7200" dirty="0">
+                <a:latin typeface="Times New Roman" panose="02020603050405020304" pitchFamily="18" charset="0"/>
+                <a:cs typeface="Times New Roman" panose="02020603050405020304" pitchFamily="18" charset="0"/>
+              </a:rPr>
+              <a:t>        }</a:t>
+            </a:r>
+            <a:br>
+              <a:rPr lang="en-IN" sz="7200" dirty="0">
+                <a:latin typeface="Times New Roman" panose="02020603050405020304" pitchFamily="18" charset="0"/>
+                <a:cs typeface="Times New Roman" panose="02020603050405020304" pitchFamily="18" charset="0"/>
+              </a:rPr>
+            </a:br>
+            <a:r>
+              <a:rPr lang="en-IN" sz="7200" dirty="0">
+                <a:latin typeface="Times New Roman" panose="02020603050405020304" pitchFamily="18" charset="0"/>
+                <a:cs typeface="Times New Roman" panose="02020603050405020304" pitchFamily="18" charset="0"/>
+              </a:rPr>
+              <a:t>        if(</a:t>
+            </a:r>
+            <a:r>
+              <a:rPr lang="en-IN" sz="7200" dirty="0" err="1">
+                <a:latin typeface="Times New Roman" panose="02020603050405020304" pitchFamily="18" charset="0"/>
+                <a:cs typeface="Times New Roman" panose="02020603050405020304" pitchFamily="18" charset="0"/>
+              </a:rPr>
+              <a:t>isNextDay</a:t>
+            </a:r>
+            <a:r>
+              <a:rPr lang="en-IN" sz="7200" dirty="0">
+                <a:latin typeface="Times New Roman" panose="02020603050405020304" pitchFamily="18" charset="0"/>
+                <a:cs typeface="Times New Roman" panose="02020603050405020304" pitchFamily="18" charset="0"/>
+              </a:rPr>
+              <a:t>){</a:t>
+            </a:r>
+            <a:br>
+              <a:rPr lang="en-IN" sz="7200" dirty="0">
+                <a:latin typeface="Times New Roman" panose="02020603050405020304" pitchFamily="18" charset="0"/>
+                <a:cs typeface="Times New Roman" panose="02020603050405020304" pitchFamily="18" charset="0"/>
+              </a:rPr>
+            </a:br>
+            <a:r>
+              <a:rPr lang="en-IN" sz="7200" dirty="0">
+                <a:latin typeface="Times New Roman" panose="02020603050405020304" pitchFamily="18" charset="0"/>
+                <a:cs typeface="Times New Roman" panose="02020603050405020304" pitchFamily="18" charset="0"/>
+              </a:rPr>
+              <a:t>            </a:t>
+            </a:r>
+            <a:r>
+              <a:rPr lang="en-IN" sz="7200" dirty="0" err="1">
+                <a:latin typeface="Times New Roman" panose="02020603050405020304" pitchFamily="18" charset="0"/>
+                <a:cs typeface="Times New Roman" panose="02020603050405020304" pitchFamily="18" charset="0"/>
+              </a:rPr>
+              <a:t>System.</a:t>
+            </a:r>
+            <a:r>
+              <a:rPr lang="en-IN" sz="7200" i="1" dirty="0" err="1">
+                <a:latin typeface="Times New Roman" panose="02020603050405020304" pitchFamily="18" charset="0"/>
+                <a:cs typeface="Times New Roman" panose="02020603050405020304" pitchFamily="18" charset="0"/>
+              </a:rPr>
               <a:t>out</a:t>
             </a:r>
             <a:r>
-              <a:rPr lang="en-IN" sz="8000" dirty="0"/>
-              <a:t>.println("Enter current hour: ");</a:t>
-            </a:r>
-            <a:br>
-              <a:rPr lang="en-IN" sz="8000" dirty="0"/>
-            </a:br>
-            <a:r>
-              <a:rPr lang="en-IN" sz="8000" dirty="0"/>
-              <a:t>        int currentHour =sc.nextInt();</a:t>
-            </a:r>
-            <a:br>
-              <a:rPr lang="en-IN" sz="8000" dirty="0"/>
-            </a:br>
-            <a:r>
-              <a:rPr lang="en-IN" sz="8000" dirty="0"/>
-              <a:t>        System.</a:t>
-            </a:r>
-            <a:r>
-              <a:rPr lang="en-IN" sz="8000" i="1" dirty="0"/>
-              <a:t>out</a:t>
-            </a:r>
-            <a:r>
-              <a:rPr lang="en-IN" sz="8000" dirty="0"/>
-              <a:t>.println("Enter current minute: ");</a:t>
-            </a:r>
-            <a:br>
-              <a:rPr lang="en-IN" sz="8000" dirty="0"/>
-            </a:br>
-            <a:r>
-              <a:rPr lang="en-IN" sz="8000" dirty="0"/>
-              <a:t>        int currentMinute = sc.nextInt();</a:t>
-            </a:r>
-            <a:br>
-              <a:rPr lang="en-IN" sz="8000" dirty="0"/>
-            </a:br>
-            <a:r>
-              <a:rPr lang="en-IN" sz="8000" dirty="0"/>
-              <a:t>        System.</a:t>
-            </a:r>
-            <a:r>
-              <a:rPr lang="en-IN" sz="8000" i="1" dirty="0"/>
-              <a:t>out</a:t>
-            </a:r>
-            <a:r>
-              <a:rPr lang="en-IN" sz="8000" dirty="0"/>
-              <a:t>.println("Enter current second: ");</a:t>
-            </a:r>
-            <a:br>
-              <a:rPr lang="en-IN" sz="8000" dirty="0"/>
-            </a:br>
-            <a:r>
-              <a:rPr lang="en-IN" sz="8000" dirty="0"/>
-              <a:t>        int currentSecond = sc.nextInt();</a:t>
-            </a:r>
-            <a:br>
-              <a:rPr lang="en-IN" sz="8000" dirty="0"/>
-            </a:br>
-            <a:r>
-              <a:rPr lang="en-IN" sz="8000" dirty="0"/>
-              <a:t>        System.</a:t>
-            </a:r>
-            <a:r>
-              <a:rPr lang="en-IN" sz="8000" i="1" dirty="0"/>
-              <a:t>out</a:t>
-            </a:r>
-            <a:r>
-              <a:rPr lang="en-IN" sz="8000" dirty="0"/>
-              <a:t>.println("Enter hour to go forward hour: ");</a:t>
-            </a:r>
-            <a:br>
-              <a:rPr lang="en-IN" sz="8000" dirty="0"/>
-            </a:br>
-            <a:r>
-              <a:rPr lang="en-IN" sz="8000" dirty="0"/>
-              <a:t>        int nextHour =sc.nextInt();</a:t>
-            </a:r>
-            <a:br>
-              <a:rPr lang="en-IN" sz="8000" dirty="0"/>
-            </a:br>
-            <a:r>
-              <a:rPr lang="en-IN" sz="8000" dirty="0"/>
-              <a:t>        System.</a:t>
-            </a:r>
-            <a:r>
-              <a:rPr lang="en-IN" sz="8000" i="1" dirty="0"/>
-              <a:t>out</a:t>
-            </a:r>
-            <a:r>
-              <a:rPr lang="en-IN" sz="8000" dirty="0"/>
-              <a:t>.println("Enter minute to go forward: ");</a:t>
-            </a:r>
-            <a:br>
-              <a:rPr lang="en-IN" sz="8000" dirty="0"/>
-            </a:br>
-            <a:r>
-              <a:rPr lang="en-IN" sz="8000" dirty="0"/>
-              <a:t>        int nextMinute = sc.nextInt();</a:t>
-            </a:r>
-            <a:br>
-              <a:rPr lang="en-IN" sz="8000" dirty="0"/>
-            </a:br>
-            <a:r>
-              <a:rPr lang="en-IN" sz="8000" dirty="0"/>
-              <a:t>        System.</a:t>
-            </a:r>
-            <a:r>
-              <a:rPr lang="en-IN" sz="8000" i="1" dirty="0"/>
-              <a:t>out</a:t>
-            </a:r>
-            <a:r>
-              <a:rPr lang="en-IN" sz="8000" dirty="0"/>
-              <a:t>.println("Enter second to go forward: ");</a:t>
-            </a:r>
-            <a:br>
-              <a:rPr lang="en-IN" sz="8000" dirty="0"/>
-            </a:br>
-            <a:r>
-              <a:rPr lang="en-IN" sz="8000" dirty="0"/>
-              <a:t>        int nextSecond = sc.nextInt();</a:t>
-            </a:r>
-            <a:br>
-              <a:rPr lang="en-IN" sz="8000" dirty="0"/>
-            </a:br>
-            <a:r>
-              <a:rPr lang="en-IN" sz="8000" dirty="0"/>
-              <a:t>       </a:t>
-            </a:r>
+              <a:rPr lang="en-IN" sz="7200" dirty="0" err="1">
+                <a:latin typeface="Times New Roman" panose="02020603050405020304" pitchFamily="18" charset="0"/>
+                <a:cs typeface="Times New Roman" panose="02020603050405020304" pitchFamily="18" charset="0"/>
+              </a:rPr>
+              <a:t>.println</a:t>
+            </a:r>
+            <a:r>
+              <a:rPr lang="en-IN" sz="7200" dirty="0">
+                <a:latin typeface="Times New Roman" panose="02020603050405020304" pitchFamily="18" charset="0"/>
+                <a:cs typeface="Times New Roman" panose="02020603050405020304" pitchFamily="18" charset="0"/>
+              </a:rPr>
+              <a:t>("The Answer is:  	"+</a:t>
+            </a:r>
+            <a:r>
+              <a:rPr lang="en-IN" sz="7200" dirty="0" err="1">
+                <a:latin typeface="Times New Roman" panose="02020603050405020304" pitchFamily="18" charset="0"/>
+                <a:cs typeface="Times New Roman" panose="02020603050405020304" pitchFamily="18" charset="0"/>
+              </a:rPr>
+              <a:t>answerHour</a:t>
+            </a:r>
+            <a:r>
+              <a:rPr lang="en-IN" sz="7200" dirty="0">
+                <a:latin typeface="Times New Roman" panose="02020603050405020304" pitchFamily="18" charset="0"/>
+                <a:cs typeface="Times New Roman" panose="02020603050405020304" pitchFamily="18" charset="0"/>
+              </a:rPr>
+              <a:t>+" : "+</a:t>
+            </a:r>
+            <a:r>
+              <a:rPr lang="en-IN" sz="7200" dirty="0" err="1">
+                <a:latin typeface="Times New Roman" panose="02020603050405020304" pitchFamily="18" charset="0"/>
+                <a:cs typeface="Times New Roman" panose="02020603050405020304" pitchFamily="18" charset="0"/>
+              </a:rPr>
+              <a:t>answerMinute</a:t>
+            </a:r>
+            <a:r>
+              <a:rPr lang="en-IN" sz="7200" dirty="0">
+                <a:latin typeface="Times New Roman" panose="02020603050405020304" pitchFamily="18" charset="0"/>
+                <a:cs typeface="Times New Roman" panose="02020603050405020304" pitchFamily="18" charset="0"/>
+              </a:rPr>
+              <a:t>+</a:t>
+            </a:r>
+            <a:br>
+              <a:rPr lang="en-IN" sz="7200" dirty="0">
+                <a:latin typeface="Times New Roman" panose="02020603050405020304" pitchFamily="18" charset="0"/>
+                <a:cs typeface="Times New Roman" panose="02020603050405020304" pitchFamily="18" charset="0"/>
+              </a:rPr>
+            </a:br>
+            <a:r>
+              <a:rPr lang="en-IN" sz="7200" dirty="0">
+                <a:latin typeface="Times New Roman" panose="02020603050405020304" pitchFamily="18" charset="0"/>
+                <a:cs typeface="Times New Roman" panose="02020603050405020304" pitchFamily="18" charset="0"/>
+              </a:rPr>
+              <a:t>            " : "+</a:t>
+            </a:r>
+            <a:r>
+              <a:rPr lang="en-IN" sz="7200" dirty="0" err="1">
+                <a:latin typeface="Times New Roman" panose="02020603050405020304" pitchFamily="18" charset="0"/>
+                <a:cs typeface="Times New Roman" panose="02020603050405020304" pitchFamily="18" charset="0"/>
+              </a:rPr>
+              <a:t>answerSecond</a:t>
+            </a:r>
+            <a:r>
+              <a:rPr lang="en-IN" sz="7200" dirty="0">
+                <a:latin typeface="Times New Roman" panose="02020603050405020304" pitchFamily="18" charset="0"/>
+                <a:cs typeface="Times New Roman" panose="02020603050405020304" pitchFamily="18" charset="0"/>
+              </a:rPr>
+              <a:t> + " on the next day");</a:t>
+            </a:r>
+            <a:br>
+              <a:rPr lang="en-IN" sz="7200" dirty="0">
+                <a:latin typeface="Times New Roman" panose="02020603050405020304" pitchFamily="18" charset="0"/>
+                <a:cs typeface="Times New Roman" panose="02020603050405020304" pitchFamily="18" charset="0"/>
+              </a:rPr>
+            </a:br>
+            <a:r>
+              <a:rPr lang="en-IN" sz="7200" dirty="0">
+                <a:latin typeface="Times New Roman" panose="02020603050405020304" pitchFamily="18" charset="0"/>
+                <a:cs typeface="Times New Roman" panose="02020603050405020304" pitchFamily="18" charset="0"/>
+              </a:rPr>
+              <a:t>        }</a:t>
+            </a:r>
+            <a:br>
+              <a:rPr lang="en-IN" sz="7200" dirty="0">
+                <a:latin typeface="Times New Roman" panose="02020603050405020304" pitchFamily="18" charset="0"/>
+                <a:cs typeface="Times New Roman" panose="02020603050405020304" pitchFamily="18" charset="0"/>
+              </a:rPr>
+            </a:br>
+            <a:endParaRPr lang="en-IN" sz="7200" dirty="0">
+              <a:latin typeface="Times New Roman" panose="02020603050405020304" pitchFamily="18" charset="0"/>
+              <a:cs typeface="Times New Roman" panose="02020603050405020304" pitchFamily="18" charset="0"/>
+            </a:endParaRPr>
           </a:p>
           <a:p>
             <a:pPr marL="0" indent="0">
               <a:buNone/>
             </a:pPr>
-            <a:endParaRPr lang="en-IN" sz="8000" dirty="0"/>
-          </a:p>
-          <a:p>
-            <a:pPr marL="0" indent="0">
-              <a:buNone/>
-            </a:pPr>
-            <a:endParaRPr lang="en-IN" sz="8000" dirty="0"/>
-          </a:p>
-          <a:p>
-            <a:pPr marL="0" indent="0">
-              <a:buNone/>
-            </a:pPr>
-            <a:endParaRPr lang="en-IN" sz="8000" dirty="0"/>
-          </a:p>
-          <a:p>
-            <a:pPr marL="0" indent="0">
-              <a:buNone/>
-            </a:pPr>
-            <a:endParaRPr lang="en-IN" sz="8000" dirty="0"/>
-          </a:p>
-          <a:p>
-            <a:pPr marL="0" indent="0">
-              <a:buNone/>
-            </a:pPr>
-            <a:r>
-              <a:rPr lang="en-IN" sz="8000" dirty="0"/>
-              <a:t> int answerHour =0 ,answerMinute=0,answerSecond=0;</a:t>
-            </a:r>
-            <a:br>
-              <a:rPr lang="en-IN" sz="8000" dirty="0"/>
-            </a:br>
-            <a:r>
-              <a:rPr lang="en-IN" sz="8000" dirty="0"/>
-              <a:t>        int carrySecond=0,carryMinute=0;</a:t>
-            </a:r>
-            <a:br>
-              <a:rPr lang="en-IN" sz="8000" dirty="0"/>
-            </a:br>
-            <a:r>
-              <a:rPr lang="en-IN" sz="8000" dirty="0"/>
-              <a:t>        boolean isNextDay =false;</a:t>
-            </a:r>
-            <a:br>
-              <a:rPr lang="en-IN" sz="8000" dirty="0"/>
-            </a:br>
-            <a:r>
-              <a:rPr lang="en-IN" sz="8000" dirty="0"/>
-              <a:t>        answerSecond = currentSecond + nextSecond;</a:t>
-            </a:r>
-            <a:br>
-              <a:rPr lang="en-IN" sz="8000" dirty="0"/>
-            </a:br>
-            <a:r>
-              <a:rPr lang="en-IN" sz="8000" dirty="0"/>
-              <a:t>        </a:t>
-            </a:r>
-          </a:p>
-          <a:p>
-            <a:pPr marL="0" indent="0">
-              <a:buNone/>
-            </a:pPr>
-            <a:r>
-              <a:rPr lang="en-IN" sz="8000" dirty="0"/>
-              <a:t>if(answerSecond&gt;=60){</a:t>
-            </a:r>
-            <a:br>
-              <a:rPr lang="en-IN" sz="8000" dirty="0"/>
-            </a:br>
-            <a:r>
-              <a:rPr lang="en-IN" sz="8000" dirty="0"/>
-              <a:t>            answerSecond-=60;</a:t>
-            </a:r>
-            <a:br>
-              <a:rPr lang="en-IN" sz="8000" dirty="0"/>
-            </a:br>
-            <a:r>
-              <a:rPr lang="en-IN" sz="8000" dirty="0"/>
-              <a:t>            carrySecond=1;</a:t>
-            </a:r>
-            <a:br>
-              <a:rPr lang="en-IN" sz="8000" dirty="0"/>
-            </a:br>
-            <a:r>
-              <a:rPr lang="en-IN" sz="8000" dirty="0"/>
-              <a:t>        }</a:t>
-            </a:r>
-          </a:p>
-          <a:p>
-            <a:pPr marL="0" indent="0">
-              <a:buNone/>
-            </a:pPr>
-            <a:r>
-              <a:rPr lang="en-IN" sz="8000" dirty="0"/>
-              <a:t>answerMinute = currentMinute + nextMinute + carrySecond;</a:t>
-            </a:r>
-            <a:br>
-              <a:rPr lang="en-IN" sz="8000" dirty="0"/>
-            </a:br>
-            <a:r>
-              <a:rPr lang="en-IN" sz="8000" dirty="0"/>
-              <a:t>        if(answerMinute&gt;=60){</a:t>
-            </a:r>
-            <a:br>
-              <a:rPr lang="en-IN" sz="8000" dirty="0"/>
-            </a:br>
-            <a:r>
-              <a:rPr lang="en-IN" sz="8000" dirty="0"/>
-              <a:t>            answerMinute-=60;</a:t>
-            </a:r>
-            <a:br>
-              <a:rPr lang="en-IN" sz="8000" dirty="0"/>
-            </a:br>
-            <a:r>
-              <a:rPr lang="en-IN" sz="8000" dirty="0"/>
-              <a:t>            </a:t>
-            </a:r>
-          </a:p>
-          <a:p>
-            <a:pPr marL="0" indent="0">
-              <a:buNone/>
-            </a:pPr>
-            <a:r>
-              <a:rPr lang="en-IN" sz="8000" dirty="0"/>
-              <a:t>carryMinute=1;</a:t>
-            </a:r>
-            <a:br>
-              <a:rPr lang="en-IN" sz="8000" dirty="0"/>
-            </a:br>
-            <a:r>
-              <a:rPr lang="en-IN" sz="8000" dirty="0"/>
-              <a:t>        }</a:t>
-            </a:r>
-            <a:br>
-              <a:rPr lang="en-IN" sz="7200" dirty="0"/>
-            </a:br>
-            <a:r>
-              <a:rPr lang="en-IN" sz="7200" dirty="0"/>
-              <a:t>       </a:t>
-            </a:r>
-          </a:p>
-          <a:p>
-            <a:pPr marL="0" indent="0">
-              <a:buNone/>
-            </a:pPr>
-            <a:r>
-              <a:rPr lang="en-IN" sz="7200" dirty="0"/>
-              <a:t> </a:t>
-            </a:r>
-            <a:endParaRPr lang="en-IN" sz="2900" dirty="0"/>
-          </a:p>
-          <a:p>
-            <a:pPr marL="0" indent="0">
-              <a:buNone/>
-            </a:pPr>
-            <a:endParaRPr lang="en-IN" sz="2000" dirty="0">
+            <a:endParaRPr lang="en-IN" sz="7200" dirty="0">
               <a:latin typeface="Times New Roman" panose="02020603050405020304" pitchFamily="18" charset="0"/>
               <a:cs typeface="Times New Roman" panose="02020603050405020304" pitchFamily="18" charset="0"/>
             </a:endParaRPr>
@@ -8984,6 +10207,939 @@
     <p:extLst>
       <p:ext uri="{BB962C8B-B14F-4D97-AF65-F5344CB8AC3E}">
         <p14:creationId xmlns:p14="http://schemas.microsoft.com/office/powerpoint/2010/main" val="1663997515"/>
+      </p:ext>
+    </p:extLst>
+  </p:cSld>
+  <p:clrMapOvr>
+    <a:masterClrMapping/>
+  </p:clrMapOvr>
+  <p:transition spd="slow" advClick="0" advTm="5000">
+    <p:fade/>
+  </p:transition>
+</p:sld>
+</file>
+
+<file path=ppt/slides/slide8.xml><?xml version="1.0" encoding="utf-8"?>
+<p:sld xmlns:a="http://schemas.openxmlformats.org/drawingml/2006/main" xmlns:r="http://schemas.openxmlformats.org/officeDocument/2006/relationships" xmlns:p="http://schemas.openxmlformats.org/presentationml/2006/main">
+  <p:cSld>
+    <p:spTree>
+      <p:nvGrpSpPr>
+        <p:cNvPr id="1" name="">
+          <a:extLst>
+            <a:ext uri="{FF2B5EF4-FFF2-40B4-BE49-F238E27FC236}">
+              <a16:creationId xmlns:a16="http://schemas.microsoft.com/office/drawing/2014/main" id="{6EB88A8E-3E1F-C202-F142-2DFF0AFCEBFA}"/>
+            </a:ext>
+          </a:extLst>
+        </p:cNvPr>
+        <p:cNvGrpSpPr/>
+        <p:nvPr/>
+      </p:nvGrpSpPr>
+      <p:grpSpPr>
+        <a:xfrm>
+          <a:off x="0" y="0"/>
+          <a:ext cx="0" cy="0"/>
+          <a:chOff x="0" y="0"/>
+          <a:chExt cx="0" cy="0"/>
+        </a:xfrm>
+      </p:grpSpPr>
+      <p:sp>
+        <p:nvSpPr>
+          <p:cNvPr id="3" name="Content Placeholder 2">
+            <a:extLst>
+              <a:ext uri="{FF2B5EF4-FFF2-40B4-BE49-F238E27FC236}">
+                <a16:creationId xmlns:a16="http://schemas.microsoft.com/office/drawing/2014/main" id="{CA4692CC-DEB6-D5F8-8895-6A66CDBE7A42}"/>
+              </a:ext>
+            </a:extLst>
+          </p:cNvPr>
+          <p:cNvSpPr>
+            <a:spLocks noGrp="1"/>
+          </p:cNvSpPr>
+          <p:nvPr>
+            <p:ph idx="1"/>
+          </p:nvPr>
+        </p:nvSpPr>
+        <p:spPr>
+          <a:xfrm>
+            <a:off x="600501" y="545432"/>
+            <a:ext cx="11119059" cy="5855368"/>
+          </a:xfrm>
+        </p:spPr>
+        <p:txBody>
+          <a:bodyPr numCol="2">
+            <a:normAutofit/>
+          </a:bodyPr>
+          <a:lstStyle/>
+          <a:p>
+            <a:pPr marL="0" indent="0">
+              <a:buNone/>
+            </a:pPr>
+            <a:endParaRPr lang="en-US" cap="all" dirty="0">
+              <a:latin typeface="Times New Roman" panose="02020603050405020304" pitchFamily="18" charset="0"/>
+            </a:endParaRPr>
+          </a:p>
+          <a:p>
+            <a:pPr marL="0" indent="0">
+              <a:buNone/>
+            </a:pPr>
+            <a:br>
+              <a:rPr lang="en-IN" sz="1800" dirty="0">
+                <a:latin typeface="Times New Roman" panose="02020603050405020304" pitchFamily="18" charset="0"/>
+                <a:cs typeface="Times New Roman" panose="02020603050405020304" pitchFamily="18" charset="0"/>
+              </a:rPr>
+            </a:br>
+            <a:r>
+              <a:rPr lang="en-IN" sz="1800" dirty="0">
+                <a:latin typeface="Times New Roman" panose="02020603050405020304" pitchFamily="18" charset="0"/>
+                <a:cs typeface="Times New Roman" panose="02020603050405020304" pitchFamily="18" charset="0"/>
+              </a:rPr>
+              <a:t>            else{</a:t>
+            </a:r>
+            <a:br>
+              <a:rPr lang="en-IN" sz="1800" dirty="0">
+                <a:latin typeface="Times New Roman" panose="02020603050405020304" pitchFamily="18" charset="0"/>
+                <a:cs typeface="Times New Roman" panose="02020603050405020304" pitchFamily="18" charset="0"/>
+              </a:rPr>
+            </a:br>
+            <a:r>
+              <a:rPr lang="en-IN" sz="1800" dirty="0">
+                <a:latin typeface="Times New Roman" panose="02020603050405020304" pitchFamily="18" charset="0"/>
+                <a:cs typeface="Times New Roman" panose="02020603050405020304" pitchFamily="18" charset="0"/>
+              </a:rPr>
+              <a:t>            </a:t>
+            </a:r>
+            <a:r>
+              <a:rPr lang="en-IN" sz="1800" dirty="0" err="1">
+                <a:latin typeface="Times New Roman" panose="02020603050405020304" pitchFamily="18" charset="0"/>
+                <a:cs typeface="Times New Roman" panose="02020603050405020304" pitchFamily="18" charset="0"/>
+              </a:rPr>
+              <a:t>System.</a:t>
+            </a:r>
+            <a:r>
+              <a:rPr lang="en-IN" sz="1800" i="1" dirty="0" err="1">
+                <a:latin typeface="Times New Roman" panose="02020603050405020304" pitchFamily="18" charset="0"/>
+                <a:cs typeface="Times New Roman" panose="02020603050405020304" pitchFamily="18" charset="0"/>
+              </a:rPr>
+              <a:t>out</a:t>
+            </a:r>
+            <a:r>
+              <a:rPr lang="en-IN" sz="1800" dirty="0" err="1">
+                <a:latin typeface="Times New Roman" panose="02020603050405020304" pitchFamily="18" charset="0"/>
+                <a:cs typeface="Times New Roman" panose="02020603050405020304" pitchFamily="18" charset="0"/>
+              </a:rPr>
+              <a:t>.println</a:t>
+            </a:r>
+            <a:r>
+              <a:rPr lang="en-IN" sz="1800" dirty="0">
+                <a:latin typeface="Times New Roman" panose="02020603050405020304" pitchFamily="18" charset="0"/>
+                <a:cs typeface="Times New Roman" panose="02020603050405020304" pitchFamily="18" charset="0"/>
+              </a:rPr>
+              <a:t>("The Answer is: "+</a:t>
+            </a:r>
+            <a:r>
+              <a:rPr lang="en-IN" sz="1800" dirty="0" err="1">
+                <a:latin typeface="Times New Roman" panose="02020603050405020304" pitchFamily="18" charset="0"/>
+                <a:cs typeface="Times New Roman" panose="02020603050405020304" pitchFamily="18" charset="0"/>
+              </a:rPr>
+              <a:t>answerHour</a:t>
+            </a:r>
+            <a:r>
+              <a:rPr lang="en-IN" sz="1800" dirty="0">
+                <a:latin typeface="Times New Roman" panose="02020603050405020304" pitchFamily="18" charset="0"/>
+                <a:cs typeface="Times New Roman" panose="02020603050405020304" pitchFamily="18" charset="0"/>
+              </a:rPr>
+              <a:t>+" : "+</a:t>
+            </a:r>
+            <a:r>
+              <a:rPr lang="en-IN" sz="1800" dirty="0" err="1">
+                <a:latin typeface="Times New Roman" panose="02020603050405020304" pitchFamily="18" charset="0"/>
+                <a:cs typeface="Times New Roman" panose="02020603050405020304" pitchFamily="18" charset="0"/>
+              </a:rPr>
+              <a:t>answerMinute</a:t>
+            </a:r>
+            <a:r>
+              <a:rPr lang="en-IN" sz="1800" dirty="0">
+                <a:latin typeface="Times New Roman" panose="02020603050405020304" pitchFamily="18" charset="0"/>
+                <a:cs typeface="Times New Roman" panose="02020603050405020304" pitchFamily="18" charset="0"/>
+              </a:rPr>
+              <a:t>+</a:t>
+            </a:r>
+            <a:br>
+              <a:rPr lang="en-IN" sz="1800" dirty="0">
+                <a:latin typeface="Times New Roman" panose="02020603050405020304" pitchFamily="18" charset="0"/>
+                <a:cs typeface="Times New Roman" panose="02020603050405020304" pitchFamily="18" charset="0"/>
+              </a:rPr>
+            </a:br>
+            <a:r>
+              <a:rPr lang="en-IN" sz="1800" dirty="0">
+                <a:latin typeface="Times New Roman" panose="02020603050405020304" pitchFamily="18" charset="0"/>
+                <a:cs typeface="Times New Roman" panose="02020603050405020304" pitchFamily="18" charset="0"/>
+              </a:rPr>
+              <a:t>                    " : "+</a:t>
+            </a:r>
+            <a:r>
+              <a:rPr lang="en-IN" sz="1800" dirty="0" err="1">
+                <a:latin typeface="Times New Roman" panose="02020603050405020304" pitchFamily="18" charset="0"/>
+                <a:cs typeface="Times New Roman" panose="02020603050405020304" pitchFamily="18" charset="0"/>
+              </a:rPr>
+              <a:t>answerSecond</a:t>
+            </a:r>
+            <a:r>
+              <a:rPr lang="en-IN" sz="1800" dirty="0">
+                <a:latin typeface="Times New Roman" panose="02020603050405020304" pitchFamily="18" charset="0"/>
+                <a:cs typeface="Times New Roman" panose="02020603050405020304" pitchFamily="18" charset="0"/>
+              </a:rPr>
+              <a:t> + "  on the same day");</a:t>
+            </a:r>
+            <a:br>
+              <a:rPr lang="en-IN" sz="1800" dirty="0">
+                <a:latin typeface="Times New Roman" panose="02020603050405020304" pitchFamily="18" charset="0"/>
+                <a:cs typeface="Times New Roman" panose="02020603050405020304" pitchFamily="18" charset="0"/>
+              </a:rPr>
+            </a:br>
+            <a:r>
+              <a:rPr lang="en-IN" sz="1800" dirty="0">
+                <a:latin typeface="Times New Roman" panose="02020603050405020304" pitchFamily="18" charset="0"/>
+                <a:cs typeface="Times New Roman" panose="02020603050405020304" pitchFamily="18" charset="0"/>
+              </a:rPr>
+              <a:t>        }</a:t>
+            </a:r>
+            <a:br>
+              <a:rPr lang="en-IN" sz="1800" dirty="0">
+                <a:latin typeface="Times New Roman" panose="02020603050405020304" pitchFamily="18" charset="0"/>
+                <a:cs typeface="Times New Roman" panose="02020603050405020304" pitchFamily="18" charset="0"/>
+              </a:rPr>
+            </a:br>
+            <a:r>
+              <a:rPr lang="en-IN" sz="1800" dirty="0">
+                <a:latin typeface="Times New Roman" panose="02020603050405020304" pitchFamily="18" charset="0"/>
+                <a:cs typeface="Times New Roman" panose="02020603050405020304" pitchFamily="18" charset="0"/>
+              </a:rPr>
+              <a:t>    }</a:t>
+            </a:r>
+            <a:br>
+              <a:rPr lang="en-IN" sz="1800" dirty="0">
+                <a:latin typeface="Times New Roman" panose="02020603050405020304" pitchFamily="18" charset="0"/>
+                <a:cs typeface="Times New Roman" panose="02020603050405020304" pitchFamily="18" charset="0"/>
+              </a:rPr>
+            </a:br>
+            <a:r>
+              <a:rPr lang="en-IN" sz="1800" dirty="0">
+                <a:latin typeface="Times New Roman" panose="02020603050405020304" pitchFamily="18" charset="0"/>
+                <a:cs typeface="Times New Roman" panose="02020603050405020304" pitchFamily="18" charset="0"/>
+              </a:rPr>
+              <a:t>}</a:t>
+            </a:r>
+          </a:p>
+          <a:p>
+            <a:pPr marL="0" indent="0">
+              <a:buNone/>
+            </a:pPr>
+            <a:r>
+              <a:rPr lang="en-IN" sz="1800" dirty="0">
+                <a:latin typeface="Times New Roman" panose="02020603050405020304" pitchFamily="18" charset="0"/>
+                <a:cs typeface="Times New Roman" panose="02020603050405020304" pitchFamily="18" charset="0"/>
+              </a:rPr>
+              <a:t> </a:t>
+            </a:r>
+            <a:r>
+              <a:rPr lang="en-IN" sz="1800" dirty="0" err="1">
+                <a:latin typeface="Times New Roman" panose="02020603050405020304" pitchFamily="18" charset="0"/>
+                <a:cs typeface="Times New Roman" panose="02020603050405020304" pitchFamily="18" charset="0"/>
+              </a:rPr>
+              <a:t>carrySecond</a:t>
+            </a:r>
+            <a:r>
+              <a:rPr lang="en-IN" sz="1800" dirty="0">
+                <a:latin typeface="Times New Roman" panose="02020603050405020304" pitchFamily="18" charset="0"/>
+                <a:cs typeface="Times New Roman" panose="02020603050405020304" pitchFamily="18" charset="0"/>
+              </a:rPr>
+              <a:t>=1;</a:t>
+            </a:r>
+            <a:br>
+              <a:rPr lang="en-IN" sz="1800" dirty="0">
+                <a:latin typeface="Times New Roman" panose="02020603050405020304" pitchFamily="18" charset="0"/>
+                <a:cs typeface="Times New Roman" panose="02020603050405020304" pitchFamily="18" charset="0"/>
+              </a:rPr>
+            </a:br>
+            <a:r>
+              <a:rPr lang="en-IN" sz="1800" dirty="0">
+                <a:latin typeface="Times New Roman" panose="02020603050405020304" pitchFamily="18" charset="0"/>
+                <a:cs typeface="Times New Roman" panose="02020603050405020304" pitchFamily="18" charset="0"/>
+              </a:rPr>
+              <a:t>        }</a:t>
+            </a:r>
+            <a:br>
+              <a:rPr lang="en-IN" sz="1800" dirty="0">
+                <a:latin typeface="Times New Roman" panose="02020603050405020304" pitchFamily="18" charset="0"/>
+                <a:cs typeface="Times New Roman" panose="02020603050405020304" pitchFamily="18" charset="0"/>
+              </a:rPr>
+            </a:br>
+            <a:r>
+              <a:rPr lang="en-IN" sz="1800" dirty="0">
+                <a:latin typeface="Times New Roman" panose="02020603050405020304" pitchFamily="18" charset="0"/>
+                <a:cs typeface="Times New Roman" panose="02020603050405020304" pitchFamily="18" charset="0"/>
+              </a:rPr>
+              <a:t>        </a:t>
+            </a:r>
+            <a:r>
+              <a:rPr lang="en-IN" sz="1800" dirty="0" err="1">
+                <a:latin typeface="Times New Roman" panose="02020603050405020304" pitchFamily="18" charset="0"/>
+                <a:cs typeface="Times New Roman" panose="02020603050405020304" pitchFamily="18" charset="0"/>
+              </a:rPr>
+              <a:t>answerMinute</a:t>
+            </a:r>
+            <a:r>
+              <a:rPr lang="en-IN" sz="1800" dirty="0">
+                <a:latin typeface="Times New Roman" panose="02020603050405020304" pitchFamily="18" charset="0"/>
+                <a:cs typeface="Times New Roman" panose="02020603050405020304" pitchFamily="18" charset="0"/>
+              </a:rPr>
+              <a:t> = </a:t>
+            </a:r>
+            <a:r>
+              <a:rPr lang="en-IN" sz="1800" dirty="0" err="1">
+                <a:latin typeface="Times New Roman" panose="02020603050405020304" pitchFamily="18" charset="0"/>
+                <a:cs typeface="Times New Roman" panose="02020603050405020304" pitchFamily="18" charset="0"/>
+              </a:rPr>
+              <a:t>currentMinute</a:t>
+            </a:r>
+            <a:r>
+              <a:rPr lang="en-IN" sz="1800" dirty="0">
+                <a:latin typeface="Times New Roman" panose="02020603050405020304" pitchFamily="18" charset="0"/>
+                <a:cs typeface="Times New Roman" panose="02020603050405020304" pitchFamily="18" charset="0"/>
+              </a:rPr>
+              <a:t> + </a:t>
+            </a:r>
+            <a:r>
+              <a:rPr lang="en-IN" sz="1800" dirty="0" err="1">
+                <a:latin typeface="Times New Roman" panose="02020603050405020304" pitchFamily="18" charset="0"/>
+                <a:cs typeface="Times New Roman" panose="02020603050405020304" pitchFamily="18" charset="0"/>
+              </a:rPr>
+              <a:t>nextMinute</a:t>
+            </a:r>
+            <a:r>
+              <a:rPr lang="en-IN" sz="1800" dirty="0">
+                <a:latin typeface="Times New Roman" panose="02020603050405020304" pitchFamily="18" charset="0"/>
+                <a:cs typeface="Times New Roman" panose="02020603050405020304" pitchFamily="18" charset="0"/>
+              </a:rPr>
+              <a:t> + </a:t>
+            </a:r>
+            <a:r>
+              <a:rPr lang="en-IN" sz="1800" dirty="0" err="1">
+                <a:latin typeface="Times New Roman" panose="02020603050405020304" pitchFamily="18" charset="0"/>
+                <a:cs typeface="Times New Roman" panose="02020603050405020304" pitchFamily="18" charset="0"/>
+              </a:rPr>
+              <a:t>carrySecond</a:t>
+            </a:r>
+            <a:r>
+              <a:rPr lang="en-IN" sz="1800" dirty="0">
+                <a:latin typeface="Times New Roman" panose="02020603050405020304" pitchFamily="18" charset="0"/>
+                <a:cs typeface="Times New Roman" panose="02020603050405020304" pitchFamily="18" charset="0"/>
+              </a:rPr>
+              <a:t>;</a:t>
+            </a:r>
+            <a:br>
+              <a:rPr lang="en-IN" sz="1800" dirty="0">
+                <a:latin typeface="Times New Roman" panose="02020603050405020304" pitchFamily="18" charset="0"/>
+                <a:cs typeface="Times New Roman" panose="02020603050405020304" pitchFamily="18" charset="0"/>
+              </a:rPr>
+            </a:br>
+            <a:r>
+              <a:rPr lang="en-IN" sz="1800" dirty="0">
+                <a:latin typeface="Times New Roman" panose="02020603050405020304" pitchFamily="18" charset="0"/>
+                <a:cs typeface="Times New Roman" panose="02020603050405020304" pitchFamily="18" charset="0"/>
+              </a:rPr>
+              <a:t>        if(</a:t>
+            </a:r>
+            <a:r>
+              <a:rPr lang="en-IN" sz="1800" dirty="0" err="1">
+                <a:latin typeface="Times New Roman" panose="02020603050405020304" pitchFamily="18" charset="0"/>
+                <a:cs typeface="Times New Roman" panose="02020603050405020304" pitchFamily="18" charset="0"/>
+              </a:rPr>
+              <a:t>answerMinute</a:t>
+            </a:r>
+            <a:r>
+              <a:rPr lang="en-IN" sz="1800" dirty="0">
+                <a:latin typeface="Times New Roman" panose="02020603050405020304" pitchFamily="18" charset="0"/>
+                <a:cs typeface="Times New Roman" panose="02020603050405020304" pitchFamily="18" charset="0"/>
+              </a:rPr>
+              <a:t>&gt;=60){</a:t>
+            </a:r>
+            <a:br>
+              <a:rPr lang="en-IN" sz="1800" dirty="0">
+                <a:latin typeface="Times New Roman" panose="02020603050405020304" pitchFamily="18" charset="0"/>
+                <a:cs typeface="Times New Roman" panose="02020603050405020304" pitchFamily="18" charset="0"/>
+              </a:rPr>
+            </a:br>
+            <a:r>
+              <a:rPr lang="en-IN" sz="1800" dirty="0">
+                <a:latin typeface="Times New Roman" panose="02020603050405020304" pitchFamily="18" charset="0"/>
+                <a:cs typeface="Times New Roman" panose="02020603050405020304" pitchFamily="18" charset="0"/>
+              </a:rPr>
+              <a:t>            </a:t>
+            </a:r>
+            <a:r>
+              <a:rPr lang="en-IN" sz="1800" dirty="0" err="1">
+                <a:latin typeface="Times New Roman" panose="02020603050405020304" pitchFamily="18" charset="0"/>
+                <a:cs typeface="Times New Roman" panose="02020603050405020304" pitchFamily="18" charset="0"/>
+              </a:rPr>
+              <a:t>answerMinute</a:t>
+            </a:r>
+            <a:r>
+              <a:rPr lang="en-IN" sz="1800" dirty="0">
+                <a:latin typeface="Times New Roman" panose="02020603050405020304" pitchFamily="18" charset="0"/>
+                <a:cs typeface="Times New Roman" panose="02020603050405020304" pitchFamily="18" charset="0"/>
+              </a:rPr>
+              <a:t>-=60;</a:t>
+            </a:r>
+            <a:br>
+              <a:rPr lang="en-IN" sz="1800" dirty="0">
+                <a:latin typeface="Times New Roman" panose="02020603050405020304" pitchFamily="18" charset="0"/>
+                <a:cs typeface="Times New Roman" panose="02020603050405020304" pitchFamily="18" charset="0"/>
+              </a:rPr>
+            </a:br>
+            <a:r>
+              <a:rPr lang="en-IN" sz="1800" dirty="0">
+                <a:latin typeface="Times New Roman" panose="02020603050405020304" pitchFamily="18" charset="0"/>
+                <a:cs typeface="Times New Roman" panose="02020603050405020304" pitchFamily="18" charset="0"/>
+              </a:rPr>
+              <a:t>            </a:t>
+            </a:r>
+            <a:r>
+              <a:rPr lang="en-IN" sz="1800" dirty="0" err="1">
+                <a:latin typeface="Times New Roman" panose="02020603050405020304" pitchFamily="18" charset="0"/>
+                <a:cs typeface="Times New Roman" panose="02020603050405020304" pitchFamily="18" charset="0"/>
+              </a:rPr>
+              <a:t>carryMinute</a:t>
+            </a:r>
+            <a:r>
+              <a:rPr lang="en-IN" sz="1800" dirty="0">
+                <a:latin typeface="Times New Roman" panose="02020603050405020304" pitchFamily="18" charset="0"/>
+                <a:cs typeface="Times New Roman" panose="02020603050405020304" pitchFamily="18" charset="0"/>
+              </a:rPr>
+              <a:t>=1;</a:t>
+            </a:r>
+            <a:br>
+              <a:rPr lang="en-IN" sz="1800" dirty="0">
+                <a:latin typeface="Times New Roman" panose="02020603050405020304" pitchFamily="18" charset="0"/>
+                <a:cs typeface="Times New Roman" panose="02020603050405020304" pitchFamily="18" charset="0"/>
+              </a:rPr>
+            </a:br>
+            <a:r>
+              <a:rPr lang="en-IN" sz="1800" dirty="0">
+                <a:latin typeface="Times New Roman" panose="02020603050405020304" pitchFamily="18" charset="0"/>
+                <a:cs typeface="Times New Roman" panose="02020603050405020304" pitchFamily="18" charset="0"/>
+              </a:rPr>
+              <a:t>        }</a:t>
+            </a:r>
+            <a:br>
+              <a:rPr lang="en-IN" sz="1800" dirty="0">
+                <a:latin typeface="Times New Roman" panose="02020603050405020304" pitchFamily="18" charset="0"/>
+                <a:cs typeface="Times New Roman" panose="02020603050405020304" pitchFamily="18" charset="0"/>
+              </a:rPr>
+            </a:br>
+            <a:r>
+              <a:rPr lang="en-IN" sz="1800" dirty="0">
+                <a:latin typeface="Times New Roman" panose="02020603050405020304" pitchFamily="18" charset="0"/>
+                <a:cs typeface="Times New Roman" panose="02020603050405020304" pitchFamily="18" charset="0"/>
+              </a:rPr>
+              <a:t>        </a:t>
+            </a:r>
+            <a:r>
+              <a:rPr lang="en-IN" sz="1800" dirty="0" err="1">
+                <a:latin typeface="Times New Roman" panose="02020603050405020304" pitchFamily="18" charset="0"/>
+                <a:cs typeface="Times New Roman" panose="02020603050405020304" pitchFamily="18" charset="0"/>
+              </a:rPr>
+              <a:t>answerHour</a:t>
+            </a:r>
+            <a:r>
+              <a:rPr lang="en-IN" sz="1800" dirty="0">
+                <a:latin typeface="Times New Roman" panose="02020603050405020304" pitchFamily="18" charset="0"/>
+                <a:cs typeface="Times New Roman" panose="02020603050405020304" pitchFamily="18" charset="0"/>
+              </a:rPr>
+              <a:t> = </a:t>
+            </a:r>
+            <a:r>
+              <a:rPr lang="en-IN" sz="1800" dirty="0" err="1">
+                <a:latin typeface="Times New Roman" panose="02020603050405020304" pitchFamily="18" charset="0"/>
+                <a:cs typeface="Times New Roman" panose="02020603050405020304" pitchFamily="18" charset="0"/>
+              </a:rPr>
+              <a:t>currentHour</a:t>
+            </a:r>
+            <a:r>
+              <a:rPr lang="en-IN" sz="1800" dirty="0">
+                <a:latin typeface="Times New Roman" panose="02020603050405020304" pitchFamily="18" charset="0"/>
+                <a:cs typeface="Times New Roman" panose="02020603050405020304" pitchFamily="18" charset="0"/>
+              </a:rPr>
+              <a:t> + </a:t>
+            </a:r>
+            <a:r>
+              <a:rPr lang="en-IN" sz="1800" dirty="0" err="1">
+                <a:latin typeface="Times New Roman" panose="02020603050405020304" pitchFamily="18" charset="0"/>
+                <a:cs typeface="Times New Roman" panose="02020603050405020304" pitchFamily="18" charset="0"/>
+              </a:rPr>
+              <a:t>nextHour</a:t>
+            </a:r>
+            <a:r>
+              <a:rPr lang="en-IN" sz="1800" dirty="0">
+                <a:latin typeface="Times New Roman" panose="02020603050405020304" pitchFamily="18" charset="0"/>
+                <a:cs typeface="Times New Roman" panose="02020603050405020304" pitchFamily="18" charset="0"/>
+              </a:rPr>
+              <a:t> + </a:t>
+            </a:r>
+            <a:r>
+              <a:rPr lang="en-IN" sz="1800" dirty="0" err="1">
+                <a:latin typeface="Times New Roman" panose="02020603050405020304" pitchFamily="18" charset="0"/>
+                <a:cs typeface="Times New Roman" panose="02020603050405020304" pitchFamily="18" charset="0"/>
+              </a:rPr>
+              <a:t>carryMinute</a:t>
+            </a:r>
+            <a:r>
+              <a:rPr lang="en-IN" sz="1800" dirty="0">
+                <a:latin typeface="Times New Roman" panose="02020603050405020304" pitchFamily="18" charset="0"/>
+                <a:cs typeface="Times New Roman" panose="02020603050405020304" pitchFamily="18" charset="0"/>
+              </a:rPr>
+              <a:t>;</a:t>
+            </a:r>
+            <a:br>
+              <a:rPr lang="en-IN" sz="1800" dirty="0">
+                <a:latin typeface="Times New Roman" panose="02020603050405020304" pitchFamily="18" charset="0"/>
+                <a:cs typeface="Times New Roman" panose="02020603050405020304" pitchFamily="18" charset="0"/>
+              </a:rPr>
+            </a:br>
+            <a:r>
+              <a:rPr lang="en-IN" sz="1800" dirty="0">
+                <a:latin typeface="Times New Roman" panose="02020603050405020304" pitchFamily="18" charset="0"/>
+                <a:cs typeface="Times New Roman" panose="02020603050405020304" pitchFamily="18" charset="0"/>
+              </a:rPr>
+              <a:t>        if(</a:t>
+            </a:r>
+            <a:r>
+              <a:rPr lang="en-IN" sz="1800" dirty="0" err="1">
+                <a:latin typeface="Times New Roman" panose="02020603050405020304" pitchFamily="18" charset="0"/>
+                <a:cs typeface="Times New Roman" panose="02020603050405020304" pitchFamily="18" charset="0"/>
+              </a:rPr>
+              <a:t>answerHour</a:t>
+            </a:r>
+            <a:r>
+              <a:rPr lang="en-IN" sz="1800" dirty="0">
+                <a:latin typeface="Times New Roman" panose="02020603050405020304" pitchFamily="18" charset="0"/>
+                <a:cs typeface="Times New Roman" panose="02020603050405020304" pitchFamily="18" charset="0"/>
+              </a:rPr>
+              <a:t>&gt;=24){</a:t>
+            </a:r>
+            <a:br>
+              <a:rPr lang="en-IN" sz="1800" dirty="0">
+                <a:latin typeface="Times New Roman" panose="02020603050405020304" pitchFamily="18" charset="0"/>
+                <a:cs typeface="Times New Roman" panose="02020603050405020304" pitchFamily="18" charset="0"/>
+              </a:rPr>
+            </a:br>
+            <a:r>
+              <a:rPr lang="en-IN" sz="1800" dirty="0">
+                <a:latin typeface="Times New Roman" panose="02020603050405020304" pitchFamily="18" charset="0"/>
+                <a:cs typeface="Times New Roman" panose="02020603050405020304" pitchFamily="18" charset="0"/>
+              </a:rPr>
+              <a:t>            </a:t>
+            </a:r>
+            <a:r>
+              <a:rPr lang="en-IN" sz="1800" dirty="0" err="1">
+                <a:latin typeface="Times New Roman" panose="02020603050405020304" pitchFamily="18" charset="0"/>
+                <a:cs typeface="Times New Roman" panose="02020603050405020304" pitchFamily="18" charset="0"/>
+              </a:rPr>
+              <a:t>answerHour</a:t>
+            </a:r>
+            <a:r>
+              <a:rPr lang="en-IN" sz="1800" dirty="0">
+                <a:latin typeface="Times New Roman" panose="02020603050405020304" pitchFamily="18" charset="0"/>
+                <a:cs typeface="Times New Roman" panose="02020603050405020304" pitchFamily="18" charset="0"/>
+              </a:rPr>
+              <a:t>-=24;</a:t>
+            </a:r>
+            <a:br>
+              <a:rPr lang="en-IN" sz="1800" dirty="0">
+                <a:latin typeface="Times New Roman" panose="02020603050405020304" pitchFamily="18" charset="0"/>
+                <a:cs typeface="Times New Roman" panose="02020603050405020304" pitchFamily="18" charset="0"/>
+              </a:rPr>
+            </a:br>
+            <a:r>
+              <a:rPr lang="en-IN" sz="1800" dirty="0">
+                <a:latin typeface="Times New Roman" panose="02020603050405020304" pitchFamily="18" charset="0"/>
+                <a:cs typeface="Times New Roman" panose="02020603050405020304" pitchFamily="18" charset="0"/>
+              </a:rPr>
+              <a:t>          </a:t>
+            </a:r>
+          </a:p>
+          <a:p>
+            <a:pPr marL="0" indent="0">
+              <a:buNone/>
+            </a:pPr>
+            <a:endParaRPr lang="en-IN" sz="1800" dirty="0">
+              <a:latin typeface="Times New Roman" panose="02020603050405020304" pitchFamily="18" charset="0"/>
+              <a:cs typeface="Times New Roman" panose="02020603050405020304" pitchFamily="18" charset="0"/>
+            </a:endParaRPr>
+          </a:p>
+          <a:p>
+            <a:pPr marL="0" indent="0">
+              <a:buNone/>
+            </a:pPr>
+            <a:r>
+              <a:rPr lang="en-IN" sz="1800" dirty="0">
+                <a:latin typeface="Times New Roman" panose="02020603050405020304" pitchFamily="18" charset="0"/>
+                <a:cs typeface="Times New Roman" panose="02020603050405020304" pitchFamily="18" charset="0"/>
+              </a:rPr>
+              <a:t>  </a:t>
+            </a:r>
+          </a:p>
+          <a:p>
+            <a:pPr marL="0" indent="0">
+              <a:buNone/>
+            </a:pPr>
+            <a:r>
+              <a:rPr lang="en-IN" sz="1800" dirty="0" err="1">
+                <a:latin typeface="Times New Roman" panose="02020603050405020304" pitchFamily="18" charset="0"/>
+                <a:cs typeface="Times New Roman" panose="02020603050405020304" pitchFamily="18" charset="0"/>
+              </a:rPr>
+              <a:t>isNextDay</a:t>
+            </a:r>
+            <a:r>
+              <a:rPr lang="en-IN" sz="1800" dirty="0">
+                <a:latin typeface="Times New Roman" panose="02020603050405020304" pitchFamily="18" charset="0"/>
+                <a:cs typeface="Times New Roman" panose="02020603050405020304" pitchFamily="18" charset="0"/>
+              </a:rPr>
+              <a:t>=true;</a:t>
+            </a:r>
+            <a:br>
+              <a:rPr lang="en-IN" sz="1800" dirty="0">
+                <a:latin typeface="Times New Roman" panose="02020603050405020304" pitchFamily="18" charset="0"/>
+                <a:cs typeface="Times New Roman" panose="02020603050405020304" pitchFamily="18" charset="0"/>
+              </a:rPr>
+            </a:br>
+            <a:r>
+              <a:rPr lang="en-IN" sz="1800" dirty="0">
+                <a:latin typeface="Times New Roman" panose="02020603050405020304" pitchFamily="18" charset="0"/>
+                <a:cs typeface="Times New Roman" panose="02020603050405020304" pitchFamily="18" charset="0"/>
+              </a:rPr>
+              <a:t>        }</a:t>
+            </a:r>
+          </a:p>
+          <a:p>
+            <a:pPr marL="0" indent="0">
+              <a:buNone/>
+            </a:pPr>
+            <a:r>
+              <a:rPr lang="en-IN" sz="1800" dirty="0">
+                <a:latin typeface="Times New Roman" panose="02020603050405020304" pitchFamily="18" charset="0"/>
+                <a:cs typeface="Times New Roman" panose="02020603050405020304" pitchFamily="18" charset="0"/>
+              </a:rPr>
+              <a:t>if(</a:t>
+            </a:r>
+            <a:r>
+              <a:rPr lang="en-IN" sz="1800" dirty="0" err="1">
+                <a:latin typeface="Times New Roman" panose="02020603050405020304" pitchFamily="18" charset="0"/>
+                <a:cs typeface="Times New Roman" panose="02020603050405020304" pitchFamily="18" charset="0"/>
+              </a:rPr>
+              <a:t>isNextDay</a:t>
+            </a:r>
+            <a:r>
+              <a:rPr lang="en-IN" sz="1800" dirty="0">
+                <a:latin typeface="Times New Roman" panose="02020603050405020304" pitchFamily="18" charset="0"/>
+                <a:cs typeface="Times New Roman" panose="02020603050405020304" pitchFamily="18" charset="0"/>
+              </a:rPr>
+              <a:t>){</a:t>
+            </a:r>
+            <a:br>
+              <a:rPr lang="en-IN" sz="1800" dirty="0">
+                <a:latin typeface="Times New Roman" panose="02020603050405020304" pitchFamily="18" charset="0"/>
+                <a:cs typeface="Times New Roman" panose="02020603050405020304" pitchFamily="18" charset="0"/>
+              </a:rPr>
+            </a:br>
+            <a:r>
+              <a:rPr lang="en-IN" sz="1800" dirty="0">
+                <a:latin typeface="Times New Roman" panose="02020603050405020304" pitchFamily="18" charset="0"/>
+                <a:cs typeface="Times New Roman" panose="02020603050405020304" pitchFamily="18" charset="0"/>
+              </a:rPr>
+              <a:t>            </a:t>
+            </a:r>
+            <a:r>
+              <a:rPr lang="en-IN" sz="1800" dirty="0" err="1">
+                <a:latin typeface="Times New Roman" panose="02020603050405020304" pitchFamily="18" charset="0"/>
+                <a:cs typeface="Times New Roman" panose="02020603050405020304" pitchFamily="18" charset="0"/>
+              </a:rPr>
+              <a:t>System.</a:t>
+            </a:r>
+            <a:r>
+              <a:rPr lang="en-IN" sz="1800" i="1" dirty="0" err="1">
+                <a:latin typeface="Times New Roman" panose="02020603050405020304" pitchFamily="18" charset="0"/>
+                <a:cs typeface="Times New Roman" panose="02020603050405020304" pitchFamily="18" charset="0"/>
+              </a:rPr>
+              <a:t>out</a:t>
+            </a:r>
+            <a:r>
+              <a:rPr lang="en-IN" sz="1800" dirty="0" err="1">
+                <a:latin typeface="Times New Roman" panose="02020603050405020304" pitchFamily="18" charset="0"/>
+                <a:cs typeface="Times New Roman" panose="02020603050405020304" pitchFamily="18" charset="0"/>
+              </a:rPr>
+              <a:t>.println</a:t>
+            </a:r>
+            <a:r>
+              <a:rPr lang="en-IN" sz="1800" dirty="0">
+                <a:latin typeface="Times New Roman" panose="02020603050405020304" pitchFamily="18" charset="0"/>
+                <a:cs typeface="Times New Roman" panose="02020603050405020304" pitchFamily="18" charset="0"/>
+              </a:rPr>
+              <a:t>("The Answer is: 	"+</a:t>
+            </a:r>
+            <a:r>
+              <a:rPr lang="en-IN" sz="1800" dirty="0" err="1">
+                <a:latin typeface="Times New Roman" panose="02020603050405020304" pitchFamily="18" charset="0"/>
+                <a:cs typeface="Times New Roman" panose="02020603050405020304" pitchFamily="18" charset="0"/>
+              </a:rPr>
+              <a:t>answerHour</a:t>
+            </a:r>
+            <a:r>
+              <a:rPr lang="en-IN" sz="1800" dirty="0">
+                <a:latin typeface="Times New Roman" panose="02020603050405020304" pitchFamily="18" charset="0"/>
+                <a:cs typeface="Times New Roman" panose="02020603050405020304" pitchFamily="18" charset="0"/>
+              </a:rPr>
+              <a:t>+" : "+</a:t>
+            </a:r>
+            <a:r>
+              <a:rPr lang="en-IN" sz="1800" dirty="0" err="1">
+                <a:latin typeface="Times New Roman" panose="02020603050405020304" pitchFamily="18" charset="0"/>
+                <a:cs typeface="Times New Roman" panose="02020603050405020304" pitchFamily="18" charset="0"/>
+              </a:rPr>
+              <a:t>answerMinute</a:t>
+            </a:r>
+            <a:r>
+              <a:rPr lang="en-IN" sz="1800" dirty="0">
+                <a:latin typeface="Times New Roman" panose="02020603050405020304" pitchFamily="18" charset="0"/>
+                <a:cs typeface="Times New Roman" panose="02020603050405020304" pitchFamily="18" charset="0"/>
+              </a:rPr>
+              <a:t>+</a:t>
+            </a:r>
+            <a:br>
+              <a:rPr lang="en-IN" sz="1800" dirty="0">
+                <a:latin typeface="Times New Roman" panose="02020603050405020304" pitchFamily="18" charset="0"/>
+                <a:cs typeface="Times New Roman" panose="02020603050405020304" pitchFamily="18" charset="0"/>
+              </a:rPr>
+            </a:br>
+            <a:r>
+              <a:rPr lang="en-IN" sz="1800" dirty="0">
+                <a:latin typeface="Times New Roman" panose="02020603050405020304" pitchFamily="18" charset="0"/>
+                <a:cs typeface="Times New Roman" panose="02020603050405020304" pitchFamily="18" charset="0"/>
+              </a:rPr>
+              <a:t>            " : "+</a:t>
+            </a:r>
+            <a:r>
+              <a:rPr lang="en-IN" sz="1800" dirty="0" err="1">
+                <a:latin typeface="Times New Roman" panose="02020603050405020304" pitchFamily="18" charset="0"/>
+                <a:cs typeface="Times New Roman" panose="02020603050405020304" pitchFamily="18" charset="0"/>
+              </a:rPr>
+              <a:t>answerSecond</a:t>
+            </a:r>
+            <a:r>
+              <a:rPr lang="en-IN" sz="1800" dirty="0">
+                <a:latin typeface="Times New Roman" panose="02020603050405020304" pitchFamily="18" charset="0"/>
+                <a:cs typeface="Times New Roman" panose="02020603050405020304" pitchFamily="18" charset="0"/>
+              </a:rPr>
+              <a:t> + " on the next day");</a:t>
+            </a:r>
+            <a:br>
+              <a:rPr lang="en-IN" sz="1800" dirty="0">
+                <a:latin typeface="Times New Roman" panose="02020603050405020304" pitchFamily="18" charset="0"/>
+                <a:cs typeface="Times New Roman" panose="02020603050405020304" pitchFamily="18" charset="0"/>
+              </a:rPr>
+            </a:br>
+            <a:r>
+              <a:rPr lang="en-IN" sz="1800" dirty="0">
+                <a:latin typeface="Times New Roman" panose="02020603050405020304" pitchFamily="18" charset="0"/>
+                <a:cs typeface="Times New Roman" panose="02020603050405020304" pitchFamily="18" charset="0"/>
+              </a:rPr>
+              <a:t>  }</a:t>
+            </a:r>
+            <a:br>
+              <a:rPr lang="en-IN" sz="1800" dirty="0">
+                <a:latin typeface="Times New Roman" panose="02020603050405020304" pitchFamily="18" charset="0"/>
+                <a:cs typeface="Times New Roman" panose="02020603050405020304" pitchFamily="18" charset="0"/>
+              </a:rPr>
+            </a:br>
+            <a:r>
+              <a:rPr lang="en-IN" sz="1800" dirty="0">
+                <a:latin typeface="Times New Roman" panose="02020603050405020304" pitchFamily="18" charset="0"/>
+                <a:cs typeface="Times New Roman" panose="02020603050405020304" pitchFamily="18" charset="0"/>
+              </a:rPr>
+              <a:t>  else{</a:t>
+            </a:r>
+            <a:br>
+              <a:rPr lang="en-IN" sz="1800" dirty="0">
+                <a:latin typeface="Times New Roman" panose="02020603050405020304" pitchFamily="18" charset="0"/>
+                <a:cs typeface="Times New Roman" panose="02020603050405020304" pitchFamily="18" charset="0"/>
+              </a:rPr>
+            </a:br>
+            <a:r>
+              <a:rPr lang="en-IN" sz="1800" dirty="0">
+                <a:latin typeface="Times New Roman" panose="02020603050405020304" pitchFamily="18" charset="0"/>
+                <a:cs typeface="Times New Roman" panose="02020603050405020304" pitchFamily="18" charset="0"/>
+              </a:rPr>
+              <a:t>            </a:t>
+            </a:r>
+            <a:r>
+              <a:rPr lang="en-IN" sz="1800" dirty="0" err="1">
+                <a:latin typeface="Times New Roman" panose="02020603050405020304" pitchFamily="18" charset="0"/>
+                <a:cs typeface="Times New Roman" panose="02020603050405020304" pitchFamily="18" charset="0"/>
+              </a:rPr>
+              <a:t>System.</a:t>
+            </a:r>
+            <a:r>
+              <a:rPr lang="en-IN" sz="1800" i="1" dirty="0" err="1">
+                <a:latin typeface="Times New Roman" panose="02020603050405020304" pitchFamily="18" charset="0"/>
+                <a:cs typeface="Times New Roman" panose="02020603050405020304" pitchFamily="18" charset="0"/>
+              </a:rPr>
+              <a:t>out</a:t>
+            </a:r>
+            <a:r>
+              <a:rPr lang="en-IN" sz="1800" dirty="0" err="1">
+                <a:latin typeface="Times New Roman" panose="02020603050405020304" pitchFamily="18" charset="0"/>
+                <a:cs typeface="Times New Roman" panose="02020603050405020304" pitchFamily="18" charset="0"/>
+              </a:rPr>
+              <a:t>.println</a:t>
+            </a:r>
+            <a:r>
+              <a:rPr lang="en-IN" sz="1800" dirty="0">
+                <a:latin typeface="Times New Roman" panose="02020603050405020304" pitchFamily="18" charset="0"/>
+                <a:cs typeface="Times New Roman" panose="02020603050405020304" pitchFamily="18" charset="0"/>
+              </a:rPr>
+              <a:t>("The Answer is: </a:t>
+            </a:r>
+          </a:p>
+          <a:p>
+            <a:pPr marL="0" indent="0">
+              <a:buNone/>
+            </a:pPr>
+            <a:r>
+              <a:rPr lang="en-IN" sz="1800" dirty="0">
+                <a:latin typeface="Times New Roman" panose="02020603050405020304" pitchFamily="18" charset="0"/>
+                <a:cs typeface="Times New Roman" panose="02020603050405020304" pitchFamily="18" charset="0"/>
+              </a:rPr>
+              <a:t>              "+</a:t>
+            </a:r>
+            <a:r>
+              <a:rPr lang="en-IN" sz="1800" dirty="0" err="1">
+                <a:latin typeface="Times New Roman" panose="02020603050405020304" pitchFamily="18" charset="0"/>
+                <a:cs typeface="Times New Roman" panose="02020603050405020304" pitchFamily="18" charset="0"/>
+              </a:rPr>
+              <a:t>answerHour</a:t>
+            </a:r>
+            <a:r>
+              <a:rPr lang="en-IN" sz="1800" dirty="0">
+                <a:latin typeface="Times New Roman" panose="02020603050405020304" pitchFamily="18" charset="0"/>
+                <a:cs typeface="Times New Roman" panose="02020603050405020304" pitchFamily="18" charset="0"/>
+              </a:rPr>
+              <a:t>+" : "+</a:t>
+            </a:r>
+            <a:r>
+              <a:rPr lang="en-IN" sz="1800" dirty="0" err="1">
+                <a:latin typeface="Times New Roman" panose="02020603050405020304" pitchFamily="18" charset="0"/>
+                <a:cs typeface="Times New Roman" panose="02020603050405020304" pitchFamily="18" charset="0"/>
+              </a:rPr>
+              <a:t>answerMinute</a:t>
+            </a:r>
+            <a:r>
+              <a:rPr lang="en-IN" sz="1800" dirty="0">
+                <a:latin typeface="Times New Roman" panose="02020603050405020304" pitchFamily="18" charset="0"/>
+                <a:cs typeface="Times New Roman" panose="02020603050405020304" pitchFamily="18" charset="0"/>
+              </a:rPr>
+              <a:t>+</a:t>
+            </a:r>
+            <a:br>
+              <a:rPr lang="en-IN" sz="1800" dirty="0">
+                <a:latin typeface="Times New Roman" panose="02020603050405020304" pitchFamily="18" charset="0"/>
+                <a:cs typeface="Times New Roman" panose="02020603050405020304" pitchFamily="18" charset="0"/>
+              </a:rPr>
+            </a:br>
+            <a:r>
+              <a:rPr lang="en-IN" sz="1800" dirty="0">
+                <a:latin typeface="Times New Roman" panose="02020603050405020304" pitchFamily="18" charset="0"/>
+                <a:cs typeface="Times New Roman" panose="02020603050405020304" pitchFamily="18" charset="0"/>
+              </a:rPr>
+              <a:t>                    " : "+</a:t>
+            </a:r>
+            <a:r>
+              <a:rPr lang="en-IN" sz="1800" dirty="0" err="1">
+                <a:latin typeface="Times New Roman" panose="02020603050405020304" pitchFamily="18" charset="0"/>
+                <a:cs typeface="Times New Roman" panose="02020603050405020304" pitchFamily="18" charset="0"/>
+              </a:rPr>
+              <a:t>answerSecond</a:t>
+            </a:r>
+            <a:r>
+              <a:rPr lang="en-IN" sz="1800" dirty="0">
+                <a:latin typeface="Times New Roman" panose="02020603050405020304" pitchFamily="18" charset="0"/>
+                <a:cs typeface="Times New Roman" panose="02020603050405020304" pitchFamily="18" charset="0"/>
+              </a:rPr>
+              <a:t> + "  on the same day");</a:t>
+            </a:r>
+            <a:br>
+              <a:rPr lang="en-IN" sz="1800" dirty="0">
+                <a:latin typeface="Times New Roman" panose="02020603050405020304" pitchFamily="18" charset="0"/>
+                <a:cs typeface="Times New Roman" panose="02020603050405020304" pitchFamily="18" charset="0"/>
+              </a:rPr>
+            </a:br>
+            <a:r>
+              <a:rPr lang="en-IN" sz="1800" dirty="0">
+                <a:latin typeface="Times New Roman" panose="02020603050405020304" pitchFamily="18" charset="0"/>
+                <a:cs typeface="Times New Roman" panose="02020603050405020304" pitchFamily="18" charset="0"/>
+              </a:rPr>
+              <a:t>       }</a:t>
+            </a:r>
+            <a:br>
+              <a:rPr lang="en-IN" sz="1800" dirty="0">
+                <a:latin typeface="Times New Roman" panose="02020603050405020304" pitchFamily="18" charset="0"/>
+                <a:cs typeface="Times New Roman" panose="02020603050405020304" pitchFamily="18" charset="0"/>
+              </a:rPr>
+            </a:br>
+            <a:r>
+              <a:rPr lang="en-IN" sz="1800" dirty="0">
+                <a:latin typeface="Times New Roman" panose="02020603050405020304" pitchFamily="18" charset="0"/>
+                <a:cs typeface="Times New Roman" panose="02020603050405020304" pitchFamily="18" charset="0"/>
+              </a:rPr>
+              <a:t>    }</a:t>
+            </a:r>
+            <a:br>
+              <a:rPr lang="en-IN" sz="1800" dirty="0">
+                <a:latin typeface="Times New Roman" panose="02020603050405020304" pitchFamily="18" charset="0"/>
+                <a:cs typeface="Times New Roman" panose="02020603050405020304" pitchFamily="18" charset="0"/>
+              </a:rPr>
+            </a:br>
+            <a:r>
+              <a:rPr lang="en-IN" sz="1800" dirty="0">
+                <a:latin typeface="Times New Roman" panose="02020603050405020304" pitchFamily="18" charset="0"/>
+                <a:cs typeface="Times New Roman" panose="02020603050405020304" pitchFamily="18" charset="0"/>
+              </a:rPr>
+              <a:t>}</a:t>
+            </a:r>
+            <a:br>
+              <a:rPr lang="en-IN" sz="1800" dirty="0">
+                <a:latin typeface="Times New Roman" panose="02020603050405020304" pitchFamily="18" charset="0"/>
+                <a:cs typeface="Times New Roman" panose="02020603050405020304" pitchFamily="18" charset="0"/>
+              </a:rPr>
+            </a:br>
+            <a:endParaRPr lang="en-IN" sz="1800" dirty="0">
+              <a:latin typeface="Times New Roman" panose="02020603050405020304" pitchFamily="18" charset="0"/>
+              <a:cs typeface="Times New Roman" panose="02020603050405020304" pitchFamily="18" charset="0"/>
+            </a:endParaRPr>
+          </a:p>
+          <a:p>
+            <a:pPr marL="0" indent="0">
+              <a:buNone/>
+            </a:pPr>
+            <a:endParaRPr lang="en-US" b="1" dirty="0">
+              <a:latin typeface="Times New Roman" panose="02020603050405020304" pitchFamily="18" charset="0"/>
+            </a:endParaRPr>
+          </a:p>
+        </p:txBody>
+      </p:sp>
+    </p:spTree>
+    <p:extLst>
+      <p:ext uri="{BB962C8B-B14F-4D97-AF65-F5344CB8AC3E}">
+        <p14:creationId xmlns:p14="http://schemas.microsoft.com/office/powerpoint/2010/main" val="2283192836"/>
       </p:ext>
     </p:extLst>
   </p:cSld>
@@ -9001,7 +11157,13 @@
   <p:cSld>
     <p:spTree>
       <p:nvGrpSpPr>
-        <p:cNvPr id="1" name=""/>
+        <p:cNvPr id="1" name="">
+          <a:extLst>
+            <a:ext uri="{FF2B5EF4-FFF2-40B4-BE49-F238E27FC236}">
+              <a16:creationId xmlns:a16="http://schemas.microsoft.com/office/drawing/2014/main" id="{C7861A59-3E07-4711-8D5F-3198C3B64637}"/>
+            </a:ext>
+          </a:extLst>
+        </p:cNvPr>
         <p:cNvGrpSpPr/>
         <p:nvPr/>
       </p:nvGrpSpPr>
@@ -9018,7 +11180,7 @@
           <p:cNvPr id="3" name="Content Placeholder 2">
             <a:extLst>
               <a:ext uri="{FF2B5EF4-FFF2-40B4-BE49-F238E27FC236}">
-                <a16:creationId xmlns:a16="http://schemas.microsoft.com/office/drawing/2014/main" id="{8B6AAB50-F240-5F02-95B1-FD76C8C08ED8}"/>
+                <a16:creationId xmlns:a16="http://schemas.microsoft.com/office/drawing/2014/main" id="{D0576FAB-B8E8-6CFF-F563-D300BA11CF22}"/>
               </a:ext>
             </a:extLst>
           </p:cNvPr>
@@ -9031,187 +11193,47 @@
         </p:nvSpPr>
         <p:spPr>
           <a:xfrm>
-            <a:off x="565265" y="448887"/>
-            <a:ext cx="11155680" cy="6001789"/>
+            <a:off x="609600" y="753533"/>
+            <a:ext cx="11109960" cy="5817863"/>
           </a:xfrm>
         </p:spPr>
         <p:txBody>
-          <a:bodyPr numCol="2">
-            <a:normAutofit/>
-          </a:bodyPr>
+          <a:bodyPr/>
           <a:lstStyle/>
           <a:p>
-            <a:pPr marL="457200" lvl="1" indent="0">
+            <a:pPr marL="0" indent="0">
               <a:buNone/>
             </a:pPr>
-            <a:r>
-              <a:rPr lang="en-IN" dirty="0"/>
-              <a:t>answerHour = currentHour + nextHour + carryMinute;</a:t>
-            </a:r>
-            <a:br>
-              <a:rPr lang="en-IN" dirty="0"/>
-            </a:br>
-            <a:r>
-              <a:rPr lang="en-IN" dirty="0"/>
-              <a:t>        if(answerHour&gt;=24){</a:t>
-            </a:r>
-            <a:br>
-              <a:rPr lang="en-IN" dirty="0"/>
-            </a:br>
-            <a:r>
-              <a:rPr lang="en-IN" dirty="0"/>
-              <a:t>            answerHour-=24;</a:t>
-            </a:r>
-            <a:br>
-              <a:rPr lang="en-IN" dirty="0"/>
-            </a:br>
-            <a:r>
-              <a:rPr lang="en-IN" dirty="0"/>
-              <a:t>            isNextDay=true;</a:t>
-            </a:r>
-            <a:br>
-              <a:rPr lang="en-IN" dirty="0"/>
-            </a:br>
-            <a:r>
-              <a:rPr lang="en-IN" dirty="0"/>
-              <a:t>        }</a:t>
-            </a:r>
-            <a:br>
-              <a:rPr lang="en-IN" dirty="0"/>
-            </a:br>
-            <a:r>
-              <a:rPr lang="en-IN" dirty="0"/>
-              <a:t>        if(isNextDay){</a:t>
-            </a:r>
-            <a:br>
-              <a:rPr lang="en-IN" dirty="0"/>
-            </a:br>
-            <a:r>
-              <a:rPr lang="en-IN" dirty="0"/>
-              <a:t>            System.</a:t>
-            </a:r>
-            <a:r>
-              <a:rPr lang="en-IN" i="1" dirty="0"/>
-              <a:t>out</a:t>
-            </a:r>
-            <a:r>
-              <a:rPr lang="en-IN" dirty="0"/>
-              <a:t>.println("The Answer is: "+answerHour+" : "+answerMinute+</a:t>
-            </a:r>
-            <a:br>
-              <a:rPr lang="en-IN" dirty="0"/>
-            </a:br>
-            <a:r>
-              <a:rPr lang="en-IN" dirty="0"/>
-              <a:t>            " : "+answerSecond + " on the next day");</a:t>
-            </a:r>
-            <a:br>
-              <a:rPr lang="en-IN" dirty="0"/>
-            </a:br>
-            <a:r>
-              <a:rPr lang="en-IN" dirty="0"/>
-              <a:t>        }</a:t>
-            </a:r>
-            <a:br>
-              <a:rPr lang="en-IN" dirty="0"/>
-            </a:br>
-            <a:r>
-              <a:rPr lang="en-IN" dirty="0"/>
-              <a:t>        else{</a:t>
-            </a:r>
-            <a:br>
-              <a:rPr lang="en-IN" dirty="0"/>
-            </a:br>
-            <a:r>
-              <a:rPr lang="en-IN" dirty="0"/>
-              <a:t>            System.</a:t>
-            </a:r>
-            <a:r>
-              <a:rPr lang="en-IN" i="1" dirty="0"/>
-              <a:t>out</a:t>
-            </a:r>
-            <a:r>
-              <a:rPr lang="en-IN" dirty="0"/>
-              <a:t>.println("The Answer is: "+answerHour+" : "+answerMinute+</a:t>
-            </a:r>
-            <a:br>
-              <a:rPr lang="en-IN" dirty="0"/>
-            </a:br>
-            <a:r>
-              <a:rPr lang="en-IN" dirty="0"/>
-              <a:t>                    " : "+answerSecond + " </a:t>
-            </a:r>
-          </a:p>
-          <a:p>
-            <a:pPr marL="457200" lvl="1" indent="0">
+            <a:endParaRPr lang="en-US" cap="all" dirty="0">
+              <a:latin typeface="Times New Roman" panose="02020603050405020304" pitchFamily="18" charset="0"/>
+            </a:endParaRPr>
+          </a:p>
+          <a:p>
+            <a:pPr marL="0" indent="0">
               <a:buNone/>
             </a:pPr>
-            <a:endParaRPr lang="en-IN" dirty="0"/>
-          </a:p>
-          <a:p>
-            <a:pPr marL="457200" lvl="1" indent="0">
-              <a:buNone/>
-            </a:pPr>
-            <a:r>
-              <a:rPr lang="en-IN" dirty="0"/>
-              <a:t>on the same day");</a:t>
-            </a:r>
-            <a:br>
-              <a:rPr lang="en-IN" dirty="0"/>
-            </a:br>
-            <a:r>
-              <a:rPr lang="en-IN" dirty="0"/>
-              <a:t>        }</a:t>
-            </a:r>
-            <a:br>
-              <a:rPr lang="en-IN" dirty="0"/>
-            </a:br>
-            <a:r>
-              <a:rPr lang="en-IN" dirty="0"/>
-              <a:t>    }</a:t>
-            </a:r>
-            <a:br>
-              <a:rPr lang="en-IN" dirty="0"/>
-            </a:br>
-            <a:r>
-              <a:rPr lang="en-IN" dirty="0"/>
-              <a:t>}</a:t>
-            </a:r>
-            <a:br>
-              <a:rPr lang="en-IN" dirty="0"/>
-            </a:br>
-            <a:endParaRPr lang="en-IN" dirty="0"/>
-          </a:p>
-          <a:p>
-            <a:pPr marL="0" indent="0">
-              <a:buNone/>
-            </a:pPr>
-            <a:endParaRPr lang="en-IN" dirty="0"/>
+            <a:r>
+              <a:rPr lang="en-US" b="1" dirty="0">
+                <a:latin typeface="Times New Roman" panose="02020603050405020304" pitchFamily="18" charset="0"/>
+              </a:rPr>
+              <a:t>Output for Project2 is : </a:t>
+            </a:r>
           </a:p>
         </p:txBody>
       </p:sp>
     </p:spTree>
     <p:extLst>
       <p:ext uri="{BB962C8B-B14F-4D97-AF65-F5344CB8AC3E}">
-        <p14:creationId xmlns:p14="http://schemas.microsoft.com/office/powerpoint/2010/main" val="3072426665"/>
+        <p14:creationId xmlns:p14="http://schemas.microsoft.com/office/powerpoint/2010/main" val="3129963740"/>
       </p:ext>
     </p:extLst>
   </p:cSld>
   <p:clrMapOvr>
     <a:masterClrMapping/>
   </p:clrMapOvr>
-  <mc:AlternateContent xmlns:mc="http://schemas.openxmlformats.org/markup-compatibility/2006" xmlns:p14="http://schemas.microsoft.com/office/powerpoint/2010/main">
-    <mc:Choice Requires="p14">
-      <p:transition spd="med" p14:dur="700">
-        <p:fade/>
-      </p:transition>
-    </mc:Choice>
-    <mc:Fallback xmlns="">
-      <p:transition spd="med">
-        <p:fade/>
-      </p:transition>
-    </mc:Fallback>
-  </mc:AlternateContent>
+  <p:transition spd="slow" advClick="0" advTm="5000">
+    <p:fade/>
+  </p:transition>
 </p:sld>
 </file>
 
